--- a/slides/chapter_6_joins.pptx
+++ b/slides/chapter_6_joins.pptx
@@ -5,40 +5,41 @@
     <p:sldMasterId id="2147483660" r:id="rId1"/>
   </p:sldMasterIdLst>
   <p:notesMasterIdLst>
-    <p:notesMasterId r:id="rId33"/>
+    <p:notesMasterId r:id="rId34"/>
   </p:notesMasterIdLst>
   <p:sldIdLst>
-    <p:sldId id="256" r:id="rId2"/>
-    <p:sldId id="257" r:id="rId3"/>
-    <p:sldId id="306" r:id="rId4"/>
-    <p:sldId id="362" r:id="rId5"/>
-    <p:sldId id="258" r:id="rId6"/>
-    <p:sldId id="364" r:id="rId7"/>
-    <p:sldId id="369" r:id="rId8"/>
-    <p:sldId id="371" r:id="rId9"/>
-    <p:sldId id="333" r:id="rId10"/>
-    <p:sldId id="370" r:id="rId11"/>
-    <p:sldId id="304" r:id="rId12"/>
+    <p:sldId id="374" r:id="rId2"/>
+    <p:sldId id="256" r:id="rId3"/>
+    <p:sldId id="257" r:id="rId4"/>
+    <p:sldId id="306" r:id="rId5"/>
+    <p:sldId id="362" r:id="rId6"/>
+    <p:sldId id="258" r:id="rId7"/>
+    <p:sldId id="364" r:id="rId8"/>
+    <p:sldId id="369" r:id="rId9"/>
+    <p:sldId id="371" r:id="rId10"/>
+    <p:sldId id="333" r:id="rId11"/>
+    <p:sldId id="370" r:id="rId12"/>
     <p:sldId id="353" r:id="rId13"/>
-    <p:sldId id="305" r:id="rId14"/>
-    <p:sldId id="363" r:id="rId15"/>
-    <p:sldId id="334" r:id="rId16"/>
-    <p:sldId id="307" r:id="rId17"/>
-    <p:sldId id="308" r:id="rId18"/>
-    <p:sldId id="310" r:id="rId19"/>
-    <p:sldId id="354" r:id="rId20"/>
+    <p:sldId id="304" r:id="rId14"/>
+    <p:sldId id="305" r:id="rId15"/>
+    <p:sldId id="363" r:id="rId16"/>
+    <p:sldId id="334" r:id="rId17"/>
+    <p:sldId id="307" r:id="rId18"/>
+    <p:sldId id="308" r:id="rId19"/>
+    <p:sldId id="310" r:id="rId20"/>
     <p:sldId id="367" r:id="rId21"/>
-    <p:sldId id="366" r:id="rId22"/>
-    <p:sldId id="355" r:id="rId23"/>
-    <p:sldId id="373" r:id="rId24"/>
-    <p:sldId id="356" r:id="rId25"/>
-    <p:sldId id="357" r:id="rId26"/>
-    <p:sldId id="358" r:id="rId27"/>
-    <p:sldId id="359" r:id="rId28"/>
-    <p:sldId id="360" r:id="rId29"/>
-    <p:sldId id="368" r:id="rId30"/>
-    <p:sldId id="372" r:id="rId31"/>
-    <p:sldId id="365" r:id="rId32"/>
+    <p:sldId id="354" r:id="rId22"/>
+    <p:sldId id="366" r:id="rId23"/>
+    <p:sldId id="355" r:id="rId24"/>
+    <p:sldId id="373" r:id="rId25"/>
+    <p:sldId id="356" r:id="rId26"/>
+    <p:sldId id="357" r:id="rId27"/>
+    <p:sldId id="358" r:id="rId28"/>
+    <p:sldId id="359" r:id="rId29"/>
+    <p:sldId id="360" r:id="rId30"/>
+    <p:sldId id="368" r:id="rId31"/>
+    <p:sldId id="372" r:id="rId32"/>
+    <p:sldId id="365" r:id="rId33"/>
   </p:sldIdLst>
   <p:sldSz cx="12192000" cy="6858000"/>
   <p:notesSz cx="6858000" cy="9144000"/>
@@ -587,7 +588,7 @@
             <a:fld id="{D6227277-B0D8-4809-8878-D1ED6D19D374}" type="slidenum">
               <a:rPr lang="en-US"/>
               <a:pPr/>
-              <a:t>3</a:t>
+              <a:t>4</a:t>
             </a:fld>
             <a:endParaRPr lang="en-US"/>
           </a:p>
@@ -704,7 +705,7 @@
             <a:fld id="{D6227277-B0D8-4809-8878-D1ED6D19D374}" type="slidenum">
               <a:rPr lang="en-US"/>
               <a:pPr/>
-              <a:t>9</a:t>
+              <a:t>10</a:t>
             </a:fld>
             <a:endParaRPr lang="en-US"/>
           </a:p>
@@ -821,7 +822,7 @@
             <a:fld id="{D6227277-B0D8-4809-8878-D1ED6D19D374}" type="slidenum">
               <a:rPr lang="en-US"/>
               <a:pPr/>
-              <a:t>11</a:t>
+              <a:t>13</a:t>
             </a:fld>
             <a:endParaRPr lang="en-US"/>
           </a:p>
@@ -938,7 +939,7 @@
             <a:fld id="{D6227277-B0D8-4809-8878-D1ED6D19D374}" type="slidenum">
               <a:rPr lang="en-US"/>
               <a:pPr/>
-              <a:t>13</a:t>
+              <a:t>14</a:t>
             </a:fld>
             <a:endParaRPr lang="en-US"/>
           </a:p>
@@ -1055,7 +1056,7 @@
             <a:fld id="{D6227277-B0D8-4809-8878-D1ED6D19D374}" type="slidenum">
               <a:rPr lang="en-US"/>
               <a:pPr/>
-              <a:t>15</a:t>
+              <a:t>16</a:t>
             </a:fld>
             <a:endParaRPr lang="en-US"/>
           </a:p>
@@ -1172,7 +1173,7 @@
             <a:fld id="{D6227277-B0D8-4809-8878-D1ED6D19D374}" type="slidenum">
               <a:rPr lang="en-US"/>
               <a:pPr/>
-              <a:t>16</a:t>
+              <a:t>17</a:t>
             </a:fld>
             <a:endParaRPr lang="en-US"/>
           </a:p>
@@ -1289,7 +1290,7 @@
             <a:fld id="{D6227277-B0D8-4809-8878-D1ED6D19D374}" type="slidenum">
               <a:rPr lang="en-US"/>
               <a:pPr/>
-              <a:t>17</a:t>
+              <a:t>18</a:t>
             </a:fld>
             <a:endParaRPr lang="en-US"/>
           </a:p>
@@ -1406,7 +1407,7 @@
             <a:fld id="{D6227277-B0D8-4809-8878-D1ED6D19D374}" type="slidenum">
               <a:rPr lang="en-US"/>
               <a:pPr/>
-              <a:t>18</a:t>
+              <a:t>19</a:t>
             </a:fld>
             <a:endParaRPr lang="en-US"/>
           </a:p>
@@ -4943,7 +4944,7 @@
           <p:cNvPr id="2" name="Title 1">
             <a:extLst>
               <a:ext uri="{FF2B5EF4-FFF2-40B4-BE49-F238E27FC236}">
-                <a16:creationId xmlns:a16="http://schemas.microsoft.com/office/drawing/2014/main" id="{15BAC134-34A8-CA43-F3C7-A4A8EC7DE4C2}"/>
+                <a16:creationId xmlns:a16="http://schemas.microsoft.com/office/drawing/2014/main" id="{0425B2DD-CCAF-56F3-68ED-3A98961D85B3}"/>
               </a:ext>
             </a:extLst>
           </p:cNvPr>
@@ -4951,7 +4952,7 @@
             <a:spLocks noGrp="1"/>
           </p:cNvSpPr>
           <p:nvPr>
-            <p:ph type="ctrTitle"/>
+            <p:ph type="title"/>
           </p:nvPr>
         </p:nvSpPr>
         <p:spPr/>
@@ -4959,16 +4960,19 @@
           <a:bodyPr/>
           <a:lstStyle/>
           <a:p>
-            <a:endParaRPr lang="en-US"/>
-          </a:p>
-        </p:txBody>
-      </p:sp>
-      <p:sp>
-        <p:nvSpPr>
-          <p:cNvPr id="3" name="Subtitle 2">
+            <a:r>
+              <a:rPr lang="en-US" dirty="0"/>
+              <a:t>Housekeeping</a:t>
+            </a:r>
+          </a:p>
+        </p:txBody>
+      </p:sp>
+      <p:sp>
+        <p:nvSpPr>
+          <p:cNvPr id="3" name="Content Placeholder 2">
             <a:extLst>
               <a:ext uri="{FF2B5EF4-FFF2-40B4-BE49-F238E27FC236}">
-                <a16:creationId xmlns:a16="http://schemas.microsoft.com/office/drawing/2014/main" id="{9F119B4B-3B42-508B-8522-F29D6676AF2C}"/>
+                <a16:creationId xmlns:a16="http://schemas.microsoft.com/office/drawing/2014/main" id="{3F650A98-FD55-30E1-4FE4-46BF20207B43}"/>
               </a:ext>
             </a:extLst>
           </p:cNvPr>
@@ -4976,7 +4980,7 @@
             <a:spLocks noGrp="1"/>
           </p:cNvSpPr>
           <p:nvPr>
-            <p:ph type="subTitle" idx="1"/>
+            <p:ph idx="1"/>
           </p:nvPr>
         </p:nvSpPr>
         <p:spPr/>
@@ -4984,14 +4988,55 @@
           <a:bodyPr/>
           <a:lstStyle/>
           <a:p>
-            <a:endParaRPr lang="en-US"/>
+            <a:r>
+              <a:rPr lang="en-US" dirty="0"/>
+              <a:t>Today:</a:t>
+            </a:r>
+          </a:p>
+          <a:p>
+            <a:pPr lvl="1"/>
+            <a:r>
+              <a:rPr lang="en-US" dirty="0"/>
+              <a:t>Data warehousing and ETL theory. </a:t>
+            </a:r>
+          </a:p>
+          <a:p>
+            <a:pPr lvl="1"/>
+            <a:r>
+              <a:rPr lang="en-US" dirty="0"/>
+              <a:t>Joining datasets. </a:t>
+            </a:r>
+          </a:p>
+          <a:p>
+            <a:r>
+              <a:rPr lang="en-US" dirty="0"/>
+              <a:t>Next time – we’ll hold some time for </a:t>
+            </a:r>
+            <a:r>
+              <a:rPr lang="en-US" dirty="0" err="1"/>
+              <a:t>q+a</a:t>
+            </a:r>
+            <a:r>
+              <a:rPr lang="en-US" dirty="0"/>
+              <a:t> for assignment stuff. </a:t>
+            </a:r>
+          </a:p>
+          <a:p>
+            <a:r>
+              <a:rPr lang="en-US" dirty="0"/>
+              <a:t>There’s a holiday a week from today. </a:t>
+            </a:r>
+          </a:p>
+          <a:p>
+            <a:pPr lvl="1"/>
+            <a:endParaRPr lang="en-US" dirty="0"/>
           </a:p>
         </p:txBody>
       </p:sp>
     </p:spTree>
     <p:extLst>
       <p:ext uri="{BB962C8B-B14F-4D97-AF65-F5344CB8AC3E}">
-        <p14:creationId xmlns:p14="http://schemas.microsoft.com/office/powerpoint/2010/main" val="3684202241"/>
+        <p14:creationId xmlns:p14="http://schemas.microsoft.com/office/powerpoint/2010/main" val="749220695"/>
       </p:ext>
     </p:extLst>
   </p:cSld>
@@ -5020,13 +5065,7 @@
       </p:grpSpPr>
       <p:sp>
         <p:nvSpPr>
-          <p:cNvPr id="2" name="Title 1">
-            <a:extLst>
-              <a:ext uri="{FF2B5EF4-FFF2-40B4-BE49-F238E27FC236}">
-                <a16:creationId xmlns:a16="http://schemas.microsoft.com/office/drawing/2014/main" id="{AD339071-9DC0-1157-7B36-EE03960E292A}"/>
-              </a:ext>
-            </a:extLst>
-          </p:cNvPr>
+          <p:cNvPr id="18436" name="Title 1"/>
           <p:cNvSpPr>
             <a:spLocks noGrp="1"/>
           </p:cNvSpPr>
@@ -5036,25 +5075,22 @@
         </p:nvSpPr>
         <p:spPr/>
         <p:txBody>
-          <a:bodyPr/>
-          <a:lstStyle/>
-          <a:p>
-            <a:r>
-              <a:rPr lang="en-US" dirty="0"/>
-              <a:t>Our Data Life</a:t>
-            </a:r>
-          </a:p>
-        </p:txBody>
-      </p:sp>
-      <p:sp>
-        <p:nvSpPr>
-          <p:cNvPr id="3" name="Content Placeholder 2">
-            <a:extLst>
-              <a:ext uri="{FF2B5EF4-FFF2-40B4-BE49-F238E27FC236}">
-                <a16:creationId xmlns:a16="http://schemas.microsoft.com/office/drawing/2014/main" id="{0E1703C4-7FD2-B791-60AA-ADF73735B763}"/>
-              </a:ext>
-            </a:extLst>
-          </p:cNvPr>
+          <a:bodyPr>
+            <a:noAutofit/>
+          </a:bodyPr>
+          <a:lstStyle/>
+          <a:p>
+            <a:pPr eaLnBrk="1" hangingPunct="1"/>
+            <a:r>
+              <a:rPr lang="en-US" sz="3600" dirty="0"/>
+              <a:t>Data Management</a:t>
+            </a:r>
+          </a:p>
+        </p:txBody>
+      </p:sp>
+      <p:sp>
+        <p:nvSpPr>
+          <p:cNvPr id="3" name="Content Placeholder 2"/>
           <p:cNvSpPr>
             <a:spLocks noGrp="1"/>
           </p:cNvSpPr>
@@ -5062,81 +5098,64 @@
             <p:ph idx="1"/>
           </p:nvPr>
         </p:nvSpPr>
-        <p:spPr>
-          <a:xfrm>
-            <a:off x="1451579" y="1933904"/>
-            <a:ext cx="9603275" cy="4119578"/>
-          </a:xfrm>
-        </p:spPr>
-        <p:txBody>
-          <a:bodyPr/>
-          <a:lstStyle/>
-          <a:p>
-            <a:r>
-              <a:rPr lang="en-US" dirty="0"/>
-              <a:t>At this point we’ve touched on most of the infrastructure related to our data. </a:t>
-            </a:r>
-          </a:p>
-          <a:p>
-            <a:r>
-              <a:rPr lang="en-US" dirty="0"/>
-              <a:t>Data is generated in many places, include those that process transactions – OLTP. </a:t>
+        <p:spPr/>
+        <p:txBody>
+          <a:bodyPr>
+            <a:normAutofit fontScale="77500" lnSpcReduction="20000"/>
+          </a:bodyPr>
+          <a:lstStyle/>
+          <a:p>
+            <a:r>
+              <a:rPr lang="en-US" sz="2600" dirty="0"/>
+              <a:t>Entity: person, places, things, events</a:t>
+            </a:r>
+          </a:p>
+          <a:p>
+            <a:r>
+              <a:rPr lang="en-US" sz="2600" dirty="0"/>
+              <a:t>Instance: a single occurrence of an entity; represented as a record in a database</a:t>
+            </a:r>
+          </a:p>
+          <a:p>
+            <a:r>
+              <a:rPr lang="en-US" sz="2600" dirty="0"/>
+              <a:t>Entities have relationships with one another: either 1:1, 1:M, M:N</a:t>
+            </a:r>
+          </a:p>
+          <a:p>
+            <a:r>
+              <a:rPr lang="en-US" sz="2600" dirty="0"/>
+              <a:t>Primary key: attribute that uniquely identifies each instance of the entity; used to create a data structure called an index for fast data retrieval and searches </a:t>
             </a:r>
           </a:p>
           <a:p>
             <a:pPr lvl="1"/>
             <a:r>
-              <a:rPr lang="en-US" dirty="0"/>
-              <a:t>Each of these system normally has a DB that stores those transactions. </a:t>
-            </a:r>
-          </a:p>
-          <a:p>
-            <a:r>
-              <a:rPr lang="en-US" dirty="0"/>
-              <a:t>That data is consolidated and cleaned in an ETL process and stored centrally. </a:t>
-            </a:r>
-          </a:p>
-          <a:p>
-            <a:r>
-              <a:rPr lang="en-US" dirty="0"/>
-              <a:t>We connect to that warehouse to get data. </a:t>
-            </a:r>
-          </a:p>
-          <a:p>
-            <a:pPr lvl="1"/>
-            <a:r>
-              <a:rPr lang="en-US" dirty="0"/>
-              <a:t>The database uses entity-relationship model to store data on many different things. </a:t>
-            </a:r>
-          </a:p>
-          <a:p>
-            <a:pPr lvl="1"/>
-            <a:r>
-              <a:rPr lang="en-US" dirty="0"/>
-              <a:t>We need to navigate the </a:t>
-            </a:r>
-            <a:r>
-              <a:rPr lang="en-US" dirty="0" err="1"/>
-              <a:t>db</a:t>
-            </a:r>
-            <a:r>
-              <a:rPr lang="en-US" dirty="0"/>
-              <a:t> structure and join to make useful data. </a:t>
-            </a:r>
-          </a:p>
-          <a:p>
-            <a:pPr lvl="1"/>
-            <a:r>
-              <a:rPr lang="en-US" dirty="0"/>
-              <a:t>We can get data on almost anything, but it comes separated. (CSVs we use are the ~output). </a:t>
-            </a:r>
+              <a:rPr lang="en-US" sz="2200" dirty="0"/>
+              <a:t>Composite primary key: primary key that consists of more than one attribute; used when none of the individual attributes alone can uniquely identify each instance of the entity. (Not critical). </a:t>
+            </a:r>
+          </a:p>
+          <a:p>
+            <a:r>
+              <a:rPr lang="en-US" sz="2600" dirty="0"/>
+              <a:t>Foreign key: a primary key of a related entity</a:t>
+            </a:r>
+          </a:p>
+          <a:p>
+            <a:endParaRPr lang="en-US" sz="2800" dirty="0"/>
+          </a:p>
+          <a:p>
+            <a:endParaRPr lang="en-US" dirty="0"/>
+          </a:p>
+          <a:p>
+            <a:endParaRPr lang="en-US" dirty="0"/>
           </a:p>
         </p:txBody>
       </p:sp>
     </p:spTree>
     <p:extLst>
       <p:ext uri="{BB962C8B-B14F-4D97-AF65-F5344CB8AC3E}">
-        <p14:creationId xmlns:p14="http://schemas.microsoft.com/office/powerpoint/2010/main" val="682342646"/>
+        <p14:creationId xmlns:p14="http://schemas.microsoft.com/office/powerpoint/2010/main" val="2668965908"/>
       </p:ext>
     </p:extLst>
   </p:cSld>
@@ -5165,7 +5184,13 @@
       </p:grpSpPr>
       <p:sp>
         <p:nvSpPr>
-          <p:cNvPr id="18436" name="Title 1"/>
+          <p:cNvPr id="2" name="Title 1">
+            <a:extLst>
+              <a:ext uri="{FF2B5EF4-FFF2-40B4-BE49-F238E27FC236}">
+                <a16:creationId xmlns:a16="http://schemas.microsoft.com/office/drawing/2014/main" id="{AD339071-9DC0-1157-7B36-EE03960E292A}"/>
+              </a:ext>
+            </a:extLst>
+          </p:cNvPr>
           <p:cNvSpPr>
             <a:spLocks noGrp="1"/>
           </p:cNvSpPr>
@@ -5175,22 +5200,25 @@
         </p:nvSpPr>
         <p:spPr/>
         <p:txBody>
-          <a:bodyPr>
-            <a:noAutofit/>
-          </a:bodyPr>
-          <a:lstStyle/>
-          <a:p>
-            <a:pPr eaLnBrk="1" hangingPunct="1"/>
-            <a:r>
-              <a:rPr lang="en-US" sz="3600" dirty="0"/>
-              <a:t>Data Management</a:t>
-            </a:r>
-          </a:p>
-        </p:txBody>
-      </p:sp>
-      <p:sp>
-        <p:nvSpPr>
-          <p:cNvPr id="3" name="Content Placeholder 2"/>
+          <a:bodyPr/>
+          <a:lstStyle/>
+          <a:p>
+            <a:r>
+              <a:rPr lang="en-US" dirty="0"/>
+              <a:t>Our Data Life</a:t>
+            </a:r>
+          </a:p>
+        </p:txBody>
+      </p:sp>
+      <p:sp>
+        <p:nvSpPr>
+          <p:cNvPr id="3" name="Content Placeholder 2">
+            <a:extLst>
+              <a:ext uri="{FF2B5EF4-FFF2-40B4-BE49-F238E27FC236}">
+                <a16:creationId xmlns:a16="http://schemas.microsoft.com/office/drawing/2014/main" id="{0E1703C4-7FD2-B791-60AA-ADF73735B763}"/>
+              </a:ext>
+            </a:extLst>
+          </p:cNvPr>
           <p:cNvSpPr>
             <a:spLocks noGrp="1"/>
           </p:cNvSpPr>
@@ -5198,77 +5226,81 @@
             <p:ph idx="1"/>
           </p:nvPr>
         </p:nvSpPr>
-        <p:spPr/>
-        <p:txBody>
-          <a:bodyPr>
-            <a:normAutofit fontScale="77500" lnSpcReduction="20000"/>
-          </a:bodyPr>
-          <a:lstStyle/>
-          <a:p>
-            <a:r>
-              <a:rPr lang="en-US" sz="2800" dirty="0"/>
-              <a:t>Once data are stored in a relational database, we can retrieve them using database queries.</a:t>
-            </a:r>
-          </a:p>
-          <a:p>
-            <a:r>
-              <a:rPr lang="en-US" sz="2800" dirty="0"/>
-              <a:t>The most popular query language used is Structure Query Language (SQL).</a:t>
-            </a:r>
-            <a:endParaRPr lang="en-US" dirty="0"/>
+        <p:spPr>
+          <a:xfrm>
+            <a:off x="1451579" y="1933904"/>
+            <a:ext cx="9603275" cy="4119578"/>
+          </a:xfrm>
+        </p:spPr>
+        <p:txBody>
+          <a:bodyPr/>
+          <a:lstStyle/>
+          <a:p>
+            <a:r>
+              <a:rPr lang="en-US" dirty="0"/>
+              <a:t>At this point we’ve touched on most of the infrastructure related to our data. </a:t>
+            </a:r>
+          </a:p>
+          <a:p>
+            <a:r>
+              <a:rPr lang="en-US" dirty="0"/>
+              <a:t>Data is generated in many places, include those that process transactions – OLTP. </a:t>
+            </a:r>
           </a:p>
           <a:p>
             <a:pPr lvl="1"/>
             <a:r>
-              <a:rPr lang="en-US" sz="2400" dirty="0"/>
-              <a:t>Manipulate data using a relatively simple and intuitive approach</a:t>
+              <a:rPr lang="en-US" dirty="0"/>
+              <a:t>Each of these system normally has a DB that stores those transactions. </a:t>
+            </a:r>
+          </a:p>
+          <a:p>
+            <a:r>
+              <a:rPr lang="en-US" dirty="0"/>
+              <a:t>That data is consolidated and cleaned in an ETL process and stored centrally. </a:t>
+            </a:r>
+          </a:p>
+          <a:p>
+            <a:r>
+              <a:rPr lang="en-US" dirty="0"/>
+              <a:t>We connect to that warehouse to get data. </a:t>
             </a:r>
           </a:p>
           <a:p>
             <a:pPr lvl="1"/>
             <a:r>
-              <a:rPr lang="en-US" sz="2400" dirty="0"/>
-              <a:t>Specify the attributes, tables, and criteria the retrieved data must meet</a:t>
+              <a:rPr lang="en-US" dirty="0"/>
+              <a:t>The database uses entity-relationship model to store data on many different things. </a:t>
             </a:r>
           </a:p>
           <a:p>
             <a:pPr lvl="1"/>
             <a:r>
-              <a:rPr lang="en-US" sz="2400" dirty="0"/>
-              <a:t>Uses three key words: SELECT, FROM, and WHERE</a:t>
+              <a:rPr lang="en-US" dirty="0"/>
+              <a:t>We need to navigate the </a:t>
+            </a:r>
+            <a:r>
+              <a:rPr lang="en-US" dirty="0" err="1"/>
+              <a:t>db</a:t>
+            </a:r>
+            <a:r>
+              <a:rPr lang="en-US" dirty="0"/>
+              <a:t> structure and join to make useful data. </a:t>
             </a:r>
           </a:p>
           <a:p>
             <a:pPr lvl="1"/>
             <a:r>
-              <a:rPr lang="en-US" sz="2400" dirty="0"/>
-              <a:t>SELECT: specifies the attributes</a:t>
-            </a:r>
-          </a:p>
-          <a:p>
-            <a:pPr lvl="1"/>
-            <a:r>
-              <a:rPr lang="en-US" sz="2400" dirty="0"/>
-              <a:t>FROM: specifies the tables (more than one)</a:t>
-            </a:r>
-          </a:p>
-          <a:p>
-            <a:pPr lvl="1"/>
-            <a:r>
-              <a:rPr lang="en-US" sz="2400" dirty="0"/>
-              <a:t>WHERE: specifies selection criteria and/or conditions</a:t>
-            </a:r>
-          </a:p>
-          <a:p>
-            <a:pPr lvl="1"/>
-            <a:endParaRPr lang="en-US" sz="1600" dirty="0"/>
+              <a:rPr lang="en-US" dirty="0"/>
+              <a:t>We can get data on almost anything, but it comes separated. (CSVs we use are the ~output). </a:t>
+            </a:r>
           </a:p>
         </p:txBody>
       </p:sp>
     </p:spTree>
     <p:extLst>
       <p:ext uri="{BB962C8B-B14F-4D97-AF65-F5344CB8AC3E}">
-        <p14:creationId xmlns:p14="http://schemas.microsoft.com/office/powerpoint/2010/main" val="4024940333"/>
+        <p14:creationId xmlns:p14="http://schemas.microsoft.com/office/powerpoint/2010/main" val="682342646"/>
       </p:ext>
     </p:extLst>
   </p:cSld>
@@ -5343,6 +5375,12 @@
         <p:txBody>
           <a:bodyPr/>
           <a:lstStyle/>
+          <a:p>
+            <a:r>
+              <a:rPr lang="en-US" dirty="0"/>
+              <a:t>Once data are stored in a relational database, we can retrieve them using database queries.</a:t>
+            </a:r>
+          </a:p>
           <a:p>
             <a:r>
               <a:rPr lang="en-US" dirty="0"/>
@@ -5453,6 +5491,132 @@
         <p:spPr/>
         <p:txBody>
           <a:bodyPr>
+            <a:normAutofit fontScale="92500" lnSpcReduction="20000"/>
+          </a:bodyPr>
+          <a:lstStyle/>
+          <a:p>
+            <a:r>
+              <a:rPr lang="en-US" sz="2800" dirty="0"/>
+              <a:t>The most popular query language used is Structure Query Language (SQL).</a:t>
+            </a:r>
+            <a:endParaRPr lang="en-US" dirty="0"/>
+          </a:p>
+          <a:p>
+            <a:pPr lvl="1"/>
+            <a:r>
+              <a:rPr lang="en-US" sz="2400" dirty="0"/>
+              <a:t>Manipulate data using a relatively simple and intuitive approach</a:t>
+            </a:r>
+          </a:p>
+          <a:p>
+            <a:pPr lvl="1"/>
+            <a:r>
+              <a:rPr lang="en-US" sz="2400" dirty="0"/>
+              <a:t>Specify the attributes, tables, and criteria the retrieved data must meet</a:t>
+            </a:r>
+          </a:p>
+          <a:p>
+            <a:pPr lvl="1"/>
+            <a:r>
+              <a:rPr lang="en-US" sz="2400" dirty="0"/>
+              <a:t>Uses three key words: SELECT, FROM, and WHERE</a:t>
+            </a:r>
+          </a:p>
+          <a:p>
+            <a:pPr lvl="1"/>
+            <a:r>
+              <a:rPr lang="en-US" sz="2400" dirty="0"/>
+              <a:t>SELECT: specifies the attributes</a:t>
+            </a:r>
+          </a:p>
+          <a:p>
+            <a:pPr lvl="1"/>
+            <a:r>
+              <a:rPr lang="en-US" sz="2400" dirty="0"/>
+              <a:t>FROM: specifies the tables (more than one)</a:t>
+            </a:r>
+          </a:p>
+          <a:p>
+            <a:pPr lvl="1"/>
+            <a:r>
+              <a:rPr lang="en-US" sz="2400" dirty="0"/>
+              <a:t>WHERE: specifies selection criteria and/or conditions</a:t>
+            </a:r>
+          </a:p>
+          <a:p>
+            <a:pPr lvl="1"/>
+            <a:endParaRPr lang="en-US" sz="1600" dirty="0"/>
+          </a:p>
+        </p:txBody>
+      </p:sp>
+    </p:spTree>
+    <p:extLst>
+      <p:ext uri="{BB962C8B-B14F-4D97-AF65-F5344CB8AC3E}">
+        <p14:creationId xmlns:p14="http://schemas.microsoft.com/office/powerpoint/2010/main" val="4024940333"/>
+      </p:ext>
+    </p:extLst>
+  </p:cSld>
+  <p:clrMapOvr>
+    <a:masterClrMapping/>
+  </p:clrMapOvr>
+</p:sld>
+</file>
+
+<file path=ppt/slides/slide14.xml><?xml version="1.0" encoding="utf-8"?>
+<p:sld xmlns:a="http://schemas.openxmlformats.org/drawingml/2006/main" xmlns:r="http://schemas.openxmlformats.org/officeDocument/2006/relationships" xmlns:p="http://schemas.openxmlformats.org/presentationml/2006/main">
+  <p:cSld>
+    <p:spTree>
+      <p:nvGrpSpPr>
+        <p:cNvPr id="1" name=""/>
+        <p:cNvGrpSpPr/>
+        <p:nvPr/>
+      </p:nvGrpSpPr>
+      <p:grpSpPr>
+        <a:xfrm>
+          <a:off x="0" y="0"/>
+          <a:ext cx="0" cy="0"/>
+          <a:chOff x="0" y="0"/>
+          <a:chExt cx="0" cy="0"/>
+        </a:xfrm>
+      </p:grpSpPr>
+      <p:sp>
+        <p:nvSpPr>
+          <p:cNvPr id="18436" name="Title 1"/>
+          <p:cNvSpPr>
+            <a:spLocks noGrp="1"/>
+          </p:cNvSpPr>
+          <p:nvPr>
+            <p:ph type="title"/>
+          </p:nvPr>
+        </p:nvSpPr>
+        <p:spPr/>
+        <p:txBody>
+          <a:bodyPr>
+            <a:noAutofit/>
+          </a:bodyPr>
+          <a:lstStyle/>
+          <a:p>
+            <a:pPr eaLnBrk="1" hangingPunct="1"/>
+            <a:r>
+              <a:rPr lang="en-US" sz="3600" dirty="0"/>
+              <a:t>Data Management</a:t>
+            </a:r>
+          </a:p>
+        </p:txBody>
+      </p:sp>
+      <p:sp>
+        <p:nvSpPr>
+          <p:cNvPr id="3" name="Content Placeholder 2"/>
+          <p:cNvSpPr>
+            <a:spLocks noGrp="1"/>
+          </p:cNvSpPr>
+          <p:nvPr>
+            <p:ph idx="1"/>
+          </p:nvPr>
+        </p:nvSpPr>
+        <p:spPr/>
+        <p:txBody>
+          <a:bodyPr>
             <a:normAutofit/>
           </a:bodyPr>
           <a:lstStyle/>
@@ -5557,7 +5721,7 @@
 </p:sld>
 </file>
 
-<file path=ppt/slides/slide14.xml><?xml version="1.0" encoding="utf-8"?>
+<file path=ppt/slides/slide15.xml><?xml version="1.0" encoding="utf-8"?>
 <p:sld xmlns:a="http://schemas.openxmlformats.org/drawingml/2006/main" xmlns:r="http://schemas.openxmlformats.org/officeDocument/2006/relationships" xmlns:p="http://schemas.openxmlformats.org/presentationml/2006/main">
   <p:cSld>
     <p:spTree>
@@ -5634,161 +5798,6 @@
 </p:sld>
 </file>
 
-<file path=ppt/slides/slide15.xml><?xml version="1.0" encoding="utf-8"?>
-<p:sld xmlns:a="http://schemas.openxmlformats.org/drawingml/2006/main" xmlns:r="http://schemas.openxmlformats.org/officeDocument/2006/relationships" xmlns:p="http://schemas.openxmlformats.org/presentationml/2006/main" show="0">
-  <p:cSld>
-    <p:spTree>
-      <p:nvGrpSpPr>
-        <p:cNvPr id="1" name=""/>
-        <p:cNvGrpSpPr/>
-        <p:nvPr/>
-      </p:nvGrpSpPr>
-      <p:grpSpPr>
-        <a:xfrm>
-          <a:off x="0" y="0"/>
-          <a:ext cx="0" cy="0"/>
-          <a:chOff x="0" y="0"/>
-          <a:chExt cx="0" cy="0"/>
-        </a:xfrm>
-      </p:grpSpPr>
-      <p:sp>
-        <p:nvSpPr>
-          <p:cNvPr id="18436" name="Title 1"/>
-          <p:cNvSpPr>
-            <a:spLocks noGrp="1"/>
-          </p:cNvSpPr>
-          <p:nvPr>
-            <p:ph type="title"/>
-          </p:nvPr>
-        </p:nvSpPr>
-        <p:spPr/>
-        <p:txBody>
-          <a:bodyPr>
-            <a:noAutofit/>
-          </a:bodyPr>
-          <a:lstStyle/>
-          <a:p>
-            <a:pPr eaLnBrk="1" hangingPunct="1"/>
-            <a:r>
-              <a:rPr lang="en-US" sz="3600" dirty="0"/>
-              <a:t>Data Management</a:t>
-            </a:r>
-          </a:p>
-        </p:txBody>
-      </p:sp>
-      <p:sp>
-        <p:nvSpPr>
-          <p:cNvPr id="3" name="Content Placeholder 2"/>
-          <p:cNvSpPr>
-            <a:spLocks noGrp="1"/>
-          </p:cNvSpPr>
-          <p:nvPr>
-            <p:ph idx="1"/>
-          </p:nvPr>
-        </p:nvSpPr>
-        <p:spPr/>
-        <p:txBody>
-          <a:bodyPr>
-            <a:normAutofit fontScale="62500" lnSpcReduction="20000"/>
-          </a:bodyPr>
-          <a:lstStyle/>
-          <a:p>
-            <a:r>
-              <a:rPr lang="en-US" sz="2800" dirty="0"/>
-              <a:t>Data must be integrated from different databases in different departments.</a:t>
-            </a:r>
-          </a:p>
-          <a:p>
-            <a:pPr lvl="1"/>
-            <a:r>
-              <a:rPr lang="en-US" sz="2000" dirty="0"/>
-              <a:t>Extraction, transformation, and load (ETL) process is used</a:t>
-            </a:r>
-          </a:p>
-          <a:p>
-            <a:pPr lvl="1"/>
-            <a:r>
-              <a:rPr lang="en-US" sz="2000" dirty="0"/>
-              <a:t>Retrieve, reconcile, and transform data into a consistent format</a:t>
-            </a:r>
-          </a:p>
-          <a:p>
-            <a:pPr lvl="1"/>
-            <a:r>
-              <a:rPr lang="en-US" sz="2000" dirty="0"/>
-              <a:t>Load the final data into the data warehouse</a:t>
-            </a:r>
-          </a:p>
-          <a:p>
-            <a:r>
-              <a:rPr lang="en-US" sz="2800" dirty="0"/>
-              <a:t>A data mart is a small-scale data warehouse.</a:t>
-            </a:r>
-          </a:p>
-          <a:p>
-            <a:pPr lvl="1"/>
-            <a:r>
-              <a:rPr lang="en-US" sz="2400" dirty="0"/>
-              <a:t>A subset of the enterprise data warehouse</a:t>
-            </a:r>
-          </a:p>
-          <a:p>
-            <a:pPr lvl="1"/>
-            <a:r>
-              <a:rPr lang="en-US" sz="2400" dirty="0"/>
-              <a:t>Focuses on one particular subject or decision areas</a:t>
-            </a:r>
-          </a:p>
-          <a:p>
-            <a:pPr lvl="1"/>
-            <a:r>
-              <a:rPr lang="en-US" sz="2400" dirty="0"/>
-              <a:t>Conforms to a multidimensional data model called a star scheme.</a:t>
-            </a:r>
-          </a:p>
-          <a:p>
-            <a:pPr lvl="1"/>
-            <a:r>
-              <a:rPr lang="en-US" sz="2400" dirty="0"/>
-              <a:t>Two types of tables: dimension and fact tables</a:t>
-            </a:r>
-          </a:p>
-          <a:p>
-            <a:pPr lvl="2"/>
-            <a:r>
-              <a:rPr lang="en-US" sz="1900" dirty="0"/>
-              <a:t>Dimension table: describes business dimensions such as customer, product, location, and time</a:t>
-            </a:r>
-          </a:p>
-          <a:p>
-            <a:pPr lvl="2"/>
-            <a:r>
-              <a:rPr lang="en-US" sz="1900" dirty="0"/>
-              <a:t>Fact table: facts about the business operation, often quantitative format</a:t>
-            </a:r>
-          </a:p>
-          <a:p>
-            <a:pPr lvl="1"/>
-            <a:endParaRPr lang="en-US" sz="2400" dirty="0"/>
-          </a:p>
-          <a:p>
-            <a:endParaRPr lang="en-US" sz="2200" dirty="0"/>
-          </a:p>
-        </p:txBody>
-      </p:sp>
-    </p:spTree>
-    <p:extLst>
-      <p:ext uri="{BB962C8B-B14F-4D97-AF65-F5344CB8AC3E}">
-        <p14:creationId xmlns:p14="http://schemas.microsoft.com/office/powerpoint/2010/main" val="427265259"/>
-      </p:ext>
-    </p:extLst>
-  </p:cSld>
-  <p:clrMapOvr>
-    <a:masterClrMapping/>
-  </p:clrMapOvr>
-</p:sld>
-</file>
-
 <file path=ppt/slides/slide16.xml><?xml version="1.0" encoding="utf-8"?>
 <p:sld xmlns:a="http://schemas.openxmlformats.org/drawingml/2006/main" xmlns:r="http://schemas.openxmlformats.org/officeDocument/2006/relationships" xmlns:p="http://schemas.openxmlformats.org/presentationml/2006/main" show="0">
   <p:cSld>
@@ -5844,6 +5853,161 @@
         <p:spPr/>
         <p:txBody>
           <a:bodyPr>
+            <a:normAutofit fontScale="62500" lnSpcReduction="20000"/>
+          </a:bodyPr>
+          <a:lstStyle/>
+          <a:p>
+            <a:r>
+              <a:rPr lang="en-US" sz="2800" dirty="0"/>
+              <a:t>Data must be integrated from different databases in different departments.</a:t>
+            </a:r>
+          </a:p>
+          <a:p>
+            <a:pPr lvl="1"/>
+            <a:r>
+              <a:rPr lang="en-US" sz="2000" dirty="0"/>
+              <a:t>Extraction, transformation, and load (ETL) process is used</a:t>
+            </a:r>
+          </a:p>
+          <a:p>
+            <a:pPr lvl="1"/>
+            <a:r>
+              <a:rPr lang="en-US" sz="2000" dirty="0"/>
+              <a:t>Retrieve, reconcile, and transform data into a consistent format</a:t>
+            </a:r>
+          </a:p>
+          <a:p>
+            <a:pPr lvl="1"/>
+            <a:r>
+              <a:rPr lang="en-US" sz="2000" dirty="0"/>
+              <a:t>Load the final data into the data warehouse</a:t>
+            </a:r>
+          </a:p>
+          <a:p>
+            <a:r>
+              <a:rPr lang="en-US" sz="2800" dirty="0"/>
+              <a:t>A data mart is a small-scale data warehouse.</a:t>
+            </a:r>
+          </a:p>
+          <a:p>
+            <a:pPr lvl="1"/>
+            <a:r>
+              <a:rPr lang="en-US" sz="2400" dirty="0"/>
+              <a:t>A subset of the enterprise data warehouse</a:t>
+            </a:r>
+          </a:p>
+          <a:p>
+            <a:pPr lvl="1"/>
+            <a:r>
+              <a:rPr lang="en-US" sz="2400" dirty="0"/>
+              <a:t>Focuses on one particular subject or decision areas</a:t>
+            </a:r>
+          </a:p>
+          <a:p>
+            <a:pPr lvl="1"/>
+            <a:r>
+              <a:rPr lang="en-US" sz="2400" dirty="0"/>
+              <a:t>Conforms to a multidimensional data model called a star scheme.</a:t>
+            </a:r>
+          </a:p>
+          <a:p>
+            <a:pPr lvl="1"/>
+            <a:r>
+              <a:rPr lang="en-US" sz="2400" dirty="0"/>
+              <a:t>Two types of tables: dimension and fact tables</a:t>
+            </a:r>
+          </a:p>
+          <a:p>
+            <a:pPr lvl="2"/>
+            <a:r>
+              <a:rPr lang="en-US" sz="1900" dirty="0"/>
+              <a:t>Dimension table: describes business dimensions such as customer, product, location, and time</a:t>
+            </a:r>
+          </a:p>
+          <a:p>
+            <a:pPr lvl="2"/>
+            <a:r>
+              <a:rPr lang="en-US" sz="1900" dirty="0"/>
+              <a:t>Fact table: facts about the business operation, often quantitative format</a:t>
+            </a:r>
+          </a:p>
+          <a:p>
+            <a:pPr lvl="1"/>
+            <a:endParaRPr lang="en-US" sz="2400" dirty="0"/>
+          </a:p>
+          <a:p>
+            <a:endParaRPr lang="en-US" sz="2200" dirty="0"/>
+          </a:p>
+        </p:txBody>
+      </p:sp>
+    </p:spTree>
+    <p:extLst>
+      <p:ext uri="{BB962C8B-B14F-4D97-AF65-F5344CB8AC3E}">
+        <p14:creationId xmlns:p14="http://schemas.microsoft.com/office/powerpoint/2010/main" val="427265259"/>
+      </p:ext>
+    </p:extLst>
+  </p:cSld>
+  <p:clrMapOvr>
+    <a:masterClrMapping/>
+  </p:clrMapOvr>
+</p:sld>
+</file>
+
+<file path=ppt/slides/slide17.xml><?xml version="1.0" encoding="utf-8"?>
+<p:sld xmlns:a="http://schemas.openxmlformats.org/drawingml/2006/main" xmlns:r="http://schemas.openxmlformats.org/officeDocument/2006/relationships" xmlns:p="http://schemas.openxmlformats.org/presentationml/2006/main" show="0">
+  <p:cSld>
+    <p:spTree>
+      <p:nvGrpSpPr>
+        <p:cNvPr id="1" name=""/>
+        <p:cNvGrpSpPr/>
+        <p:nvPr/>
+      </p:nvGrpSpPr>
+      <p:grpSpPr>
+        <a:xfrm>
+          <a:off x="0" y="0"/>
+          <a:ext cx="0" cy="0"/>
+          <a:chOff x="0" y="0"/>
+          <a:chExt cx="0" cy="0"/>
+        </a:xfrm>
+      </p:grpSpPr>
+      <p:sp>
+        <p:nvSpPr>
+          <p:cNvPr id="18436" name="Title 1"/>
+          <p:cNvSpPr>
+            <a:spLocks noGrp="1"/>
+          </p:cNvSpPr>
+          <p:nvPr>
+            <p:ph type="title"/>
+          </p:nvPr>
+        </p:nvSpPr>
+        <p:spPr/>
+        <p:txBody>
+          <a:bodyPr>
+            <a:noAutofit/>
+          </a:bodyPr>
+          <a:lstStyle/>
+          <a:p>
+            <a:pPr eaLnBrk="1" hangingPunct="1"/>
+            <a:r>
+              <a:rPr lang="en-US" sz="3600" dirty="0"/>
+              <a:t>Data Management</a:t>
+            </a:r>
+          </a:p>
+        </p:txBody>
+      </p:sp>
+      <p:sp>
+        <p:nvSpPr>
+          <p:cNvPr id="3" name="Content Placeholder 2"/>
+          <p:cNvSpPr>
+            <a:spLocks noGrp="1"/>
+          </p:cNvSpPr>
+          <p:nvPr>
+            <p:ph idx="1"/>
+          </p:nvPr>
+        </p:nvSpPr>
+        <p:spPr/>
+        <p:txBody>
+          <a:bodyPr>
             <a:normAutofit fontScale="85000" lnSpcReduction="10000"/>
           </a:bodyPr>
           <a:lstStyle/>
@@ -5900,7 +6064,7 @@
 </p:sld>
 </file>
 
-<file path=ppt/slides/slide17.xml><?xml version="1.0" encoding="utf-8"?>
+<file path=ppt/slides/slide18.xml><?xml version="1.0" encoding="utf-8"?>
 <p:sld xmlns:a="http://schemas.openxmlformats.org/drawingml/2006/main" xmlns:r="http://schemas.openxmlformats.org/officeDocument/2006/relationships" xmlns:p="http://schemas.openxmlformats.org/presentationml/2006/main" show="0">
   <p:cSld>
     <p:spTree>
@@ -6010,7 +6174,7 @@
 </p:sld>
 </file>
 
-<file path=ppt/slides/slide18.xml><?xml version="1.0" encoding="utf-8"?>
+<file path=ppt/slides/slide19.xml><?xml version="1.0" encoding="utf-8"?>
 <p:sld xmlns:a="http://schemas.openxmlformats.org/drawingml/2006/main" xmlns:r="http://schemas.openxmlformats.org/officeDocument/2006/relationships" xmlns:p="http://schemas.openxmlformats.org/presentationml/2006/main" show="0">
   <p:cSld>
     <p:spTree>
@@ -6119,153 +6283,6 @@
     <p:extLst>
       <p:ext uri="{BB962C8B-B14F-4D97-AF65-F5344CB8AC3E}">
         <p14:creationId xmlns:p14="http://schemas.microsoft.com/office/powerpoint/2010/main" val="1320795328"/>
-      </p:ext>
-    </p:extLst>
-  </p:cSld>
-  <p:clrMapOvr>
-    <a:masterClrMapping/>
-  </p:clrMapOvr>
-</p:sld>
-</file>
-
-<file path=ppt/slides/slide19.xml><?xml version="1.0" encoding="utf-8"?>
-<p:sld xmlns:a="http://schemas.openxmlformats.org/drawingml/2006/main" xmlns:r="http://schemas.openxmlformats.org/officeDocument/2006/relationships" xmlns:p="http://schemas.openxmlformats.org/presentationml/2006/main">
-  <p:cSld>
-    <p:spTree>
-      <p:nvGrpSpPr>
-        <p:cNvPr id="1" name=""/>
-        <p:cNvGrpSpPr/>
-        <p:nvPr/>
-      </p:nvGrpSpPr>
-      <p:grpSpPr>
-        <a:xfrm>
-          <a:off x="0" y="0"/>
-          <a:ext cx="0" cy="0"/>
-          <a:chOff x="0" y="0"/>
-          <a:chExt cx="0" cy="0"/>
-        </a:xfrm>
-      </p:grpSpPr>
-      <p:sp>
-        <p:nvSpPr>
-          <p:cNvPr id="4" name="Title 3">
-            <a:extLst>
-              <a:ext uri="{FF2B5EF4-FFF2-40B4-BE49-F238E27FC236}">
-                <a16:creationId xmlns:a16="http://schemas.microsoft.com/office/drawing/2014/main" id="{3C263722-E6BD-C173-3E49-EF7D86DCCC43}"/>
-              </a:ext>
-            </a:extLst>
-          </p:cNvPr>
-          <p:cNvSpPr>
-            <a:spLocks noGrp="1"/>
-          </p:cNvSpPr>
-          <p:nvPr>
-            <p:ph type="title"/>
-          </p:nvPr>
-        </p:nvSpPr>
-        <p:spPr/>
-        <p:txBody>
-          <a:bodyPr/>
-          <a:lstStyle/>
-          <a:p>
-            <a:r>
-              <a:rPr lang="en-US" dirty="0"/>
-              <a:t>SQL Joins</a:t>
-            </a:r>
-          </a:p>
-        </p:txBody>
-      </p:sp>
-      <p:sp>
-        <p:nvSpPr>
-          <p:cNvPr id="5" name="Content Placeholder 4">
-            <a:extLst>
-              <a:ext uri="{FF2B5EF4-FFF2-40B4-BE49-F238E27FC236}">
-                <a16:creationId xmlns:a16="http://schemas.microsoft.com/office/drawing/2014/main" id="{F8947EBA-1864-8CA7-68F2-A61F434C510A}"/>
-              </a:ext>
-            </a:extLst>
-          </p:cNvPr>
-          <p:cNvSpPr>
-            <a:spLocks noGrp="1"/>
-          </p:cNvSpPr>
-          <p:nvPr>
-            <p:ph idx="1"/>
-          </p:nvPr>
-        </p:nvSpPr>
-        <p:spPr>
-          <a:xfrm>
-            <a:off x="1451579" y="2015732"/>
-            <a:ext cx="9603275" cy="3946156"/>
-          </a:xfrm>
-        </p:spPr>
-        <p:txBody>
-          <a:bodyPr>
-            <a:normAutofit lnSpcReduction="10000"/>
-          </a:bodyPr>
-          <a:lstStyle/>
-          <a:p>
-            <a:r>
-              <a:rPr lang="en-US" dirty="0"/>
-              <a:t>A join in SQL connects two tables (or datasheets) together. </a:t>
-            </a:r>
-          </a:p>
-          <a:p>
-            <a:r>
-              <a:rPr lang="en-US" dirty="0"/>
-              <a:t>Based (usually) on a key – a unique ID:</a:t>
-            </a:r>
-          </a:p>
-          <a:p>
-            <a:pPr lvl="1"/>
-            <a:r>
-              <a:rPr lang="en-US" dirty="0"/>
-              <a:t>Each row has a unique ID value. (Primary Key) </a:t>
-            </a:r>
-          </a:p>
-          <a:p>
-            <a:pPr lvl="1"/>
-            <a:r>
-              <a:rPr lang="en-US" dirty="0"/>
-              <a:t>We can refer to it to “grab” that row of data. </a:t>
-            </a:r>
-          </a:p>
-          <a:p>
-            <a:pPr lvl="1"/>
-            <a:r>
-              <a:rPr lang="en-US" dirty="0"/>
-              <a:t>Other tables have a foreign key – the key from another table. </a:t>
-            </a:r>
-          </a:p>
-          <a:p>
-            <a:r>
-              <a:rPr lang="en-US" dirty="0"/>
-              <a:t>E.g. at NAIT:</a:t>
-            </a:r>
-          </a:p>
-          <a:p>
-            <a:pPr lvl="1"/>
-            <a:r>
-              <a:rPr lang="en-US" dirty="0"/>
-              <a:t>Students are in the student DB table. </a:t>
-            </a:r>
-          </a:p>
-          <a:p>
-            <a:pPr lvl="1"/>
-            <a:r>
-              <a:rPr lang="en-US" dirty="0"/>
-              <a:t>Registrations are in the registration table. </a:t>
-            </a:r>
-          </a:p>
-          <a:p>
-            <a:pPr lvl="1"/>
-            <a:r>
-              <a:rPr lang="en-US" dirty="0"/>
-              <a:t>Join says, “grab this list of registrations, look at the student ID, and get the name… from the Student table”. </a:t>
-            </a:r>
-          </a:p>
-        </p:txBody>
-      </p:sp>
-    </p:spTree>
-    <p:extLst>
-      <p:ext uri="{BB962C8B-B14F-4D97-AF65-F5344CB8AC3E}">
-        <p14:creationId xmlns:p14="http://schemas.microsoft.com/office/powerpoint/2010/main" val="1937476575"/>
       </p:ext>
     </p:extLst>
   </p:cSld>
@@ -6297,7 +6314,7 @@
           <p:cNvPr id="2" name="Title 1">
             <a:extLst>
               <a:ext uri="{FF2B5EF4-FFF2-40B4-BE49-F238E27FC236}">
-                <a16:creationId xmlns:a16="http://schemas.microsoft.com/office/drawing/2014/main" id="{C72773F8-905A-1BDE-04E2-88E09968BCE0}"/>
+                <a16:creationId xmlns:a16="http://schemas.microsoft.com/office/drawing/2014/main" id="{15BAC134-34A8-CA43-F3C7-A4A8EC7DE4C2}"/>
               </a:ext>
             </a:extLst>
           </p:cNvPr>
@@ -6305,7 +6322,7 @@
             <a:spLocks noGrp="1"/>
           </p:cNvSpPr>
           <p:nvPr>
-            <p:ph type="title"/>
+            <p:ph type="ctrTitle"/>
           </p:nvPr>
         </p:nvSpPr>
         <p:spPr/>
@@ -6315,17 +6332,17 @@
           <a:p>
             <a:r>
               <a:rPr lang="en-US" dirty="0"/>
-              <a:t>Chapter 6 Challenges</a:t>
-            </a:r>
-          </a:p>
-        </p:txBody>
-      </p:sp>
-      <p:sp>
-        <p:nvSpPr>
-          <p:cNvPr id="3" name="Content Placeholder 2">
+              <a:t>Joins</a:t>
+            </a:r>
+          </a:p>
+        </p:txBody>
+      </p:sp>
+      <p:sp>
+        <p:nvSpPr>
+          <p:cNvPr id="3" name="Subtitle 2">
             <a:extLst>
               <a:ext uri="{FF2B5EF4-FFF2-40B4-BE49-F238E27FC236}">
-                <a16:creationId xmlns:a16="http://schemas.microsoft.com/office/drawing/2014/main" id="{D716745E-3AA0-0429-A63C-B25B0E9C64EB}"/>
+                <a16:creationId xmlns:a16="http://schemas.microsoft.com/office/drawing/2014/main" id="{9F119B4B-3B42-508B-8522-F29D6676AF2C}"/>
               </a:ext>
             </a:extLst>
           </p:cNvPr>
@@ -6333,79 +6350,22 @@
             <a:spLocks noGrp="1"/>
           </p:cNvSpPr>
           <p:nvPr>
-            <p:ph idx="1"/>
-          </p:nvPr>
-        </p:nvSpPr>
-        <p:spPr>
-          <a:xfrm>
-            <a:off x="1451580" y="2015732"/>
-            <a:ext cx="7877772" cy="3450613"/>
-          </a:xfrm>
-        </p:spPr>
+            <p:ph type="subTitle" idx="1"/>
+          </p:nvPr>
+        </p:nvSpPr>
+        <p:spPr/>
         <p:txBody>
           <a:bodyPr/>
           <a:lstStyle/>
           <a:p>
-            <a:r>
-              <a:rPr lang="en-US" dirty="0"/>
-              <a:t>Chapter 6 is on visualizing distributions. </a:t>
-            </a:r>
-          </a:p>
-          <a:p>
-            <a:r>
-              <a:rPr lang="en-US" dirty="0"/>
-              <a:t>We looked at histograms and box and whisker plots. </a:t>
-            </a:r>
-          </a:p>
-          <a:p>
-            <a:r>
-              <a:rPr lang="en-US" dirty="0"/>
-              <a:t>Several variants, particularly the line versions, can be made with the marks card. </a:t>
-            </a:r>
-          </a:p>
-          <a:p>
-            <a:r>
-              <a:rPr lang="en-US" dirty="0"/>
-              <a:t>Try some…</a:t>
-            </a:r>
-          </a:p>
-        </p:txBody>
-      </p:sp>
-      <p:pic>
-        <p:nvPicPr>
-          <p:cNvPr id="4" name="Picture 3">
-            <a:extLst>
-              <a:ext uri="{FF2B5EF4-FFF2-40B4-BE49-F238E27FC236}">
-                <a16:creationId xmlns:a16="http://schemas.microsoft.com/office/drawing/2014/main" id="{8FCF35E0-261A-FB40-D589-33D11C9C0EBF}"/>
-              </a:ext>
-            </a:extLst>
-          </p:cNvPr>
-          <p:cNvPicPr>
-            <a:picLocks noChangeAspect="1"/>
-          </p:cNvPicPr>
-          <p:nvPr/>
-        </p:nvPicPr>
-        <p:blipFill>
-          <a:blip r:embed="rId2"/>
-          <a:srcRect l="13817" t="21142" r="41465"/>
-          <a:stretch>
-            <a:fillRect/>
-          </a:stretch>
-        </p:blipFill>
-        <p:spPr>
-          <a:xfrm>
-            <a:off x="9329351" y="400"/>
-            <a:ext cx="2862649" cy="6857600"/>
-          </a:xfrm>
-          <a:prstGeom prst="rect">
-            <a:avLst/>
-          </a:prstGeom>
-        </p:spPr>
-      </p:pic>
+            <a:endParaRPr lang="en-US"/>
+          </a:p>
+        </p:txBody>
+      </p:sp>
     </p:spTree>
     <p:extLst>
       <p:ext uri="{BB962C8B-B14F-4D97-AF65-F5344CB8AC3E}">
-        <p14:creationId xmlns:p14="http://schemas.microsoft.com/office/powerpoint/2010/main" val="2986027326"/>
+        <p14:creationId xmlns:p14="http://schemas.microsoft.com/office/powerpoint/2010/main" val="3684202241"/>
       </p:ext>
     </p:extLst>
   </p:cSld>
@@ -6551,6 +6511,153 @@
 </file>
 
 <file path=ppt/slides/slide21.xml><?xml version="1.0" encoding="utf-8"?>
+<p:sld xmlns:a="http://schemas.openxmlformats.org/drawingml/2006/main" xmlns:r="http://schemas.openxmlformats.org/officeDocument/2006/relationships" xmlns:p="http://schemas.openxmlformats.org/presentationml/2006/main">
+  <p:cSld>
+    <p:spTree>
+      <p:nvGrpSpPr>
+        <p:cNvPr id="1" name=""/>
+        <p:cNvGrpSpPr/>
+        <p:nvPr/>
+      </p:nvGrpSpPr>
+      <p:grpSpPr>
+        <a:xfrm>
+          <a:off x="0" y="0"/>
+          <a:ext cx="0" cy="0"/>
+          <a:chOff x="0" y="0"/>
+          <a:chExt cx="0" cy="0"/>
+        </a:xfrm>
+      </p:grpSpPr>
+      <p:sp>
+        <p:nvSpPr>
+          <p:cNvPr id="4" name="Title 3">
+            <a:extLst>
+              <a:ext uri="{FF2B5EF4-FFF2-40B4-BE49-F238E27FC236}">
+                <a16:creationId xmlns:a16="http://schemas.microsoft.com/office/drawing/2014/main" id="{3C263722-E6BD-C173-3E49-EF7D86DCCC43}"/>
+              </a:ext>
+            </a:extLst>
+          </p:cNvPr>
+          <p:cNvSpPr>
+            <a:spLocks noGrp="1"/>
+          </p:cNvSpPr>
+          <p:nvPr>
+            <p:ph type="title"/>
+          </p:nvPr>
+        </p:nvSpPr>
+        <p:spPr/>
+        <p:txBody>
+          <a:bodyPr/>
+          <a:lstStyle/>
+          <a:p>
+            <a:r>
+              <a:rPr lang="en-US" dirty="0"/>
+              <a:t>SQL Joins</a:t>
+            </a:r>
+          </a:p>
+        </p:txBody>
+      </p:sp>
+      <p:sp>
+        <p:nvSpPr>
+          <p:cNvPr id="5" name="Content Placeholder 4">
+            <a:extLst>
+              <a:ext uri="{FF2B5EF4-FFF2-40B4-BE49-F238E27FC236}">
+                <a16:creationId xmlns:a16="http://schemas.microsoft.com/office/drawing/2014/main" id="{F8947EBA-1864-8CA7-68F2-A61F434C510A}"/>
+              </a:ext>
+            </a:extLst>
+          </p:cNvPr>
+          <p:cNvSpPr>
+            <a:spLocks noGrp="1"/>
+          </p:cNvSpPr>
+          <p:nvPr>
+            <p:ph idx="1"/>
+          </p:nvPr>
+        </p:nvSpPr>
+        <p:spPr>
+          <a:xfrm>
+            <a:off x="1451579" y="2015732"/>
+            <a:ext cx="9603275" cy="3946156"/>
+          </a:xfrm>
+        </p:spPr>
+        <p:txBody>
+          <a:bodyPr>
+            <a:normAutofit lnSpcReduction="10000"/>
+          </a:bodyPr>
+          <a:lstStyle/>
+          <a:p>
+            <a:r>
+              <a:rPr lang="en-US" dirty="0"/>
+              <a:t>A join in SQL connects two tables (or datasheets) together. </a:t>
+            </a:r>
+          </a:p>
+          <a:p>
+            <a:r>
+              <a:rPr lang="en-US" dirty="0"/>
+              <a:t>Based (usually) on a key – a unique ID:</a:t>
+            </a:r>
+          </a:p>
+          <a:p>
+            <a:pPr lvl="1"/>
+            <a:r>
+              <a:rPr lang="en-US" dirty="0"/>
+              <a:t>Each row has a unique ID value. (Primary Key) </a:t>
+            </a:r>
+          </a:p>
+          <a:p>
+            <a:pPr lvl="1"/>
+            <a:r>
+              <a:rPr lang="en-US" dirty="0"/>
+              <a:t>We can refer to it to “grab” that row of data. </a:t>
+            </a:r>
+          </a:p>
+          <a:p>
+            <a:pPr lvl="1"/>
+            <a:r>
+              <a:rPr lang="en-US" dirty="0"/>
+              <a:t>Other tables have a foreign key – the key from another table. </a:t>
+            </a:r>
+          </a:p>
+          <a:p>
+            <a:r>
+              <a:rPr lang="en-US" dirty="0"/>
+              <a:t>E.g. at NAIT:</a:t>
+            </a:r>
+          </a:p>
+          <a:p>
+            <a:pPr lvl="1"/>
+            <a:r>
+              <a:rPr lang="en-US" dirty="0"/>
+              <a:t>Students are in the student DB table. </a:t>
+            </a:r>
+          </a:p>
+          <a:p>
+            <a:pPr lvl="1"/>
+            <a:r>
+              <a:rPr lang="en-US" dirty="0"/>
+              <a:t>Registrations are in the registration table. </a:t>
+            </a:r>
+          </a:p>
+          <a:p>
+            <a:pPr lvl="1"/>
+            <a:r>
+              <a:rPr lang="en-US" dirty="0"/>
+              <a:t>Join says, “grab this list of registrations, look at the student ID, and get the name… from the Student table”. </a:t>
+            </a:r>
+          </a:p>
+        </p:txBody>
+      </p:sp>
+    </p:spTree>
+    <p:extLst>
+      <p:ext uri="{BB962C8B-B14F-4D97-AF65-F5344CB8AC3E}">
+        <p14:creationId xmlns:p14="http://schemas.microsoft.com/office/powerpoint/2010/main" val="1937476575"/>
+      </p:ext>
+    </p:extLst>
+  </p:cSld>
+  <p:clrMapOvr>
+    <a:masterClrMapping/>
+  </p:clrMapOvr>
+</p:sld>
+</file>
+
+<file path=ppt/slides/slide22.xml><?xml version="1.0" encoding="utf-8"?>
 <p:sld xmlns:a="http://schemas.openxmlformats.org/drawingml/2006/main" xmlns:r="http://schemas.openxmlformats.org/officeDocument/2006/relationships" xmlns:p="http://schemas.openxmlformats.org/presentationml/2006/main">
   <p:cSld>
     <p:spTree>
@@ -6715,7 +6822,7 @@
 </p:sld>
 </file>
 
-<file path=ppt/slides/slide22.xml><?xml version="1.0" encoding="utf-8"?>
+<file path=ppt/slides/slide23.xml><?xml version="1.0" encoding="utf-8"?>
 <p:sld xmlns:a="http://schemas.openxmlformats.org/drawingml/2006/main" xmlns:r="http://schemas.openxmlformats.org/officeDocument/2006/relationships" xmlns:p="http://schemas.openxmlformats.org/presentationml/2006/main">
   <p:cSld>
     <p:spTree>
@@ -6837,7 +6944,7 @@
 </p:sld>
 </file>
 
-<file path=ppt/slides/slide23.xml><?xml version="1.0" encoding="utf-8"?>
+<file path=ppt/slides/slide24.xml><?xml version="1.0" encoding="utf-8"?>
 <p:sld xmlns:a="http://schemas.openxmlformats.org/drawingml/2006/main" xmlns:r="http://schemas.openxmlformats.org/officeDocument/2006/relationships" xmlns:p="http://schemas.openxmlformats.org/presentationml/2006/main">
   <p:cSld>
     <p:spTree>
@@ -6986,7 +7093,7 @@
 </p:sld>
 </file>
 
-<file path=ppt/slides/slide24.xml><?xml version="1.0" encoding="utf-8"?>
+<file path=ppt/slides/slide25.xml><?xml version="1.0" encoding="utf-8"?>
 <p:sld xmlns:a="http://schemas.openxmlformats.org/drawingml/2006/main" xmlns:r="http://schemas.openxmlformats.org/officeDocument/2006/relationships" xmlns:p="http://schemas.openxmlformats.org/presentationml/2006/main">
   <p:cSld>
     <p:spTree>
@@ -7120,7 +7227,7 @@
 </p:sld>
 </file>
 
-<file path=ppt/slides/slide25.xml><?xml version="1.0" encoding="utf-8"?>
+<file path=ppt/slides/slide26.xml><?xml version="1.0" encoding="utf-8"?>
 <p:sld xmlns:a="http://schemas.openxmlformats.org/drawingml/2006/main" xmlns:r="http://schemas.openxmlformats.org/officeDocument/2006/relationships" xmlns:p="http://schemas.openxmlformats.org/presentationml/2006/main">
   <p:cSld>
     <p:spTree>
@@ -7230,7 +7337,7 @@
 </p:sld>
 </file>
 
-<file path=ppt/slides/slide26.xml><?xml version="1.0" encoding="utf-8"?>
+<file path=ppt/slides/slide27.xml><?xml version="1.0" encoding="utf-8"?>
 <p:sld xmlns:a="http://schemas.openxmlformats.org/drawingml/2006/main" xmlns:r="http://schemas.openxmlformats.org/officeDocument/2006/relationships" xmlns:p="http://schemas.openxmlformats.org/presentationml/2006/main">
   <p:cSld>
     <p:spTree>
@@ -7347,7 +7454,7 @@
 </p:sld>
 </file>
 
-<file path=ppt/slides/slide27.xml><?xml version="1.0" encoding="utf-8"?>
+<file path=ppt/slides/slide28.xml><?xml version="1.0" encoding="utf-8"?>
 <p:sld xmlns:a="http://schemas.openxmlformats.org/drawingml/2006/main" xmlns:r="http://schemas.openxmlformats.org/officeDocument/2006/relationships" xmlns:p="http://schemas.openxmlformats.org/presentationml/2006/main">
   <p:cSld>
     <p:spTree>
@@ -7464,7 +7571,7 @@
 </p:sld>
 </file>
 
-<file path=ppt/slides/slide28.xml><?xml version="1.0" encoding="utf-8"?>
+<file path=ppt/slides/slide29.xml><?xml version="1.0" encoding="utf-8"?>
 <p:sld xmlns:a="http://schemas.openxmlformats.org/drawingml/2006/main" xmlns:r="http://schemas.openxmlformats.org/officeDocument/2006/relationships" xmlns:p="http://schemas.openxmlformats.org/presentationml/2006/main">
   <p:cSld>
     <p:spTree>
@@ -7743,7 +7850,154 @@
 </p:sld>
 </file>
 
-<file path=ppt/slides/slide29.xml><?xml version="1.0" encoding="utf-8"?>
+<file path=ppt/slides/slide3.xml><?xml version="1.0" encoding="utf-8"?>
+<p:sld xmlns:a="http://schemas.openxmlformats.org/drawingml/2006/main" xmlns:r="http://schemas.openxmlformats.org/officeDocument/2006/relationships" xmlns:p="http://schemas.openxmlformats.org/presentationml/2006/main">
+  <p:cSld>
+    <p:spTree>
+      <p:nvGrpSpPr>
+        <p:cNvPr id="1" name=""/>
+        <p:cNvGrpSpPr/>
+        <p:nvPr/>
+      </p:nvGrpSpPr>
+      <p:grpSpPr>
+        <a:xfrm>
+          <a:off x="0" y="0"/>
+          <a:ext cx="0" cy="0"/>
+          <a:chOff x="0" y="0"/>
+          <a:chExt cx="0" cy="0"/>
+        </a:xfrm>
+      </p:grpSpPr>
+      <p:sp>
+        <p:nvSpPr>
+          <p:cNvPr id="2" name="Title 1">
+            <a:extLst>
+              <a:ext uri="{FF2B5EF4-FFF2-40B4-BE49-F238E27FC236}">
+                <a16:creationId xmlns:a16="http://schemas.microsoft.com/office/drawing/2014/main" id="{C72773F8-905A-1BDE-04E2-88E09968BCE0}"/>
+              </a:ext>
+            </a:extLst>
+          </p:cNvPr>
+          <p:cNvSpPr>
+            <a:spLocks noGrp="1"/>
+          </p:cNvSpPr>
+          <p:nvPr>
+            <p:ph type="title"/>
+          </p:nvPr>
+        </p:nvSpPr>
+        <p:spPr/>
+        <p:txBody>
+          <a:bodyPr/>
+          <a:lstStyle/>
+          <a:p>
+            <a:r>
+              <a:rPr lang="en-US" dirty="0"/>
+              <a:t>Chapter 7 Challenges</a:t>
+            </a:r>
+          </a:p>
+        </p:txBody>
+      </p:sp>
+      <p:sp>
+        <p:nvSpPr>
+          <p:cNvPr id="3" name="Content Placeholder 2">
+            <a:extLst>
+              <a:ext uri="{FF2B5EF4-FFF2-40B4-BE49-F238E27FC236}">
+                <a16:creationId xmlns:a16="http://schemas.microsoft.com/office/drawing/2014/main" id="{D716745E-3AA0-0429-A63C-B25B0E9C64EB}"/>
+              </a:ext>
+            </a:extLst>
+          </p:cNvPr>
+          <p:cNvSpPr>
+            <a:spLocks noGrp="1"/>
+          </p:cNvSpPr>
+          <p:nvPr>
+            <p:ph idx="1"/>
+          </p:nvPr>
+        </p:nvSpPr>
+        <p:spPr>
+          <a:xfrm>
+            <a:off x="1451580" y="2015732"/>
+            <a:ext cx="7877772" cy="3983624"/>
+          </a:xfrm>
+        </p:spPr>
+        <p:txBody>
+          <a:bodyPr/>
+          <a:lstStyle/>
+          <a:p>
+            <a:r>
+              <a:rPr lang="en-US" dirty="0"/>
+              <a:t>Chapter 7 is on visualizing distributions. </a:t>
+            </a:r>
+          </a:p>
+          <a:p>
+            <a:r>
+              <a:rPr lang="en-US" dirty="0"/>
+              <a:t>We looked at histograms and box and whisker plots in chart types. </a:t>
+            </a:r>
+          </a:p>
+          <a:p>
+            <a:r>
+              <a:rPr lang="en-US" dirty="0"/>
+              <a:t>Several variants, particularly the line versions, can be made with the marks card. </a:t>
+            </a:r>
+          </a:p>
+          <a:p>
+            <a:r>
+              <a:rPr lang="en-US" dirty="0"/>
+              <a:t>Try some…</a:t>
+            </a:r>
+          </a:p>
+          <a:p>
+            <a:pPr lvl="1"/>
+            <a:r>
+              <a:rPr lang="en-US" dirty="0"/>
+              <a:t>Different granularities, different mark types, multiple distributions. </a:t>
+            </a:r>
+          </a:p>
+        </p:txBody>
+      </p:sp>
+      <p:pic>
+        <p:nvPicPr>
+          <p:cNvPr id="4" name="Picture 3">
+            <a:extLst>
+              <a:ext uri="{FF2B5EF4-FFF2-40B4-BE49-F238E27FC236}">
+                <a16:creationId xmlns:a16="http://schemas.microsoft.com/office/drawing/2014/main" id="{8FCF35E0-261A-FB40-D589-33D11C9C0EBF}"/>
+              </a:ext>
+            </a:extLst>
+          </p:cNvPr>
+          <p:cNvPicPr>
+            <a:picLocks noChangeAspect="1"/>
+          </p:cNvPicPr>
+          <p:nvPr/>
+        </p:nvPicPr>
+        <p:blipFill>
+          <a:blip r:embed="rId2"/>
+          <a:srcRect l="13817" t="21142" r="41465"/>
+          <a:stretch>
+            <a:fillRect/>
+          </a:stretch>
+        </p:blipFill>
+        <p:spPr>
+          <a:xfrm>
+            <a:off x="9329351" y="400"/>
+            <a:ext cx="2862649" cy="6857600"/>
+          </a:xfrm>
+          <a:prstGeom prst="rect">
+            <a:avLst/>
+          </a:prstGeom>
+        </p:spPr>
+      </p:pic>
+    </p:spTree>
+    <p:extLst>
+      <p:ext uri="{BB962C8B-B14F-4D97-AF65-F5344CB8AC3E}">
+        <p14:creationId xmlns:p14="http://schemas.microsoft.com/office/powerpoint/2010/main" val="2986027326"/>
+      </p:ext>
+    </p:extLst>
+  </p:cSld>
+  <p:clrMapOvr>
+    <a:masterClrMapping/>
+  </p:clrMapOvr>
+</p:sld>
+</file>
+
+<file path=ppt/slides/slide30.xml><?xml version="1.0" encoding="utf-8"?>
 <p:sld xmlns:a="http://schemas.openxmlformats.org/drawingml/2006/main" xmlns:r="http://schemas.openxmlformats.org/officeDocument/2006/relationships" xmlns:p="http://schemas.openxmlformats.org/presentationml/2006/main">
   <p:cSld>
     <p:spTree>
@@ -7932,142 +8186,7 @@
 </p:sld>
 </file>
 
-<file path=ppt/slides/slide3.xml><?xml version="1.0" encoding="utf-8"?>
-<p:sld xmlns:a="http://schemas.openxmlformats.org/drawingml/2006/main" xmlns:r="http://schemas.openxmlformats.org/officeDocument/2006/relationships" xmlns:p="http://schemas.openxmlformats.org/presentationml/2006/main">
-  <p:cSld>
-    <p:spTree>
-      <p:nvGrpSpPr>
-        <p:cNvPr id="1" name=""/>
-        <p:cNvGrpSpPr/>
-        <p:nvPr/>
-      </p:nvGrpSpPr>
-      <p:grpSpPr>
-        <a:xfrm>
-          <a:off x="0" y="0"/>
-          <a:ext cx="0" cy="0"/>
-          <a:chOff x="0" y="0"/>
-          <a:chExt cx="0" cy="0"/>
-        </a:xfrm>
-      </p:grpSpPr>
-      <p:sp>
-        <p:nvSpPr>
-          <p:cNvPr id="18436" name="Title 1"/>
-          <p:cNvSpPr>
-            <a:spLocks noGrp="1"/>
-          </p:cNvSpPr>
-          <p:nvPr>
-            <p:ph type="title"/>
-          </p:nvPr>
-        </p:nvSpPr>
-        <p:spPr/>
-        <p:txBody>
-          <a:bodyPr>
-            <a:noAutofit/>
-          </a:bodyPr>
-          <a:lstStyle/>
-          <a:p>
-            <a:pPr eaLnBrk="1" hangingPunct="1"/>
-            <a:r>
-              <a:rPr lang="en-US" sz="3600" dirty="0"/>
-              <a:t>Data Management</a:t>
-            </a:r>
-          </a:p>
-        </p:txBody>
-      </p:sp>
-      <p:sp>
-        <p:nvSpPr>
-          <p:cNvPr id="3" name="Content Placeholder 2"/>
-          <p:cNvSpPr>
-            <a:spLocks noGrp="1"/>
-          </p:cNvSpPr>
-          <p:nvPr>
-            <p:ph idx="1"/>
-          </p:nvPr>
-        </p:nvSpPr>
-        <p:spPr>
-          <a:xfrm>
-            <a:off x="1451579" y="1853753"/>
-            <a:ext cx="9603275" cy="4199727"/>
-          </a:xfrm>
-        </p:spPr>
-        <p:txBody>
-          <a:bodyPr>
-            <a:normAutofit/>
-          </a:bodyPr>
-          <a:lstStyle/>
-          <a:p>
-            <a:r>
-              <a:rPr lang="en-US" sz="2400" dirty="0"/>
-              <a:t>The relational database environment provides businesses with an efficient and effective way to manage data.</a:t>
-            </a:r>
-          </a:p>
-          <a:p>
-            <a:r>
-              <a:rPr lang="en-US" sz="2400" dirty="0"/>
-              <a:t>Most applications will have their own database for their stuff. </a:t>
-            </a:r>
-          </a:p>
-          <a:p>
-            <a:pPr lvl="1"/>
-            <a:r>
-              <a:rPr lang="en-US" sz="2200" dirty="0"/>
-              <a:t>Every system generates data as stuff happens – sales, products, views…</a:t>
-            </a:r>
-          </a:p>
-          <a:p>
-            <a:pPr lvl="1"/>
-            <a:r>
-              <a:rPr lang="en-US" sz="2200" dirty="0"/>
-              <a:t>This is the OLTP stuff, processing transactions are storing data. </a:t>
-            </a:r>
-          </a:p>
-          <a:p>
-            <a:r>
-              <a:rPr lang="en-US" sz="2400" dirty="0"/>
-              <a:t>Each app’s database will have tables for each entity. </a:t>
-            </a:r>
-          </a:p>
-          <a:p>
-            <a:pPr lvl="1"/>
-            <a:r>
-              <a:rPr lang="en-US" sz="2200" dirty="0"/>
-              <a:t>Each entity* has a key, aka ID number – there’s some overlap here. </a:t>
-            </a:r>
-          </a:p>
-          <a:p>
-            <a:pPr lvl="1"/>
-            <a:r>
-              <a:rPr lang="en-US" sz="2200" dirty="0"/>
-              <a:t>Sales list a customer id, class registrations list student id, </a:t>
-            </a:r>
-            <a:r>
-              <a:rPr lang="en-US" sz="2200" dirty="0" err="1"/>
-              <a:t>etc</a:t>
-            </a:r>
-            <a:r>
-              <a:rPr lang="en-US" sz="2200" dirty="0"/>
-              <a:t>…</a:t>
-            </a:r>
-          </a:p>
-          <a:p>
-            <a:endParaRPr lang="en-US" dirty="0"/>
-          </a:p>
-        </p:txBody>
-      </p:sp>
-    </p:spTree>
-    <p:extLst>
-      <p:ext uri="{BB962C8B-B14F-4D97-AF65-F5344CB8AC3E}">
-        <p14:creationId xmlns:p14="http://schemas.microsoft.com/office/powerpoint/2010/main" val="1147458852"/>
-      </p:ext>
-    </p:extLst>
-  </p:cSld>
-  <p:clrMapOvr>
-    <a:masterClrMapping/>
-  </p:clrMapOvr>
-</p:sld>
-</file>
-
-<file path=ppt/slides/slide30.xml><?xml version="1.0" encoding="utf-8"?>
+<file path=ppt/slides/slide31.xml><?xml version="1.0" encoding="utf-8"?>
 <p:sld xmlns:a="http://schemas.openxmlformats.org/drawingml/2006/main" xmlns:r="http://schemas.openxmlformats.org/officeDocument/2006/relationships" xmlns:p="http://schemas.openxmlformats.org/presentationml/2006/main">
   <p:cSld>
     <p:spTree>
@@ -8210,7 +8329,7 @@
 </p:sld>
 </file>
 
-<file path=ppt/slides/slide31.xml><?xml version="1.0" encoding="utf-8"?>
+<file path=ppt/slides/slide32.xml><?xml version="1.0" encoding="utf-8"?>
 <p:sld xmlns:a="http://schemas.openxmlformats.org/drawingml/2006/main" xmlns:r="http://schemas.openxmlformats.org/officeDocument/2006/relationships" xmlns:p="http://schemas.openxmlformats.org/presentationml/2006/main">
   <p:cSld>
     <p:spTree>
@@ -8436,13 +8555,7 @@
       </p:grpSpPr>
       <p:sp>
         <p:nvSpPr>
-          <p:cNvPr id="4" name="Title 3">
-            <a:extLst>
-              <a:ext uri="{FF2B5EF4-FFF2-40B4-BE49-F238E27FC236}">
-                <a16:creationId xmlns:a16="http://schemas.microsoft.com/office/drawing/2014/main" id="{DD20917C-471C-5319-721E-5EA30F6AA412}"/>
-              </a:ext>
-            </a:extLst>
-          </p:cNvPr>
+          <p:cNvPr id="18436" name="Title 1"/>
           <p:cNvSpPr>
             <a:spLocks noGrp="1"/>
           </p:cNvSpPr>
@@ -8452,25 +8565,22 @@
         </p:nvSpPr>
         <p:spPr/>
         <p:txBody>
-          <a:bodyPr/>
-          <a:lstStyle/>
-          <a:p>
-            <a:r>
-              <a:rPr lang="en-US" dirty="0"/>
-              <a:t>Database Benefits</a:t>
-            </a:r>
-          </a:p>
-        </p:txBody>
-      </p:sp>
-      <p:sp>
-        <p:nvSpPr>
-          <p:cNvPr id="5" name="Content Placeholder 4">
-            <a:extLst>
-              <a:ext uri="{FF2B5EF4-FFF2-40B4-BE49-F238E27FC236}">
-                <a16:creationId xmlns:a16="http://schemas.microsoft.com/office/drawing/2014/main" id="{1635CA4A-584E-3C26-E067-24A469DACA03}"/>
-              </a:ext>
-            </a:extLst>
-          </p:cNvPr>
+          <a:bodyPr>
+            <a:noAutofit/>
+          </a:bodyPr>
+          <a:lstStyle/>
+          <a:p>
+            <a:pPr eaLnBrk="1" hangingPunct="1"/>
+            <a:r>
+              <a:rPr lang="en-US" sz="3600" dirty="0"/>
+              <a:t>Data Management</a:t>
+            </a:r>
+          </a:p>
+        </p:txBody>
+      </p:sp>
+      <p:sp>
+        <p:nvSpPr>
+          <p:cNvPr id="3" name="Content Placeholder 2"/>
           <p:cNvSpPr>
             <a:spLocks noGrp="1"/>
           </p:cNvSpPr>
@@ -8480,87 +8590,78 @@
         </p:nvSpPr>
         <p:spPr>
           <a:xfrm>
-            <a:off x="1451579" y="1853754"/>
-            <a:ext cx="9603275" cy="4126422"/>
+            <a:off x="1451579" y="1853753"/>
+            <a:ext cx="9603275" cy="4199727"/>
           </a:xfrm>
         </p:spPr>
         <p:txBody>
           <a:bodyPr>
-            <a:normAutofit lnSpcReduction="10000"/>
+            <a:normAutofit/>
           </a:bodyPr>
           <a:lstStyle/>
           <a:p>
             <a:r>
-              <a:rPr lang="en-US" dirty="0"/>
-              <a:t>One copy of data.</a:t>
+              <a:rPr lang="en-US" sz="2400" dirty="0"/>
+              <a:t>The relational database environment provides businesses with an efficient and effective way to manage data.</a:t>
+            </a:r>
+          </a:p>
+          <a:p>
+            <a:r>
+              <a:rPr lang="en-US" sz="2400" dirty="0"/>
+              <a:t>Most applications will have their own database for their stuff. </a:t>
             </a:r>
           </a:p>
           <a:p>
             <a:pPr lvl="1"/>
             <a:r>
-              <a:rPr lang="en-US" dirty="0"/>
-              <a:t>Can’t have multiple values for one thing. </a:t>
+              <a:rPr lang="en-US" sz="2200" dirty="0"/>
+              <a:t>Every system generates data as stuff happens – sales, products, views…</a:t>
             </a:r>
           </a:p>
           <a:p>
             <a:pPr lvl="1"/>
             <a:r>
-              <a:rPr lang="en-US" dirty="0"/>
-              <a:t>Changes to values don’t require tracking down many copies of data. </a:t>
-            </a:r>
-          </a:p>
-          <a:p>
-            <a:r>
-              <a:rPr lang="en-US" dirty="0"/>
-              <a:t>Enforcement of integrity rules. </a:t>
+              <a:rPr lang="en-US" sz="2200" dirty="0"/>
+              <a:t>This is the OLTP stuff, processing transactions are storing data. </a:t>
+            </a:r>
+          </a:p>
+          <a:p>
+            <a:r>
+              <a:rPr lang="en-US" sz="2400" dirty="0"/>
+              <a:t>Each app’s database will have tables for each entity. </a:t>
             </a:r>
           </a:p>
           <a:p>
             <a:pPr lvl="1"/>
             <a:r>
-              <a:rPr lang="en-US" dirty="0"/>
-              <a:t>Mandate that data meets certain rules. </a:t>
-            </a:r>
-          </a:p>
-          <a:p>
-            <a:r>
-              <a:rPr lang="en-US" dirty="0"/>
-              <a:t>Access control.</a:t>
+              <a:rPr lang="en-US" sz="2200" dirty="0"/>
+              <a:t>Each entity* has a key, aka ID number – there’s some overlap here. </a:t>
             </a:r>
           </a:p>
           <a:p>
             <a:pPr lvl="1"/>
             <a:r>
-              <a:rPr lang="en-US" dirty="0"/>
-              <a:t>Allow read/write access to only those allowed. </a:t>
-            </a:r>
-          </a:p>
-          <a:p>
-            <a:r>
-              <a:rPr lang="en-US" dirty="0"/>
-              <a:t>Data sharing and access.</a:t>
-            </a:r>
-          </a:p>
-          <a:p>
-            <a:pPr lvl="1"/>
-            <a:r>
-              <a:rPr lang="en-US" dirty="0"/>
-              <a:t>Creation, storing, and access to data are separate.</a:t>
-            </a:r>
-          </a:p>
-          <a:p>
-            <a:pPr lvl="1"/>
-            <a:r>
-              <a:rPr lang="en-US" dirty="0"/>
-              <a:t>E.g. One program makes data, another uses it…</a:t>
-            </a:r>
+              <a:rPr lang="en-US" sz="2200" dirty="0"/>
+              <a:t>Sales list a customer id, class registrations list student id, </a:t>
+            </a:r>
+            <a:r>
+              <a:rPr lang="en-US" sz="2200" dirty="0" err="1"/>
+              <a:t>etc</a:t>
+            </a:r>
+            <a:r>
+              <a:rPr lang="en-US" sz="2200" dirty="0"/>
+              <a:t>…</a:t>
+            </a:r>
+          </a:p>
+          <a:p>
+            <a:endParaRPr lang="en-US" dirty="0"/>
           </a:p>
         </p:txBody>
       </p:sp>
     </p:spTree>
     <p:extLst>
       <p:ext uri="{BB962C8B-B14F-4D97-AF65-F5344CB8AC3E}">
-        <p14:creationId xmlns:p14="http://schemas.microsoft.com/office/powerpoint/2010/main" val="3755745347"/>
+        <p14:creationId xmlns:p14="http://schemas.microsoft.com/office/powerpoint/2010/main" val="1147458852"/>
       </p:ext>
     </p:extLst>
   </p:cSld>
@@ -8589,10 +8690,10 @@
       </p:grpSpPr>
       <p:sp>
         <p:nvSpPr>
-          <p:cNvPr id="2" name="Title 1">
+          <p:cNvPr id="4" name="Title 3">
             <a:extLst>
               <a:ext uri="{FF2B5EF4-FFF2-40B4-BE49-F238E27FC236}">
-                <a16:creationId xmlns:a16="http://schemas.microsoft.com/office/drawing/2014/main" id="{EC140C7E-F6C4-463C-6796-7CE4D422CA4F}"/>
+                <a16:creationId xmlns:a16="http://schemas.microsoft.com/office/drawing/2014/main" id="{DD20917C-471C-5319-721E-5EA30F6AA412}"/>
               </a:ext>
             </a:extLst>
           </p:cNvPr>
@@ -8610,17 +8711,17 @@
           <a:p>
             <a:r>
               <a:rPr lang="en-US" dirty="0"/>
-              <a:t>ETL and Warehousing</a:t>
-            </a:r>
-          </a:p>
-        </p:txBody>
-      </p:sp>
-      <p:sp>
-        <p:nvSpPr>
-          <p:cNvPr id="3" name="Content Placeholder 2">
+              <a:t>Database Benefits</a:t>
+            </a:r>
+          </a:p>
+        </p:txBody>
+      </p:sp>
+      <p:sp>
+        <p:nvSpPr>
+          <p:cNvPr id="5" name="Content Placeholder 4">
             <a:extLst>
               <a:ext uri="{FF2B5EF4-FFF2-40B4-BE49-F238E27FC236}">
-                <a16:creationId xmlns:a16="http://schemas.microsoft.com/office/drawing/2014/main" id="{2CD43CB7-2C7D-FE96-8D6C-7F01E34D6B73}"/>
+                <a16:creationId xmlns:a16="http://schemas.microsoft.com/office/drawing/2014/main" id="{1635CA4A-584E-3C26-E067-24A469DACA03}"/>
               </a:ext>
             </a:extLst>
           </p:cNvPr>
@@ -8633,65 +8734,79 @@
         </p:nvSpPr>
         <p:spPr>
           <a:xfrm>
-            <a:off x="1451579" y="2015732"/>
-            <a:ext cx="9603275" cy="3901592"/>
+            <a:off x="1451579" y="1853754"/>
+            <a:ext cx="9603275" cy="4126422"/>
           </a:xfrm>
         </p:spPr>
         <p:txBody>
-          <a:bodyPr/>
-          <a:lstStyle/>
-          <a:p>
-            <a:r>
-              <a:rPr lang="en-US" dirty="0"/>
-              <a:t>We generally work off of centralized repositories for data to analyze. </a:t>
-            </a:r>
-          </a:p>
-          <a:p>
-            <a:r>
-              <a:rPr lang="en-US" dirty="0"/>
-              <a:t>Large organizations have data from many sources. </a:t>
+          <a:bodyPr>
+            <a:normAutofit lnSpcReduction="10000"/>
+          </a:bodyPr>
+          <a:lstStyle/>
+          <a:p>
+            <a:r>
+              <a:rPr lang="en-US" dirty="0"/>
+              <a:t>One copy of data.</a:t>
             </a:r>
           </a:p>
           <a:p>
             <a:pPr lvl="1"/>
             <a:r>
               <a:rPr lang="en-US" dirty="0"/>
-              <a:t>Website. </a:t>
+              <a:t>Can’t have multiple values for one thing. </a:t>
             </a:r>
           </a:p>
           <a:p>
             <a:pPr lvl="1"/>
             <a:r>
               <a:rPr lang="en-US" dirty="0"/>
-              <a:t>Equipment like factory machines. </a:t>
+              <a:t>Changes to values don’t require tracking down many copies of data. </a:t>
+            </a:r>
+          </a:p>
+          <a:p>
+            <a:r>
+              <a:rPr lang="en-US" dirty="0"/>
+              <a:t>Enforcement of integrity rules. </a:t>
             </a:r>
           </a:p>
           <a:p>
             <a:pPr lvl="1"/>
             <a:r>
               <a:rPr lang="en-US" dirty="0"/>
-              <a:t>HR, finance, marketing, </a:t>
-            </a:r>
-            <a:r>
-              <a:rPr lang="en-US" dirty="0" err="1"/>
-              <a:t>etc</a:t>
-            </a:r>
-            <a:r>
-              <a:rPr lang="en-US" dirty="0"/>
-              <a:t>…</a:t>
+              <a:t>Mandate that data meets certain rules. </a:t>
+            </a:r>
+          </a:p>
+          <a:p>
+            <a:r>
+              <a:rPr lang="en-US" dirty="0"/>
+              <a:t>Access control.</a:t>
             </a:r>
           </a:p>
           <a:p>
             <a:pPr lvl="1"/>
             <a:r>
               <a:rPr lang="en-US" dirty="0"/>
-              <a:t>External data sources. </a:t>
-            </a:r>
-          </a:p>
-          <a:p>
-            <a:r>
-              <a:rPr lang="en-US" dirty="0"/>
-              <a:t>Consolidating this data is non-trivial. </a:t>
+              <a:t>Allow read/write access to only those allowed. </a:t>
+            </a:r>
+          </a:p>
+          <a:p>
+            <a:r>
+              <a:rPr lang="en-US" dirty="0"/>
+              <a:t>Data sharing and access.</a:t>
+            </a:r>
+          </a:p>
+          <a:p>
+            <a:pPr lvl="1"/>
+            <a:r>
+              <a:rPr lang="en-US" dirty="0"/>
+              <a:t>Creation, storing, and access to data are separate.</a:t>
+            </a:r>
+          </a:p>
+          <a:p>
+            <a:pPr lvl="1"/>
+            <a:r>
+              <a:rPr lang="en-US" dirty="0"/>
+              <a:t>E.g. One program makes data, another uses it…</a:t>
             </a:r>
           </a:p>
         </p:txBody>
@@ -8699,7 +8814,7 @@
     </p:spTree>
     <p:extLst>
       <p:ext uri="{BB962C8B-B14F-4D97-AF65-F5344CB8AC3E}">
-        <p14:creationId xmlns:p14="http://schemas.microsoft.com/office/powerpoint/2010/main" val="1574936991"/>
+        <p14:creationId xmlns:p14="http://schemas.microsoft.com/office/powerpoint/2010/main" val="3755745347"/>
       </p:ext>
     </p:extLst>
   </p:cSld>
@@ -8731,6 +8846,145 @@
           <p:cNvPr id="2" name="Title 1">
             <a:extLst>
               <a:ext uri="{FF2B5EF4-FFF2-40B4-BE49-F238E27FC236}">
+                <a16:creationId xmlns:a16="http://schemas.microsoft.com/office/drawing/2014/main" id="{EC140C7E-F6C4-463C-6796-7CE4D422CA4F}"/>
+              </a:ext>
+            </a:extLst>
+          </p:cNvPr>
+          <p:cNvSpPr>
+            <a:spLocks noGrp="1"/>
+          </p:cNvSpPr>
+          <p:nvPr>
+            <p:ph type="title"/>
+          </p:nvPr>
+        </p:nvSpPr>
+        <p:spPr/>
+        <p:txBody>
+          <a:bodyPr/>
+          <a:lstStyle/>
+          <a:p>
+            <a:r>
+              <a:rPr lang="en-US" dirty="0"/>
+              <a:t>ETL and Warehousing</a:t>
+            </a:r>
+          </a:p>
+        </p:txBody>
+      </p:sp>
+      <p:sp>
+        <p:nvSpPr>
+          <p:cNvPr id="3" name="Content Placeholder 2">
+            <a:extLst>
+              <a:ext uri="{FF2B5EF4-FFF2-40B4-BE49-F238E27FC236}">
+                <a16:creationId xmlns:a16="http://schemas.microsoft.com/office/drawing/2014/main" id="{2CD43CB7-2C7D-FE96-8D6C-7F01E34D6B73}"/>
+              </a:ext>
+            </a:extLst>
+          </p:cNvPr>
+          <p:cNvSpPr>
+            <a:spLocks noGrp="1"/>
+          </p:cNvSpPr>
+          <p:nvPr>
+            <p:ph idx="1"/>
+          </p:nvPr>
+        </p:nvSpPr>
+        <p:spPr>
+          <a:xfrm>
+            <a:off x="1451579" y="2015732"/>
+            <a:ext cx="9603275" cy="3901592"/>
+          </a:xfrm>
+        </p:spPr>
+        <p:txBody>
+          <a:bodyPr/>
+          <a:lstStyle/>
+          <a:p>
+            <a:r>
+              <a:rPr lang="en-US" dirty="0"/>
+              <a:t>We generally work off of centralized repositories for data to analyze. </a:t>
+            </a:r>
+          </a:p>
+          <a:p>
+            <a:r>
+              <a:rPr lang="en-US" dirty="0"/>
+              <a:t>Large organizations have data from many sources. </a:t>
+            </a:r>
+          </a:p>
+          <a:p>
+            <a:pPr lvl="1"/>
+            <a:r>
+              <a:rPr lang="en-US" dirty="0"/>
+              <a:t>Website. </a:t>
+            </a:r>
+          </a:p>
+          <a:p>
+            <a:pPr lvl="1"/>
+            <a:r>
+              <a:rPr lang="en-US" dirty="0"/>
+              <a:t>Equipment like factory machines. </a:t>
+            </a:r>
+          </a:p>
+          <a:p>
+            <a:pPr lvl="1"/>
+            <a:r>
+              <a:rPr lang="en-US" dirty="0"/>
+              <a:t>HR, finance, marketing, </a:t>
+            </a:r>
+            <a:r>
+              <a:rPr lang="en-US" dirty="0" err="1"/>
+              <a:t>etc</a:t>
+            </a:r>
+            <a:r>
+              <a:rPr lang="en-US" dirty="0"/>
+              <a:t>…</a:t>
+            </a:r>
+          </a:p>
+          <a:p>
+            <a:pPr lvl="1"/>
+            <a:r>
+              <a:rPr lang="en-US" dirty="0"/>
+              <a:t>External data sources. </a:t>
+            </a:r>
+          </a:p>
+          <a:p>
+            <a:r>
+              <a:rPr lang="en-US" dirty="0"/>
+              <a:t>Consolidating this data is non-trivial. </a:t>
+            </a:r>
+          </a:p>
+        </p:txBody>
+      </p:sp>
+    </p:spTree>
+    <p:extLst>
+      <p:ext uri="{BB962C8B-B14F-4D97-AF65-F5344CB8AC3E}">
+        <p14:creationId xmlns:p14="http://schemas.microsoft.com/office/powerpoint/2010/main" val="1574936991"/>
+      </p:ext>
+    </p:extLst>
+  </p:cSld>
+  <p:clrMapOvr>
+    <a:masterClrMapping/>
+  </p:clrMapOvr>
+</p:sld>
+</file>
+
+<file path=ppt/slides/slide7.xml><?xml version="1.0" encoding="utf-8"?>
+<p:sld xmlns:a="http://schemas.openxmlformats.org/drawingml/2006/main" xmlns:r="http://schemas.openxmlformats.org/officeDocument/2006/relationships" xmlns:p="http://schemas.openxmlformats.org/presentationml/2006/main">
+  <p:cSld>
+    <p:spTree>
+      <p:nvGrpSpPr>
+        <p:cNvPr id="1" name=""/>
+        <p:cNvGrpSpPr/>
+        <p:nvPr/>
+      </p:nvGrpSpPr>
+      <p:grpSpPr>
+        <a:xfrm>
+          <a:off x="0" y="0"/>
+          <a:ext cx="0" cy="0"/>
+          <a:chOff x="0" y="0"/>
+          <a:chExt cx="0" cy="0"/>
+        </a:xfrm>
+      </p:grpSpPr>
+      <p:sp>
+        <p:nvSpPr>
+          <p:cNvPr id="2" name="Title 1">
+            <a:extLst>
+              <a:ext uri="{FF2B5EF4-FFF2-40B4-BE49-F238E27FC236}">
                 <a16:creationId xmlns:a16="http://schemas.microsoft.com/office/drawing/2014/main" id="{6CBB9488-81CC-9770-8976-D82712D91565}"/>
               </a:ext>
             </a:extLst>
@@ -8869,7 +9123,7 @@
 </p:sld>
 </file>
 
-<file path=ppt/slides/slide7.xml><?xml version="1.0" encoding="utf-8"?>
+<file path=ppt/slides/slide8.xml><?xml version="1.0" encoding="utf-8"?>
 <p:sld xmlns:a="http://schemas.openxmlformats.org/drawingml/2006/main" xmlns:r="http://schemas.openxmlformats.org/officeDocument/2006/relationships" xmlns:p="http://schemas.openxmlformats.org/presentationml/2006/main">
   <p:cSld>
     <p:spTree>
@@ -8996,7 +9250,7 @@
 </p:sld>
 </file>
 
-<file path=ppt/slides/slide8.xml><?xml version="1.0" encoding="utf-8"?>
+<file path=ppt/slides/slide9.xml><?xml version="1.0" encoding="utf-8"?>
 <p:sld xmlns:a="http://schemas.openxmlformats.org/drawingml/2006/main" xmlns:r="http://schemas.openxmlformats.org/officeDocument/2006/relationships" xmlns:p="http://schemas.openxmlformats.org/presentationml/2006/main">
   <p:cSld>
     <p:spTree>
@@ -9203,125 +9457,6 @@
     <p:extLst>
       <p:ext uri="{BB962C8B-B14F-4D97-AF65-F5344CB8AC3E}">
         <p14:creationId xmlns:p14="http://schemas.microsoft.com/office/powerpoint/2010/main" val="3290591874"/>
-      </p:ext>
-    </p:extLst>
-  </p:cSld>
-  <p:clrMapOvr>
-    <a:masterClrMapping/>
-  </p:clrMapOvr>
-</p:sld>
-</file>
-
-<file path=ppt/slides/slide9.xml><?xml version="1.0" encoding="utf-8"?>
-<p:sld xmlns:a="http://schemas.openxmlformats.org/drawingml/2006/main" xmlns:r="http://schemas.openxmlformats.org/officeDocument/2006/relationships" xmlns:p="http://schemas.openxmlformats.org/presentationml/2006/main">
-  <p:cSld>
-    <p:spTree>
-      <p:nvGrpSpPr>
-        <p:cNvPr id="1" name=""/>
-        <p:cNvGrpSpPr/>
-        <p:nvPr/>
-      </p:nvGrpSpPr>
-      <p:grpSpPr>
-        <a:xfrm>
-          <a:off x="0" y="0"/>
-          <a:ext cx="0" cy="0"/>
-          <a:chOff x="0" y="0"/>
-          <a:chExt cx="0" cy="0"/>
-        </a:xfrm>
-      </p:grpSpPr>
-      <p:sp>
-        <p:nvSpPr>
-          <p:cNvPr id="18436" name="Title 1"/>
-          <p:cNvSpPr>
-            <a:spLocks noGrp="1"/>
-          </p:cNvSpPr>
-          <p:nvPr>
-            <p:ph type="title"/>
-          </p:nvPr>
-        </p:nvSpPr>
-        <p:spPr/>
-        <p:txBody>
-          <a:bodyPr>
-            <a:noAutofit/>
-          </a:bodyPr>
-          <a:lstStyle/>
-          <a:p>
-            <a:pPr eaLnBrk="1" hangingPunct="1"/>
-            <a:r>
-              <a:rPr lang="en-US" sz="3600" dirty="0"/>
-              <a:t>Data Management</a:t>
-            </a:r>
-          </a:p>
-        </p:txBody>
-      </p:sp>
-      <p:sp>
-        <p:nvSpPr>
-          <p:cNvPr id="3" name="Content Placeholder 2"/>
-          <p:cNvSpPr>
-            <a:spLocks noGrp="1"/>
-          </p:cNvSpPr>
-          <p:nvPr>
-            <p:ph idx="1"/>
-          </p:nvPr>
-        </p:nvSpPr>
-        <p:spPr/>
-        <p:txBody>
-          <a:bodyPr>
-            <a:normAutofit fontScale="77500" lnSpcReduction="20000"/>
-          </a:bodyPr>
-          <a:lstStyle/>
-          <a:p>
-            <a:r>
-              <a:rPr lang="en-US" sz="2600" dirty="0"/>
-              <a:t>Entity: person, places, things, events</a:t>
-            </a:r>
-          </a:p>
-          <a:p>
-            <a:r>
-              <a:rPr lang="en-US" sz="2600" dirty="0"/>
-              <a:t>Instance: a single occurrence of an entity; represented as a record in a database</a:t>
-            </a:r>
-          </a:p>
-          <a:p>
-            <a:r>
-              <a:rPr lang="en-US" sz="2600" dirty="0"/>
-              <a:t>Entities have relationships with one another: either 1:1, 1:M, M:N</a:t>
-            </a:r>
-          </a:p>
-          <a:p>
-            <a:r>
-              <a:rPr lang="en-US" sz="2600" dirty="0"/>
-              <a:t>Primary key: attribute that uniquely identifies each instance of the entity; used to create a data structure called an index for fast data retrieval and searches </a:t>
-            </a:r>
-          </a:p>
-          <a:p>
-            <a:pPr lvl="1"/>
-            <a:r>
-              <a:rPr lang="en-US" sz="2200" dirty="0"/>
-              <a:t>Composite primary key: primary key that consists of more than one attribute; used when none of the individual attributes alone can uniquely identify each instance of the entity. (Not critical). </a:t>
-            </a:r>
-          </a:p>
-          <a:p>
-            <a:r>
-              <a:rPr lang="en-US" sz="2600" dirty="0"/>
-              <a:t>Foreign key: a primary key of a related entity</a:t>
-            </a:r>
-          </a:p>
-          <a:p>
-            <a:endParaRPr lang="en-US" sz="2800" dirty="0"/>
-          </a:p>
-          <a:p>
-            <a:endParaRPr lang="en-US" dirty="0"/>
-          </a:p>
-          <a:p>
-            <a:endParaRPr lang="en-US" dirty="0"/>
-          </a:p>
-        </p:txBody>
-      </p:sp>
-    </p:spTree>
-    <p:extLst>
-      <p:ext uri="{BB962C8B-B14F-4D97-AF65-F5344CB8AC3E}">
-        <p14:creationId xmlns:p14="http://schemas.microsoft.com/office/powerpoint/2010/main" val="2668965908"/>
       </p:ext>
     </p:extLst>
   </p:cSld>

--- a/slides/chapter_6_joins.pptx
+++ b/slides/chapter_6_joins.pptx
@@ -5,41 +5,42 @@
     <p:sldMasterId id="2147483660" r:id="rId1"/>
   </p:sldMasterIdLst>
   <p:notesMasterIdLst>
-    <p:notesMasterId r:id="rId34"/>
+    <p:notesMasterId r:id="rId35"/>
   </p:notesMasterIdLst>
   <p:sldIdLst>
     <p:sldId id="374" r:id="rId2"/>
-    <p:sldId id="256" r:id="rId3"/>
-    <p:sldId id="257" r:id="rId4"/>
-    <p:sldId id="306" r:id="rId5"/>
-    <p:sldId id="362" r:id="rId6"/>
-    <p:sldId id="258" r:id="rId7"/>
-    <p:sldId id="364" r:id="rId8"/>
-    <p:sldId id="369" r:id="rId9"/>
-    <p:sldId id="371" r:id="rId10"/>
-    <p:sldId id="333" r:id="rId11"/>
-    <p:sldId id="370" r:id="rId12"/>
-    <p:sldId id="353" r:id="rId13"/>
-    <p:sldId id="304" r:id="rId14"/>
-    <p:sldId id="305" r:id="rId15"/>
-    <p:sldId id="363" r:id="rId16"/>
-    <p:sldId id="334" r:id="rId17"/>
-    <p:sldId id="307" r:id="rId18"/>
-    <p:sldId id="308" r:id="rId19"/>
-    <p:sldId id="310" r:id="rId20"/>
-    <p:sldId id="367" r:id="rId21"/>
-    <p:sldId id="354" r:id="rId22"/>
-    <p:sldId id="366" r:id="rId23"/>
-    <p:sldId id="355" r:id="rId24"/>
-    <p:sldId id="373" r:id="rId25"/>
-    <p:sldId id="356" r:id="rId26"/>
-    <p:sldId id="357" r:id="rId27"/>
-    <p:sldId id="358" r:id="rId28"/>
-    <p:sldId id="359" r:id="rId29"/>
-    <p:sldId id="360" r:id="rId30"/>
-    <p:sldId id="368" r:id="rId31"/>
-    <p:sldId id="372" r:id="rId32"/>
-    <p:sldId id="365" r:id="rId33"/>
+    <p:sldId id="375" r:id="rId3"/>
+    <p:sldId id="256" r:id="rId4"/>
+    <p:sldId id="257" r:id="rId5"/>
+    <p:sldId id="306" r:id="rId6"/>
+    <p:sldId id="362" r:id="rId7"/>
+    <p:sldId id="258" r:id="rId8"/>
+    <p:sldId id="364" r:id="rId9"/>
+    <p:sldId id="369" r:id="rId10"/>
+    <p:sldId id="371" r:id="rId11"/>
+    <p:sldId id="333" r:id="rId12"/>
+    <p:sldId id="370" r:id="rId13"/>
+    <p:sldId id="353" r:id="rId14"/>
+    <p:sldId id="304" r:id="rId15"/>
+    <p:sldId id="305" r:id="rId16"/>
+    <p:sldId id="363" r:id="rId17"/>
+    <p:sldId id="334" r:id="rId18"/>
+    <p:sldId id="307" r:id="rId19"/>
+    <p:sldId id="308" r:id="rId20"/>
+    <p:sldId id="310" r:id="rId21"/>
+    <p:sldId id="367" r:id="rId22"/>
+    <p:sldId id="354" r:id="rId23"/>
+    <p:sldId id="366" r:id="rId24"/>
+    <p:sldId id="355" r:id="rId25"/>
+    <p:sldId id="373" r:id="rId26"/>
+    <p:sldId id="356" r:id="rId27"/>
+    <p:sldId id="357" r:id="rId28"/>
+    <p:sldId id="358" r:id="rId29"/>
+    <p:sldId id="359" r:id="rId30"/>
+    <p:sldId id="360" r:id="rId31"/>
+    <p:sldId id="368" r:id="rId32"/>
+    <p:sldId id="372" r:id="rId33"/>
+    <p:sldId id="365" r:id="rId34"/>
   </p:sldIdLst>
   <p:sldSz cx="12192000" cy="6858000"/>
   <p:notesSz cx="6858000" cy="9144000"/>
@@ -588,7 +589,7 @@
             <a:fld id="{D6227277-B0D8-4809-8878-D1ED6D19D374}" type="slidenum">
               <a:rPr lang="en-US"/>
               <a:pPr/>
-              <a:t>4</a:t>
+              <a:t>5</a:t>
             </a:fld>
             <a:endParaRPr lang="en-US"/>
           </a:p>
@@ -705,7 +706,7 @@
             <a:fld id="{D6227277-B0D8-4809-8878-D1ED6D19D374}" type="slidenum">
               <a:rPr lang="en-US"/>
               <a:pPr/>
-              <a:t>10</a:t>
+              <a:t>11</a:t>
             </a:fld>
             <a:endParaRPr lang="en-US"/>
           </a:p>
@@ -822,7 +823,7 @@
             <a:fld id="{D6227277-B0D8-4809-8878-D1ED6D19D374}" type="slidenum">
               <a:rPr lang="en-US"/>
               <a:pPr/>
-              <a:t>13</a:t>
+              <a:t>14</a:t>
             </a:fld>
             <a:endParaRPr lang="en-US"/>
           </a:p>
@@ -939,7 +940,7 @@
             <a:fld id="{D6227277-B0D8-4809-8878-D1ED6D19D374}" type="slidenum">
               <a:rPr lang="en-US"/>
               <a:pPr/>
-              <a:t>14</a:t>
+              <a:t>15</a:t>
             </a:fld>
             <a:endParaRPr lang="en-US"/>
           </a:p>
@@ -1056,7 +1057,7 @@
             <a:fld id="{D6227277-B0D8-4809-8878-D1ED6D19D374}" type="slidenum">
               <a:rPr lang="en-US"/>
               <a:pPr/>
-              <a:t>16</a:t>
+              <a:t>17</a:t>
             </a:fld>
             <a:endParaRPr lang="en-US"/>
           </a:p>
@@ -1173,7 +1174,7 @@
             <a:fld id="{D6227277-B0D8-4809-8878-D1ED6D19D374}" type="slidenum">
               <a:rPr lang="en-US"/>
               <a:pPr/>
-              <a:t>17</a:t>
+              <a:t>18</a:t>
             </a:fld>
             <a:endParaRPr lang="en-US"/>
           </a:p>
@@ -1290,7 +1291,7 @@
             <a:fld id="{D6227277-B0D8-4809-8878-D1ED6D19D374}" type="slidenum">
               <a:rPr lang="en-US"/>
               <a:pPr/>
-              <a:t>18</a:t>
+              <a:t>19</a:t>
             </a:fld>
             <a:endParaRPr lang="en-US"/>
           </a:p>
@@ -1407,7 +1408,7 @@
             <a:fld id="{D6227277-B0D8-4809-8878-D1ED6D19D374}" type="slidenum">
               <a:rPr lang="en-US"/>
               <a:pPr/>
-              <a:t>19</a:t>
+              <a:t>20</a:t>
             </a:fld>
             <a:endParaRPr lang="en-US"/>
           </a:p>
@@ -5008,6 +5009,13 @@
             </a:r>
           </a:p>
           <a:p>
+            <a:pPr lvl="1"/>
+            <a:r>
+              <a:rPr lang="en-US" dirty="0"/>
+              <a:t>Chapter 7, distribution visualizations – we covered in chart types, read it, it’s quite short. </a:t>
+            </a:r>
+          </a:p>
+          <a:p>
             <a:r>
               <a:rPr lang="en-US" dirty="0"/>
               <a:t>Next time – we’ll hold some time for </a:t>
@@ -5065,7 +5073,13 @@
       </p:grpSpPr>
       <p:sp>
         <p:nvSpPr>
-          <p:cNvPr id="18436" name="Title 1"/>
+          <p:cNvPr id="2" name="Title 1">
+            <a:extLst>
+              <a:ext uri="{FF2B5EF4-FFF2-40B4-BE49-F238E27FC236}">
+                <a16:creationId xmlns:a16="http://schemas.microsoft.com/office/drawing/2014/main" id="{BCE8A05C-692F-A4B8-E540-7B52BD8CD59B}"/>
+              </a:ext>
+            </a:extLst>
+          </p:cNvPr>
           <p:cNvSpPr>
             <a:spLocks noGrp="1"/>
           </p:cNvSpPr>
@@ -5075,22 +5089,25 @@
         </p:nvSpPr>
         <p:spPr/>
         <p:txBody>
-          <a:bodyPr>
-            <a:noAutofit/>
-          </a:bodyPr>
-          <a:lstStyle/>
-          <a:p>
-            <a:pPr eaLnBrk="1" hangingPunct="1"/>
-            <a:r>
-              <a:rPr lang="en-US" sz="3600" dirty="0"/>
-              <a:t>Data Management</a:t>
-            </a:r>
-          </a:p>
-        </p:txBody>
-      </p:sp>
-      <p:sp>
-        <p:nvSpPr>
-          <p:cNvPr id="3" name="Content Placeholder 2"/>
+          <a:bodyPr/>
+          <a:lstStyle/>
+          <a:p>
+            <a:r>
+              <a:rPr lang="en-US" dirty="0"/>
+              <a:t>Data Warehouse</a:t>
+            </a:r>
+          </a:p>
+        </p:txBody>
+      </p:sp>
+      <p:sp>
+        <p:nvSpPr>
+          <p:cNvPr id="3" name="Content Placeholder 2">
+            <a:extLst>
+              <a:ext uri="{FF2B5EF4-FFF2-40B4-BE49-F238E27FC236}">
+                <a16:creationId xmlns:a16="http://schemas.microsoft.com/office/drawing/2014/main" id="{39421BB9-D253-A836-5EBE-6C1E99EA1EF4}"/>
+              </a:ext>
+            </a:extLst>
+          </p:cNvPr>
           <p:cNvSpPr>
             <a:spLocks noGrp="1"/>
           </p:cNvSpPr>
@@ -5098,64 +5115,152 @@
             <p:ph idx="1"/>
           </p:nvPr>
         </p:nvSpPr>
-        <p:spPr/>
-        <p:txBody>
-          <a:bodyPr>
-            <a:normAutofit fontScale="77500" lnSpcReduction="20000"/>
-          </a:bodyPr>
-          <a:lstStyle/>
-          <a:p>
-            <a:r>
-              <a:rPr lang="en-US" sz="2600" dirty="0"/>
-              <a:t>Entity: person, places, things, events</a:t>
-            </a:r>
-          </a:p>
-          <a:p>
-            <a:r>
-              <a:rPr lang="en-US" sz="2600" dirty="0"/>
-              <a:t>Instance: a single occurrence of an entity; represented as a record in a database</a:t>
-            </a:r>
-          </a:p>
-          <a:p>
-            <a:r>
-              <a:rPr lang="en-US" sz="2600" dirty="0"/>
-              <a:t>Entities have relationships with one another: either 1:1, 1:M, M:N</a:t>
-            </a:r>
-          </a:p>
-          <a:p>
-            <a:r>
-              <a:rPr lang="en-US" sz="2600" dirty="0"/>
-              <a:t>Primary key: attribute that uniquely identifies each instance of the entity; used to create a data structure called an index for fast data retrieval and searches </a:t>
-            </a:r>
-          </a:p>
-          <a:p>
-            <a:pPr lvl="1"/>
-            <a:r>
-              <a:rPr lang="en-US" sz="2200" dirty="0"/>
-              <a:t>Composite primary key: primary key that consists of more than one attribute; used when none of the individual attributes alone can uniquely identify each instance of the entity. (Not critical). </a:t>
-            </a:r>
-          </a:p>
-          <a:p>
-            <a:r>
-              <a:rPr lang="en-US" sz="2600" dirty="0"/>
-              <a:t>Foreign key: a primary key of a related entity</a:t>
-            </a:r>
-          </a:p>
-          <a:p>
-            <a:endParaRPr lang="en-US" sz="2800" dirty="0"/>
-          </a:p>
-          <a:p>
-            <a:endParaRPr lang="en-US" dirty="0"/>
-          </a:p>
-          <a:p>
-            <a:endParaRPr lang="en-US" dirty="0"/>
-          </a:p>
-        </p:txBody>
-      </p:sp>
+        <p:spPr>
+          <a:xfrm>
+            <a:off x="185351" y="1853754"/>
+            <a:ext cx="10869503" cy="4199727"/>
+          </a:xfrm>
+        </p:spPr>
+        <p:txBody>
+          <a:bodyPr/>
+          <a:lstStyle/>
+          <a:p>
+            <a:r>
+              <a:rPr lang="en-US" dirty="0"/>
+              <a:t>The ETL process normally loads our data into a special database - the data warehouse. </a:t>
+            </a:r>
+          </a:p>
+          <a:p>
+            <a:pPr lvl="1"/>
+            <a:r>
+              <a:rPr lang="en-US" dirty="0"/>
+              <a:t>Usually periodically – hourly, nightly, </a:t>
+            </a:r>
+            <a:r>
+              <a:rPr lang="en-US" dirty="0" err="1"/>
+              <a:t>etc</a:t>
+            </a:r>
+            <a:r>
+              <a:rPr lang="en-US" dirty="0"/>
+              <a:t>…</a:t>
+            </a:r>
+          </a:p>
+          <a:p>
+            <a:r>
+              <a:rPr lang="en-US" dirty="0"/>
+              <a:t>The data warehouse is a large </a:t>
+            </a:r>
+            <a:r>
+              <a:rPr lang="en-US" dirty="0" err="1"/>
+              <a:t>db</a:t>
+            </a:r>
+            <a:r>
+              <a:rPr lang="en-US" dirty="0"/>
+              <a:t> that is intended for archiving and analysis. </a:t>
+            </a:r>
+          </a:p>
+          <a:p>
+            <a:pPr lvl="1"/>
+            <a:r>
+              <a:rPr lang="en-US" dirty="0"/>
+              <a:t>Not used with live transactions or current data. </a:t>
+            </a:r>
+          </a:p>
+          <a:p>
+            <a:pPr lvl="1"/>
+            <a:r>
+              <a:rPr lang="en-US" dirty="0"/>
+              <a:t>Stores (ideally) all historical data that the organization needs – central source o’ truth. </a:t>
+            </a:r>
+          </a:p>
+          <a:p>
+            <a:pPr lvl="1"/>
+            <a:r>
+              <a:rPr lang="en-US" dirty="0"/>
+              <a:t>Allows for data from different sources to be integrated for analysis. </a:t>
+            </a:r>
+          </a:p>
+          <a:p>
+            <a:pPr lvl="1"/>
+            <a:r>
+              <a:rPr lang="en-US" dirty="0"/>
+              <a:t>All the data is consistent and clean once it gets here, so analyst and just analyze. </a:t>
+            </a:r>
+          </a:p>
+          <a:p>
+            <a:r>
+              <a:rPr lang="en-US" dirty="0"/>
+              <a:t>Data is stored with many entities and must be connected for analysis. </a:t>
+            </a:r>
+          </a:p>
+          <a:p>
+            <a:pPr lvl="1"/>
+            <a:r>
+              <a:rPr lang="en-US" dirty="0"/>
+              <a:t>ER diagrams and </a:t>
+            </a:r>
+            <a:r>
+              <a:rPr lang="en-US" dirty="0" err="1"/>
+              <a:t>dicts</a:t>
+            </a:r>
+            <a:r>
+              <a:rPr lang="en-US" dirty="0"/>
+              <a:t> show layout, and we must join to make usable data. </a:t>
+            </a:r>
+          </a:p>
+        </p:txBody>
+      </p:sp>
+      <p:pic>
+        <p:nvPicPr>
+          <p:cNvPr id="3074" name="Picture 2" descr="What Is Cloud Data Warehousing">
+            <a:extLst>
+              <a:ext uri="{FF2B5EF4-FFF2-40B4-BE49-F238E27FC236}">
+                <a16:creationId xmlns:a16="http://schemas.microsoft.com/office/drawing/2014/main" id="{311AABCD-8C42-D7FA-AA95-265BB746FBFD}"/>
+              </a:ext>
+            </a:extLst>
+          </p:cNvPr>
+          <p:cNvPicPr>
+            <a:picLocks noChangeAspect="1" noChangeArrowheads="1"/>
+          </p:cNvPicPr>
+          <p:nvPr/>
+        </p:nvPicPr>
+        <p:blipFill rotWithShape="1">
+          <a:blip r:embed="rId2">
+            <a:extLst>
+              <a:ext uri="{28A0092B-C50C-407E-A947-70E740481C1C}">
+                <a14:useLocalDpi xmlns:a14="http://schemas.microsoft.com/office/drawing/2010/main" val="0"/>
+              </a:ext>
+            </a:extLst>
+          </a:blip>
+          <a:srcRect l="8493" r="7239"/>
+          <a:stretch>
+            <a:fillRect/>
+          </a:stretch>
+        </p:blipFill>
+        <p:spPr bwMode="auto">
+          <a:xfrm>
+            <a:off x="9090454" y="3429000"/>
+            <a:ext cx="3101546" cy="3429000"/>
+          </a:xfrm>
+          <a:prstGeom prst="rect">
+            <a:avLst/>
+          </a:prstGeom>
+          <a:noFill/>
+          <a:extLst>
+            <a:ext uri="{909E8E84-426E-40DD-AFC4-6F175D3DCCD1}">
+              <a14:hiddenFill xmlns:a14="http://schemas.microsoft.com/office/drawing/2010/main">
+                <a:solidFill>
+                  <a:srgbClr val="FFFFFF"/>
+                </a:solidFill>
+              </a14:hiddenFill>
+            </a:ext>
+          </a:extLst>
+        </p:spPr>
+      </p:pic>
     </p:spTree>
     <p:extLst>
       <p:ext uri="{BB962C8B-B14F-4D97-AF65-F5344CB8AC3E}">
-        <p14:creationId xmlns:p14="http://schemas.microsoft.com/office/powerpoint/2010/main" val="2668965908"/>
+        <p14:creationId xmlns:p14="http://schemas.microsoft.com/office/powerpoint/2010/main" val="3290591874"/>
       </p:ext>
     </p:extLst>
   </p:cSld>
@@ -5184,13 +5289,7 @@
       </p:grpSpPr>
       <p:sp>
         <p:nvSpPr>
-          <p:cNvPr id="2" name="Title 1">
-            <a:extLst>
-              <a:ext uri="{FF2B5EF4-FFF2-40B4-BE49-F238E27FC236}">
-                <a16:creationId xmlns:a16="http://schemas.microsoft.com/office/drawing/2014/main" id="{AD339071-9DC0-1157-7B36-EE03960E292A}"/>
-              </a:ext>
-            </a:extLst>
-          </p:cNvPr>
+          <p:cNvPr id="18436" name="Title 1"/>
           <p:cNvSpPr>
             <a:spLocks noGrp="1"/>
           </p:cNvSpPr>
@@ -5200,25 +5299,22 @@
         </p:nvSpPr>
         <p:spPr/>
         <p:txBody>
-          <a:bodyPr/>
-          <a:lstStyle/>
-          <a:p>
-            <a:r>
-              <a:rPr lang="en-US" dirty="0"/>
-              <a:t>Our Data Life</a:t>
-            </a:r>
-          </a:p>
-        </p:txBody>
-      </p:sp>
-      <p:sp>
-        <p:nvSpPr>
-          <p:cNvPr id="3" name="Content Placeholder 2">
-            <a:extLst>
-              <a:ext uri="{FF2B5EF4-FFF2-40B4-BE49-F238E27FC236}">
-                <a16:creationId xmlns:a16="http://schemas.microsoft.com/office/drawing/2014/main" id="{0E1703C4-7FD2-B791-60AA-ADF73735B763}"/>
-              </a:ext>
-            </a:extLst>
-          </p:cNvPr>
+          <a:bodyPr>
+            <a:noAutofit/>
+          </a:bodyPr>
+          <a:lstStyle/>
+          <a:p>
+            <a:pPr eaLnBrk="1" hangingPunct="1"/>
+            <a:r>
+              <a:rPr lang="en-US" sz="3600" dirty="0"/>
+              <a:t>Data Management</a:t>
+            </a:r>
+          </a:p>
+        </p:txBody>
+      </p:sp>
+      <p:sp>
+        <p:nvSpPr>
+          <p:cNvPr id="3" name="Content Placeholder 2"/>
           <p:cNvSpPr>
             <a:spLocks noGrp="1"/>
           </p:cNvSpPr>
@@ -5226,81 +5322,64 @@
             <p:ph idx="1"/>
           </p:nvPr>
         </p:nvSpPr>
-        <p:spPr>
-          <a:xfrm>
-            <a:off x="1451579" y="1933904"/>
-            <a:ext cx="9603275" cy="4119578"/>
-          </a:xfrm>
-        </p:spPr>
-        <p:txBody>
-          <a:bodyPr/>
-          <a:lstStyle/>
-          <a:p>
-            <a:r>
-              <a:rPr lang="en-US" dirty="0"/>
-              <a:t>At this point we’ve touched on most of the infrastructure related to our data. </a:t>
-            </a:r>
-          </a:p>
-          <a:p>
-            <a:r>
-              <a:rPr lang="en-US" dirty="0"/>
-              <a:t>Data is generated in many places, include those that process transactions – OLTP. </a:t>
-            </a:r>
-          </a:p>
-          <a:p>
-            <a:pPr lvl="1"/>
-            <a:r>
-              <a:rPr lang="en-US" dirty="0"/>
-              <a:t>Each of these system normally has a DB that stores those transactions. </a:t>
-            </a:r>
-          </a:p>
-          <a:p>
-            <a:r>
-              <a:rPr lang="en-US" dirty="0"/>
-              <a:t>That data is consolidated and cleaned in an ETL process and stored centrally. </a:t>
-            </a:r>
-          </a:p>
-          <a:p>
-            <a:r>
-              <a:rPr lang="en-US" dirty="0"/>
-              <a:t>We connect to that warehouse to get data. </a:t>
-            </a:r>
-          </a:p>
-          <a:p>
-            <a:pPr lvl="1"/>
-            <a:r>
-              <a:rPr lang="en-US" dirty="0"/>
-              <a:t>The database uses entity-relationship model to store data on many different things. </a:t>
-            </a:r>
-          </a:p>
-          <a:p>
-            <a:pPr lvl="1"/>
-            <a:r>
-              <a:rPr lang="en-US" dirty="0"/>
-              <a:t>We need to navigate the </a:t>
-            </a:r>
-            <a:r>
-              <a:rPr lang="en-US" dirty="0" err="1"/>
-              <a:t>db</a:t>
-            </a:r>
-            <a:r>
-              <a:rPr lang="en-US" dirty="0"/>
-              <a:t> structure and join to make useful data. </a:t>
-            </a:r>
-          </a:p>
-          <a:p>
-            <a:pPr lvl="1"/>
-            <a:r>
-              <a:rPr lang="en-US" dirty="0"/>
-              <a:t>We can get data on almost anything, but it comes separated. (CSVs we use are the ~output). </a:t>
-            </a:r>
+        <p:spPr/>
+        <p:txBody>
+          <a:bodyPr>
+            <a:normAutofit fontScale="77500" lnSpcReduction="20000"/>
+          </a:bodyPr>
+          <a:lstStyle/>
+          <a:p>
+            <a:r>
+              <a:rPr lang="en-US" sz="2600" dirty="0"/>
+              <a:t>Entity: person, places, things, events</a:t>
+            </a:r>
+          </a:p>
+          <a:p>
+            <a:r>
+              <a:rPr lang="en-US" sz="2600" dirty="0"/>
+              <a:t>Instance: a single occurrence of an entity; represented as a record in a database</a:t>
+            </a:r>
+          </a:p>
+          <a:p>
+            <a:r>
+              <a:rPr lang="en-US" sz="2600" dirty="0"/>
+              <a:t>Entities have relationships with one another: either 1:1, 1:M, M:N</a:t>
+            </a:r>
+          </a:p>
+          <a:p>
+            <a:r>
+              <a:rPr lang="en-US" sz="2600" dirty="0"/>
+              <a:t>Primary key: attribute that uniquely identifies each instance of the entity; used to create a data structure called an index for fast data retrieval and searches </a:t>
+            </a:r>
+          </a:p>
+          <a:p>
+            <a:pPr lvl="1"/>
+            <a:r>
+              <a:rPr lang="en-US" sz="2200" dirty="0"/>
+              <a:t>Composite primary key: primary key that consists of more than one attribute; used when none of the individual attributes alone can uniquely identify each instance of the entity. (Not critical). </a:t>
+            </a:r>
+          </a:p>
+          <a:p>
+            <a:r>
+              <a:rPr lang="en-US" sz="2600" dirty="0"/>
+              <a:t>Foreign key: a primary key of a related entity</a:t>
+            </a:r>
+          </a:p>
+          <a:p>
+            <a:endParaRPr lang="en-US" sz="2800" dirty="0"/>
+          </a:p>
+          <a:p>
+            <a:endParaRPr lang="en-US" dirty="0"/>
+          </a:p>
+          <a:p>
+            <a:endParaRPr lang="en-US" dirty="0"/>
           </a:p>
         </p:txBody>
       </p:sp>
     </p:spTree>
     <p:extLst>
       <p:ext uri="{BB962C8B-B14F-4D97-AF65-F5344CB8AC3E}">
-        <p14:creationId xmlns:p14="http://schemas.microsoft.com/office/powerpoint/2010/main" val="682342646"/>
+        <p14:creationId xmlns:p14="http://schemas.microsoft.com/office/powerpoint/2010/main" val="2668965908"/>
       </p:ext>
     </p:extLst>
   </p:cSld>
@@ -5329,10 +5408,10 @@
       </p:grpSpPr>
       <p:sp>
         <p:nvSpPr>
-          <p:cNvPr id="4" name="Title 3">
+          <p:cNvPr id="2" name="Title 1">
             <a:extLst>
               <a:ext uri="{FF2B5EF4-FFF2-40B4-BE49-F238E27FC236}">
-                <a16:creationId xmlns:a16="http://schemas.microsoft.com/office/drawing/2014/main" id="{6BB89F83-DD6F-7EEC-C494-DE316ECD0B43}"/>
+                <a16:creationId xmlns:a16="http://schemas.microsoft.com/office/drawing/2014/main" id="{AD339071-9DC0-1157-7B36-EE03960E292A}"/>
               </a:ext>
             </a:extLst>
           </p:cNvPr>
@@ -5350,17 +5429,17 @@
           <a:p>
             <a:r>
               <a:rPr lang="en-US" dirty="0"/>
-              <a:t>SQL</a:t>
-            </a:r>
-          </a:p>
-        </p:txBody>
-      </p:sp>
-      <p:sp>
-        <p:nvSpPr>
-          <p:cNvPr id="5" name="Content Placeholder 4">
+              <a:t>Our Data Life</a:t>
+            </a:r>
+          </a:p>
+        </p:txBody>
+      </p:sp>
+      <p:sp>
+        <p:nvSpPr>
+          <p:cNvPr id="3" name="Content Placeholder 2">
             <a:extLst>
               <a:ext uri="{FF2B5EF4-FFF2-40B4-BE49-F238E27FC236}">
-                <a16:creationId xmlns:a16="http://schemas.microsoft.com/office/drawing/2014/main" id="{07D507C7-7485-1599-066C-97F97A07983E}"/>
+                <a16:creationId xmlns:a16="http://schemas.microsoft.com/office/drawing/2014/main" id="{0E1703C4-7FD2-B791-60AA-ADF73735B763}"/>
               </a:ext>
             </a:extLst>
           </p:cNvPr>
@@ -5371,54 +5450,73 @@
             <p:ph idx="1"/>
           </p:nvPr>
         </p:nvSpPr>
-        <p:spPr/>
+        <p:spPr>
+          <a:xfrm>
+            <a:off x="1451579" y="1933904"/>
+            <a:ext cx="9603275" cy="4119578"/>
+          </a:xfrm>
+        </p:spPr>
         <p:txBody>
           <a:bodyPr/>
           <a:lstStyle/>
           <a:p>
             <a:r>
               <a:rPr lang="en-US" dirty="0"/>
-              <a:t>Once data are stored in a relational database, we can retrieve them using database queries.</a:t>
-            </a:r>
-          </a:p>
-          <a:p>
-            <a:r>
-              <a:rPr lang="en-US" dirty="0"/>
-              <a:t>SQL is how we “talk” to a database. </a:t>
-            </a:r>
-          </a:p>
-          <a:p>
-            <a:r>
-              <a:rPr lang="en-US" dirty="0"/>
-              <a:t>We specify what we want, the database figures out how to get it. </a:t>
-            </a:r>
-          </a:p>
-          <a:p>
-            <a:pPr lvl="1"/>
-            <a:r>
-              <a:rPr lang="en-US" dirty="0"/>
-              <a:t>SELECT -&gt; Give me all the records that match these criteria…</a:t>
-            </a:r>
-          </a:p>
-          <a:p>
-            <a:r>
-              <a:rPr lang="en-US" dirty="0"/>
-              <a:t>In Tableau, there are SQL queries generated behind the scenes when we manipulate data. </a:t>
-            </a:r>
-          </a:p>
-          <a:p>
-            <a:pPr lvl="1"/>
-            <a:r>
-              <a:rPr lang="en-US" dirty="0"/>
-              <a:t>You don’t need to know </a:t>
+              <a:t>At this point we’ve touched on most of the infrastructure related to our data. </a:t>
+            </a:r>
+          </a:p>
+          <a:p>
+            <a:r>
+              <a:rPr lang="en-US" dirty="0"/>
+              <a:t>Data is generated in many places, include those that process transactions – OLTP. </a:t>
+            </a:r>
+          </a:p>
+          <a:p>
+            <a:pPr lvl="1"/>
+            <a:r>
+              <a:rPr lang="en-US" dirty="0"/>
+              <a:t>Each of these system normally has a DB that stores those transactions. </a:t>
+            </a:r>
+          </a:p>
+          <a:p>
+            <a:r>
+              <a:rPr lang="en-US" dirty="0"/>
+              <a:t>That data is consolidated and cleaned in an ETL process and stored centrally. </a:t>
+            </a:r>
+          </a:p>
+          <a:p>
+            <a:r>
+              <a:rPr lang="en-US" dirty="0"/>
+              <a:t>We connect to that warehouse to get data. </a:t>
+            </a:r>
+          </a:p>
+          <a:p>
+            <a:pPr lvl="1"/>
+            <a:r>
+              <a:rPr lang="en-US" dirty="0"/>
+              <a:t>The database uses entity-relationship model to store data on many different things. </a:t>
+            </a:r>
+          </a:p>
+          <a:p>
+            <a:pPr lvl="1"/>
+            <a:r>
+              <a:rPr lang="en-US" dirty="0"/>
+              <a:t>We need to navigate the </a:t>
             </a:r>
             <a:r>
               <a:rPr lang="en-US" dirty="0" err="1"/>
-              <a:t>sql</a:t>
-            </a:r>
-            <a:r>
-              <a:rPr lang="en-US" dirty="0"/>
-              <a:t> but you need to understand and use the concepts. </a:t>
+              <a:t>db</a:t>
+            </a:r>
+            <a:r>
+              <a:rPr lang="en-US" dirty="0"/>
+              <a:t> structure and join to make useful data. </a:t>
+            </a:r>
+          </a:p>
+          <a:p>
+            <a:pPr lvl="1"/>
+            <a:r>
+              <a:rPr lang="en-US" dirty="0"/>
+              <a:t>We can get data on almost anything, but it comes separated. (CSVs we use are the ~output). </a:t>
             </a:r>
           </a:p>
         </p:txBody>
@@ -5426,7 +5524,7 @@
     </p:spTree>
     <p:extLst>
       <p:ext uri="{BB962C8B-B14F-4D97-AF65-F5344CB8AC3E}">
-        <p14:creationId xmlns:p14="http://schemas.microsoft.com/office/powerpoint/2010/main" val="3069179441"/>
+        <p14:creationId xmlns:p14="http://schemas.microsoft.com/office/powerpoint/2010/main" val="682342646"/>
       </p:ext>
     </p:extLst>
   </p:cSld>
@@ -5455,6 +5553,132 @@
       </p:grpSpPr>
       <p:sp>
         <p:nvSpPr>
+          <p:cNvPr id="4" name="Title 3">
+            <a:extLst>
+              <a:ext uri="{FF2B5EF4-FFF2-40B4-BE49-F238E27FC236}">
+                <a16:creationId xmlns:a16="http://schemas.microsoft.com/office/drawing/2014/main" id="{6BB89F83-DD6F-7EEC-C494-DE316ECD0B43}"/>
+              </a:ext>
+            </a:extLst>
+          </p:cNvPr>
+          <p:cNvSpPr>
+            <a:spLocks noGrp="1"/>
+          </p:cNvSpPr>
+          <p:nvPr>
+            <p:ph type="title"/>
+          </p:nvPr>
+        </p:nvSpPr>
+        <p:spPr/>
+        <p:txBody>
+          <a:bodyPr/>
+          <a:lstStyle/>
+          <a:p>
+            <a:r>
+              <a:rPr lang="en-US" dirty="0"/>
+              <a:t>SQL</a:t>
+            </a:r>
+          </a:p>
+        </p:txBody>
+      </p:sp>
+      <p:sp>
+        <p:nvSpPr>
+          <p:cNvPr id="5" name="Content Placeholder 4">
+            <a:extLst>
+              <a:ext uri="{FF2B5EF4-FFF2-40B4-BE49-F238E27FC236}">
+                <a16:creationId xmlns:a16="http://schemas.microsoft.com/office/drawing/2014/main" id="{07D507C7-7485-1599-066C-97F97A07983E}"/>
+              </a:ext>
+            </a:extLst>
+          </p:cNvPr>
+          <p:cNvSpPr>
+            <a:spLocks noGrp="1"/>
+          </p:cNvSpPr>
+          <p:nvPr>
+            <p:ph idx="1"/>
+          </p:nvPr>
+        </p:nvSpPr>
+        <p:spPr/>
+        <p:txBody>
+          <a:bodyPr/>
+          <a:lstStyle/>
+          <a:p>
+            <a:r>
+              <a:rPr lang="en-US" dirty="0"/>
+              <a:t>Once data are stored in a relational database, we can retrieve them using database queries.</a:t>
+            </a:r>
+          </a:p>
+          <a:p>
+            <a:r>
+              <a:rPr lang="en-US" dirty="0"/>
+              <a:t>SQL is how we “talk” to a database. </a:t>
+            </a:r>
+          </a:p>
+          <a:p>
+            <a:r>
+              <a:rPr lang="en-US" dirty="0"/>
+              <a:t>We specify what we want, the database figures out how to get it. </a:t>
+            </a:r>
+          </a:p>
+          <a:p>
+            <a:pPr lvl="1"/>
+            <a:r>
+              <a:rPr lang="en-US" dirty="0"/>
+              <a:t>SELECT -&gt; Give me all the records that match these criteria…</a:t>
+            </a:r>
+          </a:p>
+          <a:p>
+            <a:r>
+              <a:rPr lang="en-US" dirty="0"/>
+              <a:t>In Tableau, there are SQL queries generated behind the scenes when we manipulate data. </a:t>
+            </a:r>
+          </a:p>
+          <a:p>
+            <a:pPr lvl="1"/>
+            <a:r>
+              <a:rPr lang="en-US" dirty="0"/>
+              <a:t>You don’t need to know </a:t>
+            </a:r>
+            <a:r>
+              <a:rPr lang="en-US" dirty="0" err="1"/>
+              <a:t>sql</a:t>
+            </a:r>
+            <a:r>
+              <a:rPr lang="en-US" dirty="0"/>
+              <a:t> but you need to understand and use the concepts. </a:t>
+            </a:r>
+          </a:p>
+        </p:txBody>
+      </p:sp>
+    </p:spTree>
+    <p:extLst>
+      <p:ext uri="{BB962C8B-B14F-4D97-AF65-F5344CB8AC3E}">
+        <p14:creationId xmlns:p14="http://schemas.microsoft.com/office/powerpoint/2010/main" val="3069179441"/>
+      </p:ext>
+    </p:extLst>
+  </p:cSld>
+  <p:clrMapOvr>
+    <a:masterClrMapping/>
+  </p:clrMapOvr>
+</p:sld>
+</file>
+
+<file path=ppt/slides/slide14.xml><?xml version="1.0" encoding="utf-8"?>
+<p:sld xmlns:a="http://schemas.openxmlformats.org/drawingml/2006/main" xmlns:r="http://schemas.openxmlformats.org/officeDocument/2006/relationships" xmlns:p="http://schemas.openxmlformats.org/presentationml/2006/main">
+  <p:cSld>
+    <p:spTree>
+      <p:nvGrpSpPr>
+        <p:cNvPr id="1" name=""/>
+        <p:cNvGrpSpPr/>
+        <p:nvPr/>
+      </p:nvGrpSpPr>
+      <p:grpSpPr>
+        <a:xfrm>
+          <a:off x="0" y="0"/>
+          <a:ext cx="0" cy="0"/>
+          <a:chOff x="0" y="0"/>
+          <a:chExt cx="0" cy="0"/>
+        </a:xfrm>
+      </p:grpSpPr>
+      <p:sp>
+        <p:nvSpPr>
           <p:cNvPr id="18436" name="Title 1"/>
           <p:cNvSpPr>
             <a:spLocks noGrp="1"/>
@@ -5562,7 +5786,7 @@
 </p:sld>
 </file>
 
-<file path=ppt/slides/slide14.xml><?xml version="1.0" encoding="utf-8"?>
+<file path=ppt/slides/slide15.xml><?xml version="1.0" encoding="utf-8"?>
 <p:sld xmlns:a="http://schemas.openxmlformats.org/drawingml/2006/main" xmlns:r="http://schemas.openxmlformats.org/officeDocument/2006/relationships" xmlns:p="http://schemas.openxmlformats.org/presentationml/2006/main">
   <p:cSld>
     <p:spTree>
@@ -5721,7 +5945,7 @@
 </p:sld>
 </file>
 
-<file path=ppt/slides/slide15.xml><?xml version="1.0" encoding="utf-8"?>
+<file path=ppt/slides/slide16.xml><?xml version="1.0" encoding="utf-8"?>
 <p:sld xmlns:a="http://schemas.openxmlformats.org/drawingml/2006/main" xmlns:r="http://schemas.openxmlformats.org/officeDocument/2006/relationships" xmlns:p="http://schemas.openxmlformats.org/presentationml/2006/main">
   <p:cSld>
     <p:spTree>
@@ -5798,161 +6022,6 @@
 </p:sld>
 </file>
 
-<file path=ppt/slides/slide16.xml><?xml version="1.0" encoding="utf-8"?>
-<p:sld xmlns:a="http://schemas.openxmlformats.org/drawingml/2006/main" xmlns:r="http://schemas.openxmlformats.org/officeDocument/2006/relationships" xmlns:p="http://schemas.openxmlformats.org/presentationml/2006/main" show="0">
-  <p:cSld>
-    <p:spTree>
-      <p:nvGrpSpPr>
-        <p:cNvPr id="1" name=""/>
-        <p:cNvGrpSpPr/>
-        <p:nvPr/>
-      </p:nvGrpSpPr>
-      <p:grpSpPr>
-        <a:xfrm>
-          <a:off x="0" y="0"/>
-          <a:ext cx="0" cy="0"/>
-          <a:chOff x="0" y="0"/>
-          <a:chExt cx="0" cy="0"/>
-        </a:xfrm>
-      </p:grpSpPr>
-      <p:sp>
-        <p:nvSpPr>
-          <p:cNvPr id="18436" name="Title 1"/>
-          <p:cNvSpPr>
-            <a:spLocks noGrp="1"/>
-          </p:cNvSpPr>
-          <p:nvPr>
-            <p:ph type="title"/>
-          </p:nvPr>
-        </p:nvSpPr>
-        <p:spPr/>
-        <p:txBody>
-          <a:bodyPr>
-            <a:noAutofit/>
-          </a:bodyPr>
-          <a:lstStyle/>
-          <a:p>
-            <a:pPr eaLnBrk="1" hangingPunct="1"/>
-            <a:r>
-              <a:rPr lang="en-US" sz="3600" dirty="0"/>
-              <a:t>Data Management</a:t>
-            </a:r>
-          </a:p>
-        </p:txBody>
-      </p:sp>
-      <p:sp>
-        <p:nvSpPr>
-          <p:cNvPr id="3" name="Content Placeholder 2"/>
-          <p:cNvSpPr>
-            <a:spLocks noGrp="1"/>
-          </p:cNvSpPr>
-          <p:nvPr>
-            <p:ph idx="1"/>
-          </p:nvPr>
-        </p:nvSpPr>
-        <p:spPr/>
-        <p:txBody>
-          <a:bodyPr>
-            <a:normAutofit fontScale="62500" lnSpcReduction="20000"/>
-          </a:bodyPr>
-          <a:lstStyle/>
-          <a:p>
-            <a:r>
-              <a:rPr lang="en-US" sz="2800" dirty="0"/>
-              <a:t>Data must be integrated from different databases in different departments.</a:t>
-            </a:r>
-          </a:p>
-          <a:p>
-            <a:pPr lvl="1"/>
-            <a:r>
-              <a:rPr lang="en-US" sz="2000" dirty="0"/>
-              <a:t>Extraction, transformation, and load (ETL) process is used</a:t>
-            </a:r>
-          </a:p>
-          <a:p>
-            <a:pPr lvl="1"/>
-            <a:r>
-              <a:rPr lang="en-US" sz="2000" dirty="0"/>
-              <a:t>Retrieve, reconcile, and transform data into a consistent format</a:t>
-            </a:r>
-          </a:p>
-          <a:p>
-            <a:pPr lvl="1"/>
-            <a:r>
-              <a:rPr lang="en-US" sz="2000" dirty="0"/>
-              <a:t>Load the final data into the data warehouse</a:t>
-            </a:r>
-          </a:p>
-          <a:p>
-            <a:r>
-              <a:rPr lang="en-US" sz="2800" dirty="0"/>
-              <a:t>A data mart is a small-scale data warehouse.</a:t>
-            </a:r>
-          </a:p>
-          <a:p>
-            <a:pPr lvl="1"/>
-            <a:r>
-              <a:rPr lang="en-US" sz="2400" dirty="0"/>
-              <a:t>A subset of the enterprise data warehouse</a:t>
-            </a:r>
-          </a:p>
-          <a:p>
-            <a:pPr lvl="1"/>
-            <a:r>
-              <a:rPr lang="en-US" sz="2400" dirty="0"/>
-              <a:t>Focuses on one particular subject or decision areas</a:t>
-            </a:r>
-          </a:p>
-          <a:p>
-            <a:pPr lvl="1"/>
-            <a:r>
-              <a:rPr lang="en-US" sz="2400" dirty="0"/>
-              <a:t>Conforms to a multidimensional data model called a star scheme.</a:t>
-            </a:r>
-          </a:p>
-          <a:p>
-            <a:pPr lvl="1"/>
-            <a:r>
-              <a:rPr lang="en-US" sz="2400" dirty="0"/>
-              <a:t>Two types of tables: dimension and fact tables</a:t>
-            </a:r>
-          </a:p>
-          <a:p>
-            <a:pPr lvl="2"/>
-            <a:r>
-              <a:rPr lang="en-US" sz="1900" dirty="0"/>
-              <a:t>Dimension table: describes business dimensions such as customer, product, location, and time</a:t>
-            </a:r>
-          </a:p>
-          <a:p>
-            <a:pPr lvl="2"/>
-            <a:r>
-              <a:rPr lang="en-US" sz="1900" dirty="0"/>
-              <a:t>Fact table: facts about the business operation, often quantitative format</a:t>
-            </a:r>
-          </a:p>
-          <a:p>
-            <a:pPr lvl="1"/>
-            <a:endParaRPr lang="en-US" sz="2400" dirty="0"/>
-          </a:p>
-          <a:p>
-            <a:endParaRPr lang="en-US" sz="2200" dirty="0"/>
-          </a:p>
-        </p:txBody>
-      </p:sp>
-    </p:spTree>
-    <p:extLst>
-      <p:ext uri="{BB962C8B-B14F-4D97-AF65-F5344CB8AC3E}">
-        <p14:creationId xmlns:p14="http://schemas.microsoft.com/office/powerpoint/2010/main" val="427265259"/>
-      </p:ext>
-    </p:extLst>
-  </p:cSld>
-  <p:clrMapOvr>
-    <a:masterClrMapping/>
-  </p:clrMapOvr>
-</p:sld>
-</file>
-
 <file path=ppt/slides/slide17.xml><?xml version="1.0" encoding="utf-8"?>
 <p:sld xmlns:a="http://schemas.openxmlformats.org/drawingml/2006/main" xmlns:r="http://schemas.openxmlformats.org/officeDocument/2006/relationships" xmlns:p="http://schemas.openxmlformats.org/presentationml/2006/main" show="0">
   <p:cSld>
@@ -6008,6 +6077,161 @@
         <p:spPr/>
         <p:txBody>
           <a:bodyPr>
+            <a:normAutofit fontScale="62500" lnSpcReduction="20000"/>
+          </a:bodyPr>
+          <a:lstStyle/>
+          <a:p>
+            <a:r>
+              <a:rPr lang="en-US" sz="2800" dirty="0"/>
+              <a:t>Data must be integrated from different databases in different departments.</a:t>
+            </a:r>
+          </a:p>
+          <a:p>
+            <a:pPr lvl="1"/>
+            <a:r>
+              <a:rPr lang="en-US" sz="2000" dirty="0"/>
+              <a:t>Extraction, transformation, and load (ETL) process is used</a:t>
+            </a:r>
+          </a:p>
+          <a:p>
+            <a:pPr lvl="1"/>
+            <a:r>
+              <a:rPr lang="en-US" sz="2000" dirty="0"/>
+              <a:t>Retrieve, reconcile, and transform data into a consistent format</a:t>
+            </a:r>
+          </a:p>
+          <a:p>
+            <a:pPr lvl="1"/>
+            <a:r>
+              <a:rPr lang="en-US" sz="2000" dirty="0"/>
+              <a:t>Load the final data into the data warehouse</a:t>
+            </a:r>
+          </a:p>
+          <a:p>
+            <a:r>
+              <a:rPr lang="en-US" sz="2800" dirty="0"/>
+              <a:t>A data mart is a small-scale data warehouse.</a:t>
+            </a:r>
+          </a:p>
+          <a:p>
+            <a:pPr lvl="1"/>
+            <a:r>
+              <a:rPr lang="en-US" sz="2400" dirty="0"/>
+              <a:t>A subset of the enterprise data warehouse</a:t>
+            </a:r>
+          </a:p>
+          <a:p>
+            <a:pPr lvl="1"/>
+            <a:r>
+              <a:rPr lang="en-US" sz="2400" dirty="0"/>
+              <a:t>Focuses on one particular subject or decision areas</a:t>
+            </a:r>
+          </a:p>
+          <a:p>
+            <a:pPr lvl="1"/>
+            <a:r>
+              <a:rPr lang="en-US" sz="2400" dirty="0"/>
+              <a:t>Conforms to a multidimensional data model called a star scheme.</a:t>
+            </a:r>
+          </a:p>
+          <a:p>
+            <a:pPr lvl="1"/>
+            <a:r>
+              <a:rPr lang="en-US" sz="2400" dirty="0"/>
+              <a:t>Two types of tables: dimension and fact tables</a:t>
+            </a:r>
+          </a:p>
+          <a:p>
+            <a:pPr lvl="2"/>
+            <a:r>
+              <a:rPr lang="en-US" sz="1900" dirty="0"/>
+              <a:t>Dimension table: describes business dimensions such as customer, product, location, and time</a:t>
+            </a:r>
+          </a:p>
+          <a:p>
+            <a:pPr lvl="2"/>
+            <a:r>
+              <a:rPr lang="en-US" sz="1900" dirty="0"/>
+              <a:t>Fact table: facts about the business operation, often quantitative format</a:t>
+            </a:r>
+          </a:p>
+          <a:p>
+            <a:pPr lvl="1"/>
+            <a:endParaRPr lang="en-US" sz="2400" dirty="0"/>
+          </a:p>
+          <a:p>
+            <a:endParaRPr lang="en-US" sz="2200" dirty="0"/>
+          </a:p>
+        </p:txBody>
+      </p:sp>
+    </p:spTree>
+    <p:extLst>
+      <p:ext uri="{BB962C8B-B14F-4D97-AF65-F5344CB8AC3E}">
+        <p14:creationId xmlns:p14="http://schemas.microsoft.com/office/powerpoint/2010/main" val="427265259"/>
+      </p:ext>
+    </p:extLst>
+  </p:cSld>
+  <p:clrMapOvr>
+    <a:masterClrMapping/>
+  </p:clrMapOvr>
+</p:sld>
+</file>
+
+<file path=ppt/slides/slide18.xml><?xml version="1.0" encoding="utf-8"?>
+<p:sld xmlns:a="http://schemas.openxmlformats.org/drawingml/2006/main" xmlns:r="http://schemas.openxmlformats.org/officeDocument/2006/relationships" xmlns:p="http://schemas.openxmlformats.org/presentationml/2006/main" show="0">
+  <p:cSld>
+    <p:spTree>
+      <p:nvGrpSpPr>
+        <p:cNvPr id="1" name=""/>
+        <p:cNvGrpSpPr/>
+        <p:nvPr/>
+      </p:nvGrpSpPr>
+      <p:grpSpPr>
+        <a:xfrm>
+          <a:off x="0" y="0"/>
+          <a:ext cx="0" cy="0"/>
+          <a:chOff x="0" y="0"/>
+          <a:chExt cx="0" cy="0"/>
+        </a:xfrm>
+      </p:grpSpPr>
+      <p:sp>
+        <p:nvSpPr>
+          <p:cNvPr id="18436" name="Title 1"/>
+          <p:cNvSpPr>
+            <a:spLocks noGrp="1"/>
+          </p:cNvSpPr>
+          <p:nvPr>
+            <p:ph type="title"/>
+          </p:nvPr>
+        </p:nvSpPr>
+        <p:spPr/>
+        <p:txBody>
+          <a:bodyPr>
+            <a:noAutofit/>
+          </a:bodyPr>
+          <a:lstStyle/>
+          <a:p>
+            <a:pPr eaLnBrk="1" hangingPunct="1"/>
+            <a:r>
+              <a:rPr lang="en-US" sz="3600" dirty="0"/>
+              <a:t>Data Management</a:t>
+            </a:r>
+          </a:p>
+        </p:txBody>
+      </p:sp>
+      <p:sp>
+        <p:nvSpPr>
+          <p:cNvPr id="3" name="Content Placeholder 2"/>
+          <p:cNvSpPr>
+            <a:spLocks noGrp="1"/>
+          </p:cNvSpPr>
+          <p:nvPr>
+            <p:ph idx="1"/>
+          </p:nvPr>
+        </p:nvSpPr>
+        <p:spPr/>
+        <p:txBody>
+          <a:bodyPr>
             <a:normAutofit fontScale="85000" lnSpcReduction="10000"/>
           </a:bodyPr>
           <a:lstStyle/>
@@ -6064,7 +6288,7 @@
 </p:sld>
 </file>
 
-<file path=ppt/slides/slide18.xml><?xml version="1.0" encoding="utf-8"?>
+<file path=ppt/slides/slide19.xml><?xml version="1.0" encoding="utf-8"?>
 <p:sld xmlns:a="http://schemas.openxmlformats.org/drawingml/2006/main" xmlns:r="http://schemas.openxmlformats.org/officeDocument/2006/relationships" xmlns:p="http://schemas.openxmlformats.org/presentationml/2006/main" show="0">
   <p:cSld>
     <p:spTree>
@@ -6174,124 +6398,6 @@
 </p:sld>
 </file>
 
-<file path=ppt/slides/slide19.xml><?xml version="1.0" encoding="utf-8"?>
-<p:sld xmlns:a="http://schemas.openxmlformats.org/drawingml/2006/main" xmlns:r="http://schemas.openxmlformats.org/officeDocument/2006/relationships" xmlns:p="http://schemas.openxmlformats.org/presentationml/2006/main" show="0">
-  <p:cSld>
-    <p:spTree>
-      <p:nvGrpSpPr>
-        <p:cNvPr id="1" name=""/>
-        <p:cNvGrpSpPr/>
-        <p:nvPr/>
-      </p:nvGrpSpPr>
-      <p:grpSpPr>
-        <a:xfrm>
-          <a:off x="0" y="0"/>
-          <a:ext cx="0" cy="0"/>
-          <a:chOff x="0" y="0"/>
-          <a:chExt cx="0" cy="0"/>
-        </a:xfrm>
-      </p:grpSpPr>
-      <p:sp>
-        <p:nvSpPr>
-          <p:cNvPr id="18436" name="Title 1"/>
-          <p:cNvSpPr>
-            <a:spLocks noGrp="1"/>
-          </p:cNvSpPr>
-          <p:nvPr>
-            <p:ph type="title"/>
-          </p:nvPr>
-        </p:nvSpPr>
-        <p:spPr/>
-        <p:txBody>
-          <a:bodyPr>
-            <a:noAutofit/>
-          </a:bodyPr>
-          <a:lstStyle/>
-          <a:p>
-            <a:pPr eaLnBrk="1" hangingPunct="1"/>
-            <a:r>
-              <a:rPr lang="en-US" sz="3600" dirty="0"/>
-              <a:t>Data Management</a:t>
-            </a:r>
-          </a:p>
-        </p:txBody>
-      </p:sp>
-      <p:sp>
-        <p:nvSpPr>
-          <p:cNvPr id="3" name="Content Placeholder 2"/>
-          <p:cNvSpPr>
-            <a:spLocks noGrp="1"/>
-          </p:cNvSpPr>
-          <p:nvPr>
-            <p:ph idx="1"/>
-          </p:nvPr>
-        </p:nvSpPr>
-        <p:spPr/>
-        <p:txBody>
-          <a:bodyPr>
-            <a:normAutofit fontScale="85000" lnSpcReduction="20000"/>
-          </a:bodyPr>
-          <a:lstStyle/>
-          <a:p>
-            <a:r>
-              <a:rPr lang="en-US" sz="2800" dirty="0"/>
-              <a:t>New forms of databases to support big data have emerged.</a:t>
-            </a:r>
-          </a:p>
-          <a:p>
-            <a:r>
-              <a:rPr lang="en-US" sz="2800" dirty="0"/>
-              <a:t>NoSQL: “Not Only SQL” database</a:t>
-            </a:r>
-          </a:p>
-          <a:p>
-            <a:pPr lvl="1"/>
-            <a:r>
-              <a:rPr lang="en-US" sz="2400" dirty="0"/>
-              <a:t>Nonrelational database that supports the storage of a wide range of data types.</a:t>
-            </a:r>
-          </a:p>
-          <a:p>
-            <a:pPr lvl="1"/>
-            <a:r>
-              <a:rPr lang="en-US" sz="2400" dirty="0"/>
-              <a:t>Structured, semi-structured, and unstructured</a:t>
-            </a:r>
-          </a:p>
-          <a:p>
-            <a:pPr lvl="1"/>
-            <a:r>
-              <a:rPr lang="en-US" sz="2400" dirty="0"/>
-              <a:t>Flexibility, performance, and scalability to handle extremely high volumes of data. </a:t>
-            </a:r>
-          </a:p>
-          <a:p>
-            <a:r>
-              <a:rPr lang="en-US" sz="2800" dirty="0"/>
-              <a:t>NoSQL will likely be implemented alongside relational databases to support organization data needs.</a:t>
-            </a:r>
-          </a:p>
-          <a:p>
-            <a:r>
-              <a:rPr lang="en-US" sz="2800" dirty="0"/>
-              <a:t>Driven by unstructured data – how to store videos in a database table? </a:t>
-            </a:r>
-          </a:p>
-        </p:txBody>
-      </p:sp>
-    </p:spTree>
-    <p:extLst>
-      <p:ext uri="{BB962C8B-B14F-4D97-AF65-F5344CB8AC3E}">
-        <p14:creationId xmlns:p14="http://schemas.microsoft.com/office/powerpoint/2010/main" val="1320795328"/>
-      </p:ext>
-    </p:extLst>
-  </p:cSld>
-  <p:clrMapOvr>
-    <a:masterClrMapping/>
-  </p:clrMapOvr>
-</p:sld>
-</file>
-
 <file path=ppt/slides/slide2.xml><?xml version="1.0" encoding="utf-8"?>
 <p:sld xmlns:a="http://schemas.openxmlformats.org/drawingml/2006/main" xmlns:r="http://schemas.openxmlformats.org/officeDocument/2006/relationships" xmlns:p="http://schemas.openxmlformats.org/presentationml/2006/main">
   <p:cSld>
@@ -6314,7 +6420,7 @@
           <p:cNvPr id="2" name="Title 1">
             <a:extLst>
               <a:ext uri="{FF2B5EF4-FFF2-40B4-BE49-F238E27FC236}">
-                <a16:creationId xmlns:a16="http://schemas.microsoft.com/office/drawing/2014/main" id="{15BAC134-34A8-CA43-F3C7-A4A8EC7DE4C2}"/>
+                <a16:creationId xmlns:a16="http://schemas.microsoft.com/office/drawing/2014/main" id="{442C9F9D-3A9A-BC4C-D460-874DA626D334}"/>
               </a:ext>
             </a:extLst>
           </p:cNvPr>
@@ -6322,7 +6428,7 @@
             <a:spLocks noGrp="1"/>
           </p:cNvSpPr>
           <p:nvPr>
-            <p:ph type="ctrTitle"/>
+            <p:ph type="title"/>
           </p:nvPr>
         </p:nvSpPr>
         <p:spPr/>
@@ -6332,17 +6438,17 @@
           <a:p>
             <a:r>
               <a:rPr lang="en-US" dirty="0"/>
-              <a:t>Joins</a:t>
-            </a:r>
-          </a:p>
-        </p:txBody>
-      </p:sp>
-      <p:sp>
-        <p:nvSpPr>
-          <p:cNvPr id="3" name="Subtitle 2">
+              <a:t>Assignment – Some things to consider…</a:t>
+            </a:r>
+          </a:p>
+        </p:txBody>
+      </p:sp>
+      <p:sp>
+        <p:nvSpPr>
+          <p:cNvPr id="3" name="Content Placeholder 2">
             <a:extLst>
               <a:ext uri="{FF2B5EF4-FFF2-40B4-BE49-F238E27FC236}">
-                <a16:creationId xmlns:a16="http://schemas.microsoft.com/office/drawing/2014/main" id="{9F119B4B-3B42-508B-8522-F29D6676AF2C}"/>
+                <a16:creationId xmlns:a16="http://schemas.microsoft.com/office/drawing/2014/main" id="{C767C791-D4DB-FB92-6D79-4D13E3C371D2}"/>
               </a:ext>
             </a:extLst>
           </p:cNvPr>
@@ -6350,22 +6456,100 @@
             <a:spLocks noGrp="1"/>
           </p:cNvSpPr>
           <p:nvPr>
-            <p:ph type="subTitle" idx="1"/>
-          </p:nvPr>
-        </p:nvSpPr>
-        <p:spPr/>
+            <p:ph idx="1"/>
+          </p:nvPr>
+        </p:nvSpPr>
+        <p:spPr>
+          <a:xfrm>
+            <a:off x="1451579" y="1962615"/>
+            <a:ext cx="9603275" cy="4090866"/>
+          </a:xfrm>
+        </p:spPr>
         <p:txBody>
           <a:bodyPr/>
           <a:lstStyle/>
           <a:p>
-            <a:endParaRPr lang="en-US"/>
+            <a:r>
+              <a:rPr lang="en-US" dirty="0"/>
+              <a:t>I have no context or prior knowledge, all I know is what I see on the charts. </a:t>
+            </a:r>
+          </a:p>
+          <a:p>
+            <a:pPr lvl="1"/>
+            <a:r>
+              <a:rPr lang="en-US" dirty="0"/>
+              <a:t>Ensure that whatever you want to show is what comes through. </a:t>
+            </a:r>
+          </a:p>
+          <a:p>
+            <a:pPr lvl="1"/>
+            <a:r>
+              <a:rPr lang="en-US" dirty="0"/>
+              <a:t>There should be a clear title/thesis that says what your viz does. </a:t>
+            </a:r>
+          </a:p>
+          <a:p>
+            <a:pPr lvl="1"/>
+            <a:r>
+              <a:rPr lang="en-US" dirty="0"/>
+              <a:t>Asking another person what they get is a good idea. </a:t>
+            </a:r>
+          </a:p>
+          <a:p>
+            <a:r>
+              <a:rPr lang="en-US" dirty="0"/>
+              <a:t>Check simple details. </a:t>
+            </a:r>
+          </a:p>
+          <a:p>
+            <a:pPr lvl="1"/>
+            <a:r>
+              <a:rPr lang="en-US" dirty="0"/>
+              <a:t>Check labels, titles, axis, </a:t>
+            </a:r>
+            <a:r>
+              <a:rPr lang="en-US" dirty="0" err="1"/>
+              <a:t>etc</a:t>
+            </a:r>
+            <a:r>
+              <a:rPr lang="en-US" dirty="0"/>
+              <a:t>… to make sure they make sense. </a:t>
+            </a:r>
+          </a:p>
+          <a:p>
+            <a:pPr lvl="1"/>
+            <a:r>
+              <a:rPr lang="en-US" dirty="0"/>
+              <a:t>Ensure things are readable and aligned clearly. </a:t>
+            </a:r>
+          </a:p>
+          <a:p>
+            <a:r>
+              <a:rPr lang="en-US" dirty="0"/>
+              <a:t>Easy improvements – can I change a Tableau thing to make it better? </a:t>
+            </a:r>
+          </a:p>
+          <a:p>
+            <a:pPr lvl="1"/>
+            <a:r>
+              <a:rPr lang="en-US" dirty="0"/>
+              <a:t>Highlights, filtering, adding info to tooltips, </a:t>
+            </a:r>
+            <a:r>
+              <a:rPr lang="en-US" dirty="0" err="1"/>
+              <a:t>etc</a:t>
+            </a:r>
+            <a:r>
+              <a:rPr lang="en-US" dirty="0"/>
+              <a:t>…</a:t>
+            </a:r>
           </a:p>
         </p:txBody>
       </p:sp>
     </p:spTree>
     <p:extLst>
       <p:ext uri="{BB962C8B-B14F-4D97-AF65-F5344CB8AC3E}">
-        <p14:creationId xmlns:p14="http://schemas.microsoft.com/office/powerpoint/2010/main" val="3684202241"/>
+        <p14:creationId xmlns:p14="http://schemas.microsoft.com/office/powerpoint/2010/main" val="3867821510"/>
       </p:ext>
     </p:extLst>
   </p:cSld>
@@ -6376,7 +6560,7 @@
 </file>
 
 <file path=ppt/slides/slide20.xml><?xml version="1.0" encoding="utf-8"?>
-<p:sld xmlns:a="http://schemas.openxmlformats.org/drawingml/2006/main" xmlns:r="http://schemas.openxmlformats.org/officeDocument/2006/relationships" xmlns:p="http://schemas.openxmlformats.org/presentationml/2006/main">
+<p:sld xmlns:a="http://schemas.openxmlformats.org/drawingml/2006/main" xmlns:r="http://schemas.openxmlformats.org/officeDocument/2006/relationships" xmlns:p="http://schemas.openxmlformats.org/presentationml/2006/main" show="0">
   <p:cSld>
     <p:spTree>
       <p:nvGrpSpPr>
@@ -6394,13 +6578,7 @@
       </p:grpSpPr>
       <p:sp>
         <p:nvSpPr>
-          <p:cNvPr id="2" name="Title 1">
-            <a:extLst>
-              <a:ext uri="{FF2B5EF4-FFF2-40B4-BE49-F238E27FC236}">
-                <a16:creationId xmlns:a16="http://schemas.microsoft.com/office/drawing/2014/main" id="{6191EDE5-10AB-8730-4143-58F7A69022F8}"/>
-              </a:ext>
-            </a:extLst>
-          </p:cNvPr>
+          <p:cNvPr id="18436" name="Title 1"/>
           <p:cNvSpPr>
             <a:spLocks noGrp="1"/>
           </p:cNvSpPr>
@@ -6410,25 +6588,22 @@
         </p:nvSpPr>
         <p:spPr/>
         <p:txBody>
-          <a:bodyPr/>
-          <a:lstStyle/>
-          <a:p>
-            <a:r>
-              <a:rPr lang="en-US" dirty="0"/>
-              <a:t>Remember the Key</a:t>
-            </a:r>
-          </a:p>
-        </p:txBody>
-      </p:sp>
-      <p:sp>
-        <p:nvSpPr>
-          <p:cNvPr id="3" name="Content Placeholder 2">
-            <a:extLst>
-              <a:ext uri="{FF2B5EF4-FFF2-40B4-BE49-F238E27FC236}">
-                <a16:creationId xmlns:a16="http://schemas.microsoft.com/office/drawing/2014/main" id="{6E2579A0-8933-06FA-8862-DF93C18364AB}"/>
-              </a:ext>
-            </a:extLst>
-          </p:cNvPr>
+          <a:bodyPr>
+            <a:noAutofit/>
+          </a:bodyPr>
+          <a:lstStyle/>
+          <a:p>
+            <a:pPr eaLnBrk="1" hangingPunct="1"/>
+            <a:r>
+              <a:rPr lang="en-US" sz="3600" dirty="0"/>
+              <a:t>Data Management</a:t>
+            </a:r>
+          </a:p>
+        </p:txBody>
+      </p:sp>
+      <p:sp>
+        <p:nvSpPr>
+          <p:cNvPr id="3" name="Content Placeholder 2"/>
           <p:cNvSpPr>
             <a:spLocks noGrp="1"/>
           </p:cNvSpPr>
@@ -6436,63 +6611,55 @@
             <p:ph idx="1"/>
           </p:nvPr>
         </p:nvSpPr>
-        <p:spPr>
-          <a:xfrm>
-            <a:off x="1451579" y="1853754"/>
-            <a:ext cx="9603275" cy="4199727"/>
-          </a:xfrm>
-        </p:spPr>
-        <p:txBody>
-          <a:bodyPr/>
-          <a:lstStyle/>
-          <a:p>
-            <a:r>
-              <a:rPr lang="en-US" dirty="0"/>
-              <a:t>Recall the special database field called the primary key. </a:t>
-            </a:r>
-          </a:p>
-          <a:p>
-            <a:r>
-              <a:rPr lang="en-US" dirty="0"/>
-              <a:t>This is a unique identifier – often just an arbitrary ID value. </a:t>
-            </a:r>
-          </a:p>
-          <a:p>
-            <a:pPr lvl="1"/>
-            <a:r>
-              <a:rPr lang="en-US" dirty="0"/>
-              <a:t>Never duplicated, always refers to exactly one row. </a:t>
-            </a:r>
-          </a:p>
-          <a:p>
-            <a:r>
-              <a:rPr lang="en-US" dirty="0"/>
-              <a:t>Most tables have a key:</a:t>
-            </a:r>
-          </a:p>
-          <a:p>
-            <a:pPr lvl="1"/>
-            <a:r>
-              <a:rPr lang="en-US" dirty="0" err="1"/>
-              <a:t>Nait’s</a:t>
-            </a:r>
-            <a:r>
-              <a:rPr lang="en-US" dirty="0"/>
-              <a:t> student list has your student ID. </a:t>
-            </a:r>
-          </a:p>
-          <a:p>
-            <a:pPr lvl="1"/>
-            <a:r>
-              <a:rPr lang="en-US" dirty="0"/>
-              <a:t>Registries have your driver’s license number. </a:t>
-            </a:r>
-          </a:p>
-          <a:p>
-            <a:pPr lvl="1"/>
-            <a:r>
-              <a:rPr lang="en-US" dirty="0"/>
-              <a:t>It could just be 1, 2, 3, 4…</a:t>
+        <p:spPr/>
+        <p:txBody>
+          <a:bodyPr>
+            <a:normAutofit fontScale="85000" lnSpcReduction="20000"/>
+          </a:bodyPr>
+          <a:lstStyle/>
+          <a:p>
+            <a:r>
+              <a:rPr lang="en-US" sz="2800" dirty="0"/>
+              <a:t>New forms of databases to support big data have emerged.</a:t>
+            </a:r>
+          </a:p>
+          <a:p>
+            <a:r>
+              <a:rPr lang="en-US" sz="2800" dirty="0"/>
+              <a:t>NoSQL: “Not Only SQL” database</a:t>
+            </a:r>
+          </a:p>
+          <a:p>
+            <a:pPr lvl="1"/>
+            <a:r>
+              <a:rPr lang="en-US" sz="2400" dirty="0"/>
+              <a:t>Nonrelational database that supports the storage of a wide range of data types.</a:t>
+            </a:r>
+          </a:p>
+          <a:p>
+            <a:pPr lvl="1"/>
+            <a:r>
+              <a:rPr lang="en-US" sz="2400" dirty="0"/>
+              <a:t>Structured, semi-structured, and unstructured</a:t>
+            </a:r>
+          </a:p>
+          <a:p>
+            <a:pPr lvl="1"/>
+            <a:r>
+              <a:rPr lang="en-US" sz="2400" dirty="0"/>
+              <a:t>Flexibility, performance, and scalability to handle extremely high volumes of data. </a:t>
+            </a:r>
+          </a:p>
+          <a:p>
+            <a:r>
+              <a:rPr lang="en-US" sz="2800" dirty="0"/>
+              <a:t>NoSQL will likely be implemented alongside relational databases to support organization data needs.</a:t>
+            </a:r>
+          </a:p>
+          <a:p>
+            <a:r>
+              <a:rPr lang="en-US" sz="2800" dirty="0"/>
+              <a:t>Driven by unstructured data – how to store videos in a database table? </a:t>
             </a:r>
           </a:p>
         </p:txBody>
@@ -6500,7 +6667,7 @@
     </p:spTree>
     <p:extLst>
       <p:ext uri="{BB962C8B-B14F-4D97-AF65-F5344CB8AC3E}">
-        <p14:creationId xmlns:p14="http://schemas.microsoft.com/office/powerpoint/2010/main" val="868589713"/>
+        <p14:creationId xmlns:p14="http://schemas.microsoft.com/office/powerpoint/2010/main" val="1320795328"/>
       </p:ext>
     </p:extLst>
   </p:cSld>
@@ -6529,6 +6696,141 @@
       </p:grpSpPr>
       <p:sp>
         <p:nvSpPr>
+          <p:cNvPr id="2" name="Title 1">
+            <a:extLst>
+              <a:ext uri="{FF2B5EF4-FFF2-40B4-BE49-F238E27FC236}">
+                <a16:creationId xmlns:a16="http://schemas.microsoft.com/office/drawing/2014/main" id="{6191EDE5-10AB-8730-4143-58F7A69022F8}"/>
+              </a:ext>
+            </a:extLst>
+          </p:cNvPr>
+          <p:cNvSpPr>
+            <a:spLocks noGrp="1"/>
+          </p:cNvSpPr>
+          <p:nvPr>
+            <p:ph type="title"/>
+          </p:nvPr>
+        </p:nvSpPr>
+        <p:spPr/>
+        <p:txBody>
+          <a:bodyPr/>
+          <a:lstStyle/>
+          <a:p>
+            <a:r>
+              <a:rPr lang="en-US" dirty="0"/>
+              <a:t>Remember the Key</a:t>
+            </a:r>
+          </a:p>
+        </p:txBody>
+      </p:sp>
+      <p:sp>
+        <p:nvSpPr>
+          <p:cNvPr id="3" name="Content Placeholder 2">
+            <a:extLst>
+              <a:ext uri="{FF2B5EF4-FFF2-40B4-BE49-F238E27FC236}">
+                <a16:creationId xmlns:a16="http://schemas.microsoft.com/office/drawing/2014/main" id="{6E2579A0-8933-06FA-8862-DF93C18364AB}"/>
+              </a:ext>
+            </a:extLst>
+          </p:cNvPr>
+          <p:cNvSpPr>
+            <a:spLocks noGrp="1"/>
+          </p:cNvSpPr>
+          <p:nvPr>
+            <p:ph idx="1"/>
+          </p:nvPr>
+        </p:nvSpPr>
+        <p:spPr>
+          <a:xfrm>
+            <a:off x="1451579" y="1853754"/>
+            <a:ext cx="9603275" cy="4199727"/>
+          </a:xfrm>
+        </p:spPr>
+        <p:txBody>
+          <a:bodyPr/>
+          <a:lstStyle/>
+          <a:p>
+            <a:r>
+              <a:rPr lang="en-US" dirty="0"/>
+              <a:t>Recall the special database field called the primary key. </a:t>
+            </a:r>
+          </a:p>
+          <a:p>
+            <a:r>
+              <a:rPr lang="en-US" dirty="0"/>
+              <a:t>This is a unique identifier – often just an arbitrary ID value. </a:t>
+            </a:r>
+          </a:p>
+          <a:p>
+            <a:pPr lvl="1"/>
+            <a:r>
+              <a:rPr lang="en-US" dirty="0"/>
+              <a:t>Never duplicated, always refers to exactly one row. </a:t>
+            </a:r>
+          </a:p>
+          <a:p>
+            <a:r>
+              <a:rPr lang="en-US" dirty="0"/>
+              <a:t>Most tables have a key:</a:t>
+            </a:r>
+          </a:p>
+          <a:p>
+            <a:pPr lvl="1"/>
+            <a:r>
+              <a:rPr lang="en-US" dirty="0" err="1"/>
+              <a:t>Nait’s</a:t>
+            </a:r>
+            <a:r>
+              <a:rPr lang="en-US" dirty="0"/>
+              <a:t> student list has your student ID. </a:t>
+            </a:r>
+          </a:p>
+          <a:p>
+            <a:pPr lvl="1"/>
+            <a:r>
+              <a:rPr lang="en-US" dirty="0"/>
+              <a:t>Registries have your driver’s license number. </a:t>
+            </a:r>
+          </a:p>
+          <a:p>
+            <a:pPr lvl="1"/>
+            <a:r>
+              <a:rPr lang="en-US" dirty="0"/>
+              <a:t>It could just be 1, 2, 3, 4…</a:t>
+            </a:r>
+          </a:p>
+        </p:txBody>
+      </p:sp>
+    </p:spTree>
+    <p:extLst>
+      <p:ext uri="{BB962C8B-B14F-4D97-AF65-F5344CB8AC3E}">
+        <p14:creationId xmlns:p14="http://schemas.microsoft.com/office/powerpoint/2010/main" val="868589713"/>
+      </p:ext>
+    </p:extLst>
+  </p:cSld>
+  <p:clrMapOvr>
+    <a:masterClrMapping/>
+  </p:clrMapOvr>
+</p:sld>
+</file>
+
+<file path=ppt/slides/slide22.xml><?xml version="1.0" encoding="utf-8"?>
+<p:sld xmlns:a="http://schemas.openxmlformats.org/drawingml/2006/main" xmlns:r="http://schemas.openxmlformats.org/officeDocument/2006/relationships" xmlns:p="http://schemas.openxmlformats.org/presentationml/2006/main">
+  <p:cSld>
+    <p:spTree>
+      <p:nvGrpSpPr>
+        <p:cNvPr id="1" name=""/>
+        <p:cNvGrpSpPr/>
+        <p:nvPr/>
+      </p:nvGrpSpPr>
+      <p:grpSpPr>
+        <a:xfrm>
+          <a:off x="0" y="0"/>
+          <a:ext cx="0" cy="0"/>
+          <a:chOff x="0" y="0"/>
+          <a:chExt cx="0" cy="0"/>
+        </a:xfrm>
+      </p:grpSpPr>
+      <p:sp>
+        <p:nvSpPr>
           <p:cNvPr id="4" name="Title 3">
             <a:extLst>
               <a:ext uri="{FF2B5EF4-FFF2-40B4-BE49-F238E27FC236}">
@@ -6657,7 +6959,7 @@
 </p:sld>
 </file>
 
-<file path=ppt/slides/slide22.xml><?xml version="1.0" encoding="utf-8"?>
+<file path=ppt/slides/slide23.xml><?xml version="1.0" encoding="utf-8"?>
 <p:sld xmlns:a="http://schemas.openxmlformats.org/drawingml/2006/main" xmlns:r="http://schemas.openxmlformats.org/officeDocument/2006/relationships" xmlns:p="http://schemas.openxmlformats.org/presentationml/2006/main">
   <p:cSld>
     <p:spTree>
@@ -6822,7 +7124,7 @@
 </p:sld>
 </file>
 
-<file path=ppt/slides/slide23.xml><?xml version="1.0" encoding="utf-8"?>
+<file path=ppt/slides/slide24.xml><?xml version="1.0" encoding="utf-8"?>
 <p:sld xmlns:a="http://schemas.openxmlformats.org/drawingml/2006/main" xmlns:r="http://schemas.openxmlformats.org/officeDocument/2006/relationships" xmlns:p="http://schemas.openxmlformats.org/presentationml/2006/main">
   <p:cSld>
     <p:spTree>
@@ -6944,7 +7246,7 @@
 </p:sld>
 </file>
 
-<file path=ppt/slides/slide24.xml><?xml version="1.0" encoding="utf-8"?>
+<file path=ppt/slides/slide25.xml><?xml version="1.0" encoding="utf-8"?>
 <p:sld xmlns:a="http://schemas.openxmlformats.org/drawingml/2006/main" xmlns:r="http://schemas.openxmlformats.org/officeDocument/2006/relationships" xmlns:p="http://schemas.openxmlformats.org/presentationml/2006/main">
   <p:cSld>
     <p:spTree>
@@ -7093,7 +7395,7 @@
 </p:sld>
 </file>
 
-<file path=ppt/slides/slide25.xml><?xml version="1.0" encoding="utf-8"?>
+<file path=ppt/slides/slide26.xml><?xml version="1.0" encoding="utf-8"?>
 <p:sld xmlns:a="http://schemas.openxmlformats.org/drawingml/2006/main" xmlns:r="http://schemas.openxmlformats.org/officeDocument/2006/relationships" xmlns:p="http://schemas.openxmlformats.org/presentationml/2006/main">
   <p:cSld>
     <p:spTree>
@@ -7227,7 +7529,7 @@
 </p:sld>
 </file>
 
-<file path=ppt/slides/slide26.xml><?xml version="1.0" encoding="utf-8"?>
+<file path=ppt/slides/slide27.xml><?xml version="1.0" encoding="utf-8"?>
 <p:sld xmlns:a="http://schemas.openxmlformats.org/drawingml/2006/main" xmlns:r="http://schemas.openxmlformats.org/officeDocument/2006/relationships" xmlns:p="http://schemas.openxmlformats.org/presentationml/2006/main">
   <p:cSld>
     <p:spTree>
@@ -7337,7 +7639,7 @@
 </p:sld>
 </file>
 
-<file path=ppt/slides/slide27.xml><?xml version="1.0" encoding="utf-8"?>
+<file path=ppt/slides/slide28.xml><?xml version="1.0" encoding="utf-8"?>
 <p:sld xmlns:a="http://schemas.openxmlformats.org/drawingml/2006/main" xmlns:r="http://schemas.openxmlformats.org/officeDocument/2006/relationships" xmlns:p="http://schemas.openxmlformats.org/presentationml/2006/main">
   <p:cSld>
     <p:spTree>
@@ -7454,7 +7756,7 @@
 </p:sld>
 </file>
 
-<file path=ppt/slides/slide28.xml><?xml version="1.0" encoding="utf-8"?>
+<file path=ppt/slides/slide29.xml><?xml version="1.0" encoding="utf-8"?>
 <p:sld xmlns:a="http://schemas.openxmlformats.org/drawingml/2006/main" xmlns:r="http://schemas.openxmlformats.org/officeDocument/2006/relationships" xmlns:p="http://schemas.openxmlformats.org/presentationml/2006/main">
   <p:cSld>
     <p:spTree>
@@ -7571,7 +7873,90 @@
 </p:sld>
 </file>
 
-<file path=ppt/slides/slide29.xml><?xml version="1.0" encoding="utf-8"?>
+<file path=ppt/slides/slide3.xml><?xml version="1.0" encoding="utf-8"?>
+<p:sld xmlns:a="http://schemas.openxmlformats.org/drawingml/2006/main" xmlns:r="http://schemas.openxmlformats.org/officeDocument/2006/relationships" xmlns:p="http://schemas.openxmlformats.org/presentationml/2006/main">
+  <p:cSld>
+    <p:spTree>
+      <p:nvGrpSpPr>
+        <p:cNvPr id="1" name=""/>
+        <p:cNvGrpSpPr/>
+        <p:nvPr/>
+      </p:nvGrpSpPr>
+      <p:grpSpPr>
+        <a:xfrm>
+          <a:off x="0" y="0"/>
+          <a:ext cx="0" cy="0"/>
+          <a:chOff x="0" y="0"/>
+          <a:chExt cx="0" cy="0"/>
+        </a:xfrm>
+      </p:grpSpPr>
+      <p:sp>
+        <p:nvSpPr>
+          <p:cNvPr id="2" name="Title 1">
+            <a:extLst>
+              <a:ext uri="{FF2B5EF4-FFF2-40B4-BE49-F238E27FC236}">
+                <a16:creationId xmlns:a16="http://schemas.microsoft.com/office/drawing/2014/main" id="{15BAC134-34A8-CA43-F3C7-A4A8EC7DE4C2}"/>
+              </a:ext>
+            </a:extLst>
+          </p:cNvPr>
+          <p:cNvSpPr>
+            <a:spLocks noGrp="1"/>
+          </p:cNvSpPr>
+          <p:nvPr>
+            <p:ph type="ctrTitle"/>
+          </p:nvPr>
+        </p:nvSpPr>
+        <p:spPr/>
+        <p:txBody>
+          <a:bodyPr/>
+          <a:lstStyle/>
+          <a:p>
+            <a:r>
+              <a:rPr lang="en-US" dirty="0"/>
+              <a:t>Joins</a:t>
+            </a:r>
+          </a:p>
+        </p:txBody>
+      </p:sp>
+      <p:sp>
+        <p:nvSpPr>
+          <p:cNvPr id="3" name="Subtitle 2">
+            <a:extLst>
+              <a:ext uri="{FF2B5EF4-FFF2-40B4-BE49-F238E27FC236}">
+                <a16:creationId xmlns:a16="http://schemas.microsoft.com/office/drawing/2014/main" id="{9F119B4B-3B42-508B-8522-F29D6676AF2C}"/>
+              </a:ext>
+            </a:extLst>
+          </p:cNvPr>
+          <p:cNvSpPr>
+            <a:spLocks noGrp="1"/>
+          </p:cNvSpPr>
+          <p:nvPr>
+            <p:ph type="subTitle" idx="1"/>
+          </p:nvPr>
+        </p:nvSpPr>
+        <p:spPr/>
+        <p:txBody>
+          <a:bodyPr/>
+          <a:lstStyle/>
+          <a:p>
+            <a:endParaRPr lang="en-US"/>
+          </a:p>
+        </p:txBody>
+      </p:sp>
+    </p:spTree>
+    <p:extLst>
+      <p:ext uri="{BB962C8B-B14F-4D97-AF65-F5344CB8AC3E}">
+        <p14:creationId xmlns:p14="http://schemas.microsoft.com/office/powerpoint/2010/main" val="3684202241"/>
+      </p:ext>
+    </p:extLst>
+  </p:cSld>
+  <p:clrMapOvr>
+    <a:masterClrMapping/>
+  </p:clrMapOvr>
+</p:sld>
+</file>
+
+<file path=ppt/slides/slide30.xml><?xml version="1.0" encoding="utf-8"?>
 <p:sld xmlns:a="http://schemas.openxmlformats.org/drawingml/2006/main" xmlns:r="http://schemas.openxmlformats.org/officeDocument/2006/relationships" xmlns:p="http://schemas.openxmlformats.org/presentationml/2006/main">
   <p:cSld>
     <p:spTree>
@@ -7850,154 +8235,7 @@
 </p:sld>
 </file>
 
-<file path=ppt/slides/slide3.xml><?xml version="1.0" encoding="utf-8"?>
-<p:sld xmlns:a="http://schemas.openxmlformats.org/drawingml/2006/main" xmlns:r="http://schemas.openxmlformats.org/officeDocument/2006/relationships" xmlns:p="http://schemas.openxmlformats.org/presentationml/2006/main">
-  <p:cSld>
-    <p:spTree>
-      <p:nvGrpSpPr>
-        <p:cNvPr id="1" name=""/>
-        <p:cNvGrpSpPr/>
-        <p:nvPr/>
-      </p:nvGrpSpPr>
-      <p:grpSpPr>
-        <a:xfrm>
-          <a:off x="0" y="0"/>
-          <a:ext cx="0" cy="0"/>
-          <a:chOff x="0" y="0"/>
-          <a:chExt cx="0" cy="0"/>
-        </a:xfrm>
-      </p:grpSpPr>
-      <p:sp>
-        <p:nvSpPr>
-          <p:cNvPr id="2" name="Title 1">
-            <a:extLst>
-              <a:ext uri="{FF2B5EF4-FFF2-40B4-BE49-F238E27FC236}">
-                <a16:creationId xmlns:a16="http://schemas.microsoft.com/office/drawing/2014/main" id="{C72773F8-905A-1BDE-04E2-88E09968BCE0}"/>
-              </a:ext>
-            </a:extLst>
-          </p:cNvPr>
-          <p:cNvSpPr>
-            <a:spLocks noGrp="1"/>
-          </p:cNvSpPr>
-          <p:nvPr>
-            <p:ph type="title"/>
-          </p:nvPr>
-        </p:nvSpPr>
-        <p:spPr/>
-        <p:txBody>
-          <a:bodyPr/>
-          <a:lstStyle/>
-          <a:p>
-            <a:r>
-              <a:rPr lang="en-US" dirty="0"/>
-              <a:t>Chapter 7 Challenges</a:t>
-            </a:r>
-          </a:p>
-        </p:txBody>
-      </p:sp>
-      <p:sp>
-        <p:nvSpPr>
-          <p:cNvPr id="3" name="Content Placeholder 2">
-            <a:extLst>
-              <a:ext uri="{FF2B5EF4-FFF2-40B4-BE49-F238E27FC236}">
-                <a16:creationId xmlns:a16="http://schemas.microsoft.com/office/drawing/2014/main" id="{D716745E-3AA0-0429-A63C-B25B0E9C64EB}"/>
-              </a:ext>
-            </a:extLst>
-          </p:cNvPr>
-          <p:cNvSpPr>
-            <a:spLocks noGrp="1"/>
-          </p:cNvSpPr>
-          <p:nvPr>
-            <p:ph idx="1"/>
-          </p:nvPr>
-        </p:nvSpPr>
-        <p:spPr>
-          <a:xfrm>
-            <a:off x="1451580" y="2015732"/>
-            <a:ext cx="7877772" cy="3983624"/>
-          </a:xfrm>
-        </p:spPr>
-        <p:txBody>
-          <a:bodyPr/>
-          <a:lstStyle/>
-          <a:p>
-            <a:r>
-              <a:rPr lang="en-US" dirty="0"/>
-              <a:t>Chapter 7 is on visualizing distributions. </a:t>
-            </a:r>
-          </a:p>
-          <a:p>
-            <a:r>
-              <a:rPr lang="en-US" dirty="0"/>
-              <a:t>We looked at histograms and box and whisker plots in chart types. </a:t>
-            </a:r>
-          </a:p>
-          <a:p>
-            <a:r>
-              <a:rPr lang="en-US" dirty="0"/>
-              <a:t>Several variants, particularly the line versions, can be made with the marks card. </a:t>
-            </a:r>
-          </a:p>
-          <a:p>
-            <a:r>
-              <a:rPr lang="en-US" dirty="0"/>
-              <a:t>Try some…</a:t>
-            </a:r>
-          </a:p>
-          <a:p>
-            <a:pPr lvl="1"/>
-            <a:r>
-              <a:rPr lang="en-US" dirty="0"/>
-              <a:t>Different granularities, different mark types, multiple distributions. </a:t>
-            </a:r>
-          </a:p>
-        </p:txBody>
-      </p:sp>
-      <p:pic>
-        <p:nvPicPr>
-          <p:cNvPr id="4" name="Picture 3">
-            <a:extLst>
-              <a:ext uri="{FF2B5EF4-FFF2-40B4-BE49-F238E27FC236}">
-                <a16:creationId xmlns:a16="http://schemas.microsoft.com/office/drawing/2014/main" id="{8FCF35E0-261A-FB40-D589-33D11C9C0EBF}"/>
-              </a:ext>
-            </a:extLst>
-          </p:cNvPr>
-          <p:cNvPicPr>
-            <a:picLocks noChangeAspect="1"/>
-          </p:cNvPicPr>
-          <p:nvPr/>
-        </p:nvPicPr>
-        <p:blipFill>
-          <a:blip r:embed="rId2"/>
-          <a:srcRect l="13817" t="21142" r="41465"/>
-          <a:stretch>
-            <a:fillRect/>
-          </a:stretch>
-        </p:blipFill>
-        <p:spPr>
-          <a:xfrm>
-            <a:off x="9329351" y="400"/>
-            <a:ext cx="2862649" cy="6857600"/>
-          </a:xfrm>
-          <a:prstGeom prst="rect">
-            <a:avLst/>
-          </a:prstGeom>
-        </p:spPr>
-      </p:pic>
-    </p:spTree>
-    <p:extLst>
-      <p:ext uri="{BB962C8B-B14F-4D97-AF65-F5344CB8AC3E}">
-        <p14:creationId xmlns:p14="http://schemas.microsoft.com/office/powerpoint/2010/main" val="2986027326"/>
-      </p:ext>
-    </p:extLst>
-  </p:cSld>
-  <p:clrMapOvr>
-    <a:masterClrMapping/>
-  </p:clrMapOvr>
-</p:sld>
-</file>
-
-<file path=ppt/slides/slide30.xml><?xml version="1.0" encoding="utf-8"?>
+<file path=ppt/slides/slide31.xml><?xml version="1.0" encoding="utf-8"?>
 <p:sld xmlns:a="http://schemas.openxmlformats.org/drawingml/2006/main" xmlns:r="http://schemas.openxmlformats.org/officeDocument/2006/relationships" xmlns:p="http://schemas.openxmlformats.org/presentationml/2006/main">
   <p:cSld>
     <p:spTree>
@@ -8186,7 +8424,7 @@
 </p:sld>
 </file>
 
-<file path=ppt/slides/slide31.xml><?xml version="1.0" encoding="utf-8"?>
+<file path=ppt/slides/slide32.xml><?xml version="1.0" encoding="utf-8"?>
 <p:sld xmlns:a="http://schemas.openxmlformats.org/drawingml/2006/main" xmlns:r="http://schemas.openxmlformats.org/officeDocument/2006/relationships" xmlns:p="http://schemas.openxmlformats.org/presentationml/2006/main">
   <p:cSld>
     <p:spTree>
@@ -8329,7 +8567,7 @@
 </p:sld>
 </file>
 
-<file path=ppt/slides/slide32.xml><?xml version="1.0" encoding="utf-8"?>
+<file path=ppt/slides/slide33.xml><?xml version="1.0" encoding="utf-8"?>
 <p:sld xmlns:a="http://schemas.openxmlformats.org/drawingml/2006/main" xmlns:r="http://schemas.openxmlformats.org/officeDocument/2006/relationships" xmlns:p="http://schemas.openxmlformats.org/presentationml/2006/main">
   <p:cSld>
     <p:spTree>
@@ -8555,7 +8793,13 @@
       </p:grpSpPr>
       <p:sp>
         <p:nvSpPr>
-          <p:cNvPr id="18436" name="Title 1"/>
+          <p:cNvPr id="2" name="Title 1">
+            <a:extLst>
+              <a:ext uri="{FF2B5EF4-FFF2-40B4-BE49-F238E27FC236}">
+                <a16:creationId xmlns:a16="http://schemas.microsoft.com/office/drawing/2014/main" id="{C72773F8-905A-1BDE-04E2-88E09968BCE0}"/>
+              </a:ext>
+            </a:extLst>
+          </p:cNvPr>
           <p:cNvSpPr>
             <a:spLocks noGrp="1"/>
           </p:cNvSpPr>
@@ -8565,22 +8809,25 @@
         </p:nvSpPr>
         <p:spPr/>
         <p:txBody>
-          <a:bodyPr>
-            <a:noAutofit/>
-          </a:bodyPr>
-          <a:lstStyle/>
-          <a:p>
-            <a:pPr eaLnBrk="1" hangingPunct="1"/>
-            <a:r>
-              <a:rPr lang="en-US" sz="3600" dirty="0"/>
-              <a:t>Data Management</a:t>
-            </a:r>
-          </a:p>
-        </p:txBody>
-      </p:sp>
-      <p:sp>
-        <p:nvSpPr>
-          <p:cNvPr id="3" name="Content Placeholder 2"/>
+          <a:bodyPr/>
+          <a:lstStyle/>
+          <a:p>
+            <a:r>
+              <a:rPr lang="en-US" dirty="0"/>
+              <a:t>Chapter 7 Challenges</a:t>
+            </a:r>
+          </a:p>
+        </p:txBody>
+      </p:sp>
+      <p:sp>
+        <p:nvSpPr>
+          <p:cNvPr id="3" name="Content Placeholder 2">
+            <a:extLst>
+              <a:ext uri="{FF2B5EF4-FFF2-40B4-BE49-F238E27FC236}">
+                <a16:creationId xmlns:a16="http://schemas.microsoft.com/office/drawing/2014/main" id="{D716745E-3AA0-0429-A63C-B25B0E9C64EB}"/>
+              </a:ext>
+            </a:extLst>
+          </p:cNvPr>
           <p:cNvSpPr>
             <a:spLocks noGrp="1"/>
           </p:cNvSpPr>
@@ -8590,78 +8837,93 @@
         </p:nvSpPr>
         <p:spPr>
           <a:xfrm>
-            <a:off x="1451579" y="1853753"/>
-            <a:ext cx="9603275" cy="4199727"/>
+            <a:off x="1451580" y="2015732"/>
+            <a:ext cx="7877772" cy="3983624"/>
           </a:xfrm>
         </p:spPr>
         <p:txBody>
-          <a:bodyPr>
-            <a:normAutofit/>
-          </a:bodyPr>
-          <a:lstStyle/>
-          <a:p>
-            <a:r>
-              <a:rPr lang="en-US" sz="2400" dirty="0"/>
-              <a:t>The relational database environment provides businesses with an efficient and effective way to manage data.</a:t>
-            </a:r>
-          </a:p>
-          <a:p>
-            <a:r>
-              <a:rPr lang="en-US" sz="2400" dirty="0"/>
-              <a:t>Most applications will have their own database for their stuff. </a:t>
-            </a:r>
-          </a:p>
-          <a:p>
-            <a:pPr lvl="1"/>
-            <a:r>
-              <a:rPr lang="en-US" sz="2200" dirty="0"/>
-              <a:t>Every system generates data as stuff happens – sales, products, views…</a:t>
-            </a:r>
-          </a:p>
-          <a:p>
-            <a:pPr lvl="1"/>
-            <a:r>
-              <a:rPr lang="en-US" sz="2200" dirty="0"/>
-              <a:t>This is the OLTP stuff, processing transactions are storing data. </a:t>
-            </a:r>
-          </a:p>
-          <a:p>
-            <a:r>
-              <a:rPr lang="en-US" sz="2400" dirty="0"/>
-              <a:t>Each app’s database will have tables for each entity. </a:t>
-            </a:r>
-          </a:p>
-          <a:p>
-            <a:pPr lvl="1"/>
-            <a:r>
-              <a:rPr lang="en-US" sz="2200" dirty="0"/>
-              <a:t>Each entity* has a key, aka ID number – there’s some overlap here. </a:t>
-            </a:r>
-          </a:p>
-          <a:p>
-            <a:pPr lvl="1"/>
-            <a:r>
-              <a:rPr lang="en-US" sz="2200" dirty="0"/>
-              <a:t>Sales list a customer id, class registrations list student id, </a:t>
-            </a:r>
-            <a:r>
-              <a:rPr lang="en-US" sz="2200" dirty="0" err="1"/>
-              <a:t>etc</a:t>
-            </a:r>
-            <a:r>
-              <a:rPr lang="en-US" sz="2200" dirty="0"/>
-              <a:t>…</a:t>
-            </a:r>
-          </a:p>
-          <a:p>
+          <a:bodyPr/>
+          <a:lstStyle/>
+          <a:p>
+            <a:r>
+              <a:rPr lang="en-US" dirty="0"/>
+              <a:t>Chapter 7 is on visualizing distributions. </a:t>
+            </a:r>
+          </a:p>
+          <a:p>
+            <a:r>
+              <a:rPr lang="en-US" dirty="0"/>
+              <a:t>We looked at histograms and box and whisker plots in chart types. </a:t>
+            </a:r>
+          </a:p>
+          <a:p>
+            <a:r>
+              <a:rPr lang="en-US" dirty="0"/>
+              <a:t>Several variants, particularly the line versions, can be made with the marks card. </a:t>
+            </a:r>
+          </a:p>
+          <a:p>
+            <a:r>
+              <a:rPr lang="en-US" dirty="0"/>
+              <a:t>Try some…</a:t>
+            </a:r>
+          </a:p>
+          <a:p>
+            <a:pPr lvl="1"/>
+            <a:r>
+              <a:rPr lang="en-US" dirty="0"/>
+              <a:t>Different granularities, different mark types, multiple distributions. </a:t>
+            </a:r>
+          </a:p>
+          <a:p>
+            <a:pPr lvl="1"/>
+            <a:r>
+              <a:rPr lang="en-US" dirty="0"/>
+              <a:t>In </a:t>
+            </a:r>
+            <a:r>
+              <a:rPr lang="en-US"/>
+              <a:t>an example soon, there’s a good candidate to use…</a:t>
+            </a:r>
             <a:endParaRPr lang="en-US" dirty="0"/>
           </a:p>
         </p:txBody>
       </p:sp>
+      <p:pic>
+        <p:nvPicPr>
+          <p:cNvPr id="4" name="Picture 3">
+            <a:extLst>
+              <a:ext uri="{FF2B5EF4-FFF2-40B4-BE49-F238E27FC236}">
+                <a16:creationId xmlns:a16="http://schemas.microsoft.com/office/drawing/2014/main" id="{8FCF35E0-261A-FB40-D589-33D11C9C0EBF}"/>
+              </a:ext>
+            </a:extLst>
+          </p:cNvPr>
+          <p:cNvPicPr>
+            <a:picLocks noChangeAspect="1"/>
+          </p:cNvPicPr>
+          <p:nvPr/>
+        </p:nvPicPr>
+        <p:blipFill>
+          <a:blip r:embed="rId2"/>
+          <a:srcRect l="13817" t="21142" r="41465"/>
+          <a:stretch>
+            <a:fillRect/>
+          </a:stretch>
+        </p:blipFill>
+        <p:spPr>
+          <a:xfrm>
+            <a:off x="9329351" y="400"/>
+            <a:ext cx="2862649" cy="6857600"/>
+          </a:xfrm>
+          <a:prstGeom prst="rect">
+            <a:avLst/>
+          </a:prstGeom>
+        </p:spPr>
+      </p:pic>
     </p:spTree>
     <p:extLst>
       <p:ext uri="{BB962C8B-B14F-4D97-AF65-F5344CB8AC3E}">
-        <p14:creationId xmlns:p14="http://schemas.microsoft.com/office/powerpoint/2010/main" val="1147458852"/>
+        <p14:creationId xmlns:p14="http://schemas.microsoft.com/office/powerpoint/2010/main" val="2986027326"/>
       </p:ext>
     </p:extLst>
   </p:cSld>
@@ -8690,13 +8952,7 @@
       </p:grpSpPr>
       <p:sp>
         <p:nvSpPr>
-          <p:cNvPr id="4" name="Title 3">
-            <a:extLst>
-              <a:ext uri="{FF2B5EF4-FFF2-40B4-BE49-F238E27FC236}">
-                <a16:creationId xmlns:a16="http://schemas.microsoft.com/office/drawing/2014/main" id="{DD20917C-471C-5319-721E-5EA30F6AA412}"/>
-              </a:ext>
-            </a:extLst>
-          </p:cNvPr>
+          <p:cNvPr id="18436" name="Title 1"/>
           <p:cNvSpPr>
             <a:spLocks noGrp="1"/>
           </p:cNvSpPr>
@@ -8706,25 +8962,22 @@
         </p:nvSpPr>
         <p:spPr/>
         <p:txBody>
-          <a:bodyPr/>
-          <a:lstStyle/>
-          <a:p>
-            <a:r>
-              <a:rPr lang="en-US" dirty="0"/>
-              <a:t>Database Benefits</a:t>
-            </a:r>
-          </a:p>
-        </p:txBody>
-      </p:sp>
-      <p:sp>
-        <p:nvSpPr>
-          <p:cNvPr id="5" name="Content Placeholder 4">
-            <a:extLst>
-              <a:ext uri="{FF2B5EF4-FFF2-40B4-BE49-F238E27FC236}">
-                <a16:creationId xmlns:a16="http://schemas.microsoft.com/office/drawing/2014/main" id="{1635CA4A-584E-3C26-E067-24A469DACA03}"/>
-              </a:ext>
-            </a:extLst>
-          </p:cNvPr>
+          <a:bodyPr>
+            <a:noAutofit/>
+          </a:bodyPr>
+          <a:lstStyle/>
+          <a:p>
+            <a:pPr eaLnBrk="1" hangingPunct="1"/>
+            <a:r>
+              <a:rPr lang="en-US" sz="3600" dirty="0"/>
+              <a:t>Data Management</a:t>
+            </a:r>
+          </a:p>
+        </p:txBody>
+      </p:sp>
+      <p:sp>
+        <p:nvSpPr>
+          <p:cNvPr id="3" name="Content Placeholder 2"/>
           <p:cNvSpPr>
             <a:spLocks noGrp="1"/>
           </p:cNvSpPr>
@@ -8734,87 +8987,78 @@
         </p:nvSpPr>
         <p:spPr>
           <a:xfrm>
-            <a:off x="1451579" y="1853754"/>
-            <a:ext cx="9603275" cy="4126422"/>
+            <a:off x="1451579" y="1853753"/>
+            <a:ext cx="9603275" cy="4199727"/>
           </a:xfrm>
         </p:spPr>
         <p:txBody>
           <a:bodyPr>
-            <a:normAutofit lnSpcReduction="10000"/>
+            <a:normAutofit/>
           </a:bodyPr>
           <a:lstStyle/>
           <a:p>
             <a:r>
-              <a:rPr lang="en-US" dirty="0"/>
-              <a:t>One copy of data.</a:t>
-            </a:r>
-          </a:p>
-          <a:p>
-            <a:pPr lvl="1"/>
-            <a:r>
-              <a:rPr lang="en-US" dirty="0"/>
-              <a:t>Can’t have multiple values for one thing. </a:t>
-            </a:r>
-          </a:p>
-          <a:p>
-            <a:pPr lvl="1"/>
-            <a:r>
-              <a:rPr lang="en-US" dirty="0"/>
-              <a:t>Changes to values don’t require tracking down many copies of data. </a:t>
-            </a:r>
-          </a:p>
-          <a:p>
-            <a:r>
-              <a:rPr lang="en-US" dirty="0"/>
-              <a:t>Enforcement of integrity rules. </a:t>
-            </a:r>
-          </a:p>
-          <a:p>
-            <a:pPr lvl="1"/>
-            <a:r>
-              <a:rPr lang="en-US" dirty="0"/>
-              <a:t>Mandate that data meets certain rules. </a:t>
-            </a:r>
-          </a:p>
-          <a:p>
-            <a:r>
-              <a:rPr lang="en-US" dirty="0"/>
-              <a:t>Access control.</a:t>
-            </a:r>
-          </a:p>
-          <a:p>
-            <a:pPr lvl="1"/>
-            <a:r>
-              <a:rPr lang="en-US" dirty="0"/>
-              <a:t>Allow read/write access to only those allowed. </a:t>
-            </a:r>
-          </a:p>
-          <a:p>
-            <a:r>
-              <a:rPr lang="en-US" dirty="0"/>
-              <a:t>Data sharing and access.</a:t>
-            </a:r>
-          </a:p>
-          <a:p>
-            <a:pPr lvl="1"/>
-            <a:r>
-              <a:rPr lang="en-US" dirty="0"/>
-              <a:t>Creation, storing, and access to data are separate.</a:t>
-            </a:r>
-          </a:p>
-          <a:p>
-            <a:pPr lvl="1"/>
-            <a:r>
-              <a:rPr lang="en-US" dirty="0"/>
-              <a:t>E.g. One program makes data, another uses it…</a:t>
-            </a:r>
+              <a:rPr lang="en-US" sz="2400" dirty="0"/>
+              <a:t>The relational database environment provides businesses with an efficient and effective way to manage data.</a:t>
+            </a:r>
+          </a:p>
+          <a:p>
+            <a:r>
+              <a:rPr lang="en-US" sz="2400" dirty="0"/>
+              <a:t>Most applications will have their own database for their stuff. </a:t>
+            </a:r>
+          </a:p>
+          <a:p>
+            <a:pPr lvl="1"/>
+            <a:r>
+              <a:rPr lang="en-US" sz="2200" dirty="0"/>
+              <a:t>Every system generates data as stuff happens – sales, products, views…</a:t>
+            </a:r>
+          </a:p>
+          <a:p>
+            <a:pPr lvl="1"/>
+            <a:r>
+              <a:rPr lang="en-US" sz="2200" dirty="0"/>
+              <a:t>This is the OLTP stuff, processing transactions are storing data. </a:t>
+            </a:r>
+          </a:p>
+          <a:p>
+            <a:r>
+              <a:rPr lang="en-US" sz="2400" dirty="0"/>
+              <a:t>Each app’s database will have tables for each entity. </a:t>
+            </a:r>
+          </a:p>
+          <a:p>
+            <a:pPr lvl="1"/>
+            <a:r>
+              <a:rPr lang="en-US" sz="2200" dirty="0"/>
+              <a:t>Each entity* has a key, aka ID number – there’s some overlap here. </a:t>
+            </a:r>
+          </a:p>
+          <a:p>
+            <a:pPr lvl="1"/>
+            <a:r>
+              <a:rPr lang="en-US" sz="2200" dirty="0"/>
+              <a:t>Sales list a customer id, class registrations list student id, </a:t>
+            </a:r>
+            <a:r>
+              <a:rPr lang="en-US" sz="2200" dirty="0" err="1"/>
+              <a:t>etc</a:t>
+            </a:r>
+            <a:r>
+              <a:rPr lang="en-US" sz="2200" dirty="0"/>
+              <a:t>…</a:t>
+            </a:r>
+          </a:p>
+          <a:p>
+            <a:endParaRPr lang="en-US" dirty="0"/>
           </a:p>
         </p:txBody>
       </p:sp>
     </p:spTree>
     <p:extLst>
       <p:ext uri="{BB962C8B-B14F-4D97-AF65-F5344CB8AC3E}">
-        <p14:creationId xmlns:p14="http://schemas.microsoft.com/office/powerpoint/2010/main" val="3755745347"/>
+        <p14:creationId xmlns:p14="http://schemas.microsoft.com/office/powerpoint/2010/main" val="1147458852"/>
       </p:ext>
     </p:extLst>
   </p:cSld>
@@ -8843,10 +9087,10 @@
       </p:grpSpPr>
       <p:sp>
         <p:nvSpPr>
-          <p:cNvPr id="2" name="Title 1">
+          <p:cNvPr id="4" name="Title 3">
             <a:extLst>
               <a:ext uri="{FF2B5EF4-FFF2-40B4-BE49-F238E27FC236}">
-                <a16:creationId xmlns:a16="http://schemas.microsoft.com/office/drawing/2014/main" id="{EC140C7E-F6C4-463C-6796-7CE4D422CA4F}"/>
+                <a16:creationId xmlns:a16="http://schemas.microsoft.com/office/drawing/2014/main" id="{DD20917C-471C-5319-721E-5EA30F6AA412}"/>
               </a:ext>
             </a:extLst>
           </p:cNvPr>
@@ -8864,17 +9108,17 @@
           <a:p>
             <a:r>
               <a:rPr lang="en-US" dirty="0"/>
-              <a:t>ETL and Warehousing</a:t>
-            </a:r>
-          </a:p>
-        </p:txBody>
-      </p:sp>
-      <p:sp>
-        <p:nvSpPr>
-          <p:cNvPr id="3" name="Content Placeholder 2">
+              <a:t>Database Benefits</a:t>
+            </a:r>
+          </a:p>
+        </p:txBody>
+      </p:sp>
+      <p:sp>
+        <p:nvSpPr>
+          <p:cNvPr id="5" name="Content Placeholder 4">
             <a:extLst>
               <a:ext uri="{FF2B5EF4-FFF2-40B4-BE49-F238E27FC236}">
-                <a16:creationId xmlns:a16="http://schemas.microsoft.com/office/drawing/2014/main" id="{2CD43CB7-2C7D-FE96-8D6C-7F01E34D6B73}"/>
+                <a16:creationId xmlns:a16="http://schemas.microsoft.com/office/drawing/2014/main" id="{1635CA4A-584E-3C26-E067-24A469DACA03}"/>
               </a:ext>
             </a:extLst>
           </p:cNvPr>
@@ -8887,65 +9131,79 @@
         </p:nvSpPr>
         <p:spPr>
           <a:xfrm>
-            <a:off x="1451579" y="2015732"/>
-            <a:ext cx="9603275" cy="3901592"/>
+            <a:off x="1451579" y="1853754"/>
+            <a:ext cx="9603275" cy="4126422"/>
           </a:xfrm>
         </p:spPr>
         <p:txBody>
-          <a:bodyPr/>
-          <a:lstStyle/>
-          <a:p>
-            <a:r>
-              <a:rPr lang="en-US" dirty="0"/>
-              <a:t>We generally work off of centralized repositories for data to analyze. </a:t>
-            </a:r>
-          </a:p>
-          <a:p>
-            <a:r>
-              <a:rPr lang="en-US" dirty="0"/>
-              <a:t>Large organizations have data from many sources. </a:t>
-            </a:r>
-          </a:p>
-          <a:p>
-            <a:pPr lvl="1"/>
-            <a:r>
-              <a:rPr lang="en-US" dirty="0"/>
-              <a:t>Website. </a:t>
-            </a:r>
-          </a:p>
-          <a:p>
-            <a:pPr lvl="1"/>
-            <a:r>
-              <a:rPr lang="en-US" dirty="0"/>
-              <a:t>Equipment like factory machines. </a:t>
-            </a:r>
-          </a:p>
-          <a:p>
-            <a:pPr lvl="1"/>
-            <a:r>
-              <a:rPr lang="en-US" dirty="0"/>
-              <a:t>HR, finance, marketing, </a:t>
-            </a:r>
-            <a:r>
-              <a:rPr lang="en-US" dirty="0" err="1"/>
-              <a:t>etc</a:t>
-            </a:r>
-            <a:r>
-              <a:rPr lang="en-US" dirty="0"/>
-              <a:t>…</a:t>
-            </a:r>
-          </a:p>
-          <a:p>
-            <a:pPr lvl="1"/>
-            <a:r>
-              <a:rPr lang="en-US" dirty="0"/>
-              <a:t>External data sources. </a:t>
-            </a:r>
-          </a:p>
-          <a:p>
-            <a:r>
-              <a:rPr lang="en-US" dirty="0"/>
-              <a:t>Consolidating this data is non-trivial. </a:t>
+          <a:bodyPr>
+            <a:normAutofit lnSpcReduction="10000"/>
+          </a:bodyPr>
+          <a:lstStyle/>
+          <a:p>
+            <a:r>
+              <a:rPr lang="en-US" dirty="0"/>
+              <a:t>One copy of data.</a:t>
+            </a:r>
+          </a:p>
+          <a:p>
+            <a:pPr lvl="1"/>
+            <a:r>
+              <a:rPr lang="en-US" dirty="0"/>
+              <a:t>Can’t have multiple values for one thing. </a:t>
+            </a:r>
+          </a:p>
+          <a:p>
+            <a:pPr lvl="1"/>
+            <a:r>
+              <a:rPr lang="en-US" dirty="0"/>
+              <a:t>Changes to values don’t require tracking down many copies of data. </a:t>
+            </a:r>
+          </a:p>
+          <a:p>
+            <a:r>
+              <a:rPr lang="en-US" dirty="0"/>
+              <a:t>Enforcement of integrity rules. </a:t>
+            </a:r>
+          </a:p>
+          <a:p>
+            <a:pPr lvl="1"/>
+            <a:r>
+              <a:rPr lang="en-US" dirty="0"/>
+              <a:t>Mandate that data meets certain rules. </a:t>
+            </a:r>
+          </a:p>
+          <a:p>
+            <a:r>
+              <a:rPr lang="en-US" dirty="0"/>
+              <a:t>Access control.</a:t>
+            </a:r>
+          </a:p>
+          <a:p>
+            <a:pPr lvl="1"/>
+            <a:r>
+              <a:rPr lang="en-US" dirty="0"/>
+              <a:t>Allow read/write access to only those allowed. </a:t>
+            </a:r>
+          </a:p>
+          <a:p>
+            <a:r>
+              <a:rPr lang="en-US" dirty="0"/>
+              <a:t>Data sharing and access.</a:t>
+            </a:r>
+          </a:p>
+          <a:p>
+            <a:pPr lvl="1"/>
+            <a:r>
+              <a:rPr lang="en-US" dirty="0"/>
+              <a:t>Creation, storing, and access to data are separate.</a:t>
+            </a:r>
+          </a:p>
+          <a:p>
+            <a:pPr lvl="1"/>
+            <a:r>
+              <a:rPr lang="en-US" dirty="0"/>
+              <a:t>E.g. One program makes data, another uses it…</a:t>
             </a:r>
           </a:p>
         </p:txBody>
@@ -8953,7 +9211,7 @@
     </p:spTree>
     <p:extLst>
       <p:ext uri="{BB962C8B-B14F-4D97-AF65-F5344CB8AC3E}">
-        <p14:creationId xmlns:p14="http://schemas.microsoft.com/office/powerpoint/2010/main" val="1574936991"/>
+        <p14:creationId xmlns:p14="http://schemas.microsoft.com/office/powerpoint/2010/main" val="3755745347"/>
       </p:ext>
     </p:extLst>
   </p:cSld>
@@ -8985,6 +9243,145 @@
           <p:cNvPr id="2" name="Title 1">
             <a:extLst>
               <a:ext uri="{FF2B5EF4-FFF2-40B4-BE49-F238E27FC236}">
+                <a16:creationId xmlns:a16="http://schemas.microsoft.com/office/drawing/2014/main" id="{EC140C7E-F6C4-463C-6796-7CE4D422CA4F}"/>
+              </a:ext>
+            </a:extLst>
+          </p:cNvPr>
+          <p:cNvSpPr>
+            <a:spLocks noGrp="1"/>
+          </p:cNvSpPr>
+          <p:nvPr>
+            <p:ph type="title"/>
+          </p:nvPr>
+        </p:nvSpPr>
+        <p:spPr/>
+        <p:txBody>
+          <a:bodyPr/>
+          <a:lstStyle/>
+          <a:p>
+            <a:r>
+              <a:rPr lang="en-US" dirty="0"/>
+              <a:t>ETL and Warehousing</a:t>
+            </a:r>
+          </a:p>
+        </p:txBody>
+      </p:sp>
+      <p:sp>
+        <p:nvSpPr>
+          <p:cNvPr id="3" name="Content Placeholder 2">
+            <a:extLst>
+              <a:ext uri="{FF2B5EF4-FFF2-40B4-BE49-F238E27FC236}">
+                <a16:creationId xmlns:a16="http://schemas.microsoft.com/office/drawing/2014/main" id="{2CD43CB7-2C7D-FE96-8D6C-7F01E34D6B73}"/>
+              </a:ext>
+            </a:extLst>
+          </p:cNvPr>
+          <p:cNvSpPr>
+            <a:spLocks noGrp="1"/>
+          </p:cNvSpPr>
+          <p:nvPr>
+            <p:ph idx="1"/>
+          </p:nvPr>
+        </p:nvSpPr>
+        <p:spPr>
+          <a:xfrm>
+            <a:off x="1451579" y="2015732"/>
+            <a:ext cx="9603275" cy="3901592"/>
+          </a:xfrm>
+        </p:spPr>
+        <p:txBody>
+          <a:bodyPr/>
+          <a:lstStyle/>
+          <a:p>
+            <a:r>
+              <a:rPr lang="en-US" dirty="0"/>
+              <a:t>We generally work off of centralized repositories for data to analyze. </a:t>
+            </a:r>
+          </a:p>
+          <a:p>
+            <a:r>
+              <a:rPr lang="en-US" dirty="0"/>
+              <a:t>Large organizations have data from many sources. </a:t>
+            </a:r>
+          </a:p>
+          <a:p>
+            <a:pPr lvl="1"/>
+            <a:r>
+              <a:rPr lang="en-US" dirty="0"/>
+              <a:t>Website. </a:t>
+            </a:r>
+          </a:p>
+          <a:p>
+            <a:pPr lvl="1"/>
+            <a:r>
+              <a:rPr lang="en-US" dirty="0"/>
+              <a:t>Equipment like factory machines. </a:t>
+            </a:r>
+          </a:p>
+          <a:p>
+            <a:pPr lvl="1"/>
+            <a:r>
+              <a:rPr lang="en-US" dirty="0"/>
+              <a:t>HR, finance, marketing, </a:t>
+            </a:r>
+            <a:r>
+              <a:rPr lang="en-US" dirty="0" err="1"/>
+              <a:t>etc</a:t>
+            </a:r>
+            <a:r>
+              <a:rPr lang="en-US" dirty="0"/>
+              <a:t>…</a:t>
+            </a:r>
+          </a:p>
+          <a:p>
+            <a:pPr lvl="1"/>
+            <a:r>
+              <a:rPr lang="en-US" dirty="0"/>
+              <a:t>External data sources. </a:t>
+            </a:r>
+          </a:p>
+          <a:p>
+            <a:r>
+              <a:rPr lang="en-US" dirty="0"/>
+              <a:t>Consolidating this data is non-trivial. </a:t>
+            </a:r>
+          </a:p>
+        </p:txBody>
+      </p:sp>
+    </p:spTree>
+    <p:extLst>
+      <p:ext uri="{BB962C8B-B14F-4D97-AF65-F5344CB8AC3E}">
+        <p14:creationId xmlns:p14="http://schemas.microsoft.com/office/powerpoint/2010/main" val="1574936991"/>
+      </p:ext>
+    </p:extLst>
+  </p:cSld>
+  <p:clrMapOvr>
+    <a:masterClrMapping/>
+  </p:clrMapOvr>
+</p:sld>
+</file>
+
+<file path=ppt/slides/slide8.xml><?xml version="1.0" encoding="utf-8"?>
+<p:sld xmlns:a="http://schemas.openxmlformats.org/drawingml/2006/main" xmlns:r="http://schemas.openxmlformats.org/officeDocument/2006/relationships" xmlns:p="http://schemas.openxmlformats.org/presentationml/2006/main">
+  <p:cSld>
+    <p:spTree>
+      <p:nvGrpSpPr>
+        <p:cNvPr id="1" name=""/>
+        <p:cNvGrpSpPr/>
+        <p:nvPr/>
+      </p:nvGrpSpPr>
+      <p:grpSpPr>
+        <a:xfrm>
+          <a:off x="0" y="0"/>
+          <a:ext cx="0" cy="0"/>
+          <a:chOff x="0" y="0"/>
+          <a:chExt cx="0" cy="0"/>
+        </a:xfrm>
+      </p:grpSpPr>
+      <p:sp>
+        <p:nvSpPr>
+          <p:cNvPr id="2" name="Title 1">
+            <a:extLst>
+              <a:ext uri="{FF2B5EF4-FFF2-40B4-BE49-F238E27FC236}">
                 <a16:creationId xmlns:a16="http://schemas.microsoft.com/office/drawing/2014/main" id="{6CBB9488-81CC-9770-8976-D82712D91565}"/>
               </a:ext>
             </a:extLst>
@@ -9123,7 +9520,7 @@
 </p:sld>
 </file>
 
-<file path=ppt/slides/slide8.xml><?xml version="1.0" encoding="utf-8"?>
+<file path=ppt/slides/slide9.xml><?xml version="1.0" encoding="utf-8"?>
 <p:sld xmlns:a="http://schemas.openxmlformats.org/drawingml/2006/main" xmlns:r="http://schemas.openxmlformats.org/officeDocument/2006/relationships" xmlns:p="http://schemas.openxmlformats.org/presentationml/2006/main">
   <p:cSld>
     <p:spTree>
@@ -9241,222 +9638,6 @@
     <p:extLst>
       <p:ext uri="{BB962C8B-B14F-4D97-AF65-F5344CB8AC3E}">
         <p14:creationId xmlns:p14="http://schemas.microsoft.com/office/powerpoint/2010/main" val="3992535710"/>
-      </p:ext>
-    </p:extLst>
-  </p:cSld>
-  <p:clrMapOvr>
-    <a:masterClrMapping/>
-  </p:clrMapOvr>
-</p:sld>
-</file>
-
-<file path=ppt/slides/slide9.xml><?xml version="1.0" encoding="utf-8"?>
-<p:sld xmlns:a="http://schemas.openxmlformats.org/drawingml/2006/main" xmlns:r="http://schemas.openxmlformats.org/officeDocument/2006/relationships" xmlns:p="http://schemas.openxmlformats.org/presentationml/2006/main">
-  <p:cSld>
-    <p:spTree>
-      <p:nvGrpSpPr>
-        <p:cNvPr id="1" name=""/>
-        <p:cNvGrpSpPr/>
-        <p:nvPr/>
-      </p:nvGrpSpPr>
-      <p:grpSpPr>
-        <a:xfrm>
-          <a:off x="0" y="0"/>
-          <a:ext cx="0" cy="0"/>
-          <a:chOff x="0" y="0"/>
-          <a:chExt cx="0" cy="0"/>
-        </a:xfrm>
-      </p:grpSpPr>
-      <p:sp>
-        <p:nvSpPr>
-          <p:cNvPr id="2" name="Title 1">
-            <a:extLst>
-              <a:ext uri="{FF2B5EF4-FFF2-40B4-BE49-F238E27FC236}">
-                <a16:creationId xmlns:a16="http://schemas.microsoft.com/office/drawing/2014/main" id="{BCE8A05C-692F-A4B8-E540-7B52BD8CD59B}"/>
-              </a:ext>
-            </a:extLst>
-          </p:cNvPr>
-          <p:cNvSpPr>
-            <a:spLocks noGrp="1"/>
-          </p:cNvSpPr>
-          <p:nvPr>
-            <p:ph type="title"/>
-          </p:nvPr>
-        </p:nvSpPr>
-        <p:spPr/>
-        <p:txBody>
-          <a:bodyPr/>
-          <a:lstStyle/>
-          <a:p>
-            <a:r>
-              <a:rPr lang="en-US" dirty="0"/>
-              <a:t>Data Warehouse</a:t>
-            </a:r>
-          </a:p>
-        </p:txBody>
-      </p:sp>
-      <p:sp>
-        <p:nvSpPr>
-          <p:cNvPr id="3" name="Content Placeholder 2">
-            <a:extLst>
-              <a:ext uri="{FF2B5EF4-FFF2-40B4-BE49-F238E27FC236}">
-                <a16:creationId xmlns:a16="http://schemas.microsoft.com/office/drawing/2014/main" id="{39421BB9-D253-A836-5EBE-6C1E99EA1EF4}"/>
-              </a:ext>
-            </a:extLst>
-          </p:cNvPr>
-          <p:cNvSpPr>
-            <a:spLocks noGrp="1"/>
-          </p:cNvSpPr>
-          <p:nvPr>
-            <p:ph idx="1"/>
-          </p:nvPr>
-        </p:nvSpPr>
-        <p:spPr>
-          <a:xfrm>
-            <a:off x="185351" y="1853754"/>
-            <a:ext cx="10869503" cy="4199727"/>
-          </a:xfrm>
-        </p:spPr>
-        <p:txBody>
-          <a:bodyPr/>
-          <a:lstStyle/>
-          <a:p>
-            <a:r>
-              <a:rPr lang="en-US" dirty="0"/>
-              <a:t>The ETL process normally loads our data into a special database - the data warehouse. </a:t>
-            </a:r>
-          </a:p>
-          <a:p>
-            <a:pPr lvl="1"/>
-            <a:r>
-              <a:rPr lang="en-US" dirty="0"/>
-              <a:t>Usually periodically – hourly, nightly, </a:t>
-            </a:r>
-            <a:r>
-              <a:rPr lang="en-US" dirty="0" err="1"/>
-              <a:t>etc</a:t>
-            </a:r>
-            <a:r>
-              <a:rPr lang="en-US" dirty="0"/>
-              <a:t>…</a:t>
-            </a:r>
-          </a:p>
-          <a:p>
-            <a:r>
-              <a:rPr lang="en-US" dirty="0"/>
-              <a:t>The data warehouse is a large </a:t>
-            </a:r>
-            <a:r>
-              <a:rPr lang="en-US" dirty="0" err="1"/>
-              <a:t>db</a:t>
-            </a:r>
-            <a:r>
-              <a:rPr lang="en-US" dirty="0"/>
-              <a:t> that is intended for archiving and analysis. </a:t>
-            </a:r>
-          </a:p>
-          <a:p>
-            <a:pPr lvl="1"/>
-            <a:r>
-              <a:rPr lang="en-US" dirty="0"/>
-              <a:t>Not used with live transactions or current data. </a:t>
-            </a:r>
-          </a:p>
-          <a:p>
-            <a:pPr lvl="1"/>
-            <a:r>
-              <a:rPr lang="en-US" dirty="0"/>
-              <a:t>Stores (ideally) all historical data that the organization needs – central source o’ truth. </a:t>
-            </a:r>
-          </a:p>
-          <a:p>
-            <a:pPr lvl="1"/>
-            <a:r>
-              <a:rPr lang="en-US" dirty="0"/>
-              <a:t>Allows for data from different sources to be integrated for analysis. </a:t>
-            </a:r>
-          </a:p>
-          <a:p>
-            <a:pPr lvl="1"/>
-            <a:r>
-              <a:rPr lang="en-US" dirty="0"/>
-              <a:t>All the data is consistent and clean once it gets here, so analyst and just analyze. </a:t>
-            </a:r>
-          </a:p>
-          <a:p>
-            <a:r>
-              <a:rPr lang="en-US" dirty="0"/>
-              <a:t>Data is stored with many entities and must be connected for analysis. </a:t>
-            </a:r>
-          </a:p>
-          <a:p>
-            <a:pPr lvl="1"/>
-            <a:r>
-              <a:rPr lang="en-US" dirty="0"/>
-              <a:t>ER diagrams and </a:t>
-            </a:r>
-            <a:r>
-              <a:rPr lang="en-US" dirty="0" err="1"/>
-              <a:t>dicts</a:t>
-            </a:r>
-            <a:r>
-              <a:rPr lang="en-US" dirty="0"/>
-              <a:t> show layout, and we must join to make usable data. </a:t>
-            </a:r>
-          </a:p>
-        </p:txBody>
-      </p:sp>
-      <p:pic>
-        <p:nvPicPr>
-          <p:cNvPr id="3074" name="Picture 2" descr="What Is Cloud Data Warehousing">
-            <a:extLst>
-              <a:ext uri="{FF2B5EF4-FFF2-40B4-BE49-F238E27FC236}">
-                <a16:creationId xmlns:a16="http://schemas.microsoft.com/office/drawing/2014/main" id="{311AABCD-8C42-D7FA-AA95-265BB746FBFD}"/>
-              </a:ext>
-            </a:extLst>
-          </p:cNvPr>
-          <p:cNvPicPr>
-            <a:picLocks noChangeAspect="1" noChangeArrowheads="1"/>
-          </p:cNvPicPr>
-          <p:nvPr/>
-        </p:nvPicPr>
-        <p:blipFill rotWithShape="1">
-          <a:blip r:embed="rId2">
-            <a:extLst>
-              <a:ext uri="{28A0092B-C50C-407E-A947-70E740481C1C}">
-                <a14:useLocalDpi xmlns:a14="http://schemas.microsoft.com/office/drawing/2010/main" val="0"/>
-              </a:ext>
-            </a:extLst>
-          </a:blip>
-          <a:srcRect l="8493" r="7239"/>
-          <a:stretch>
-            <a:fillRect/>
-          </a:stretch>
-        </p:blipFill>
-        <p:spPr bwMode="auto">
-          <a:xfrm>
-            <a:off x="9090454" y="3429000"/>
-            <a:ext cx="3101546" cy="3429000"/>
-          </a:xfrm>
-          <a:prstGeom prst="rect">
-            <a:avLst/>
-          </a:prstGeom>
-          <a:noFill/>
-          <a:extLst>
-            <a:ext uri="{909E8E84-426E-40DD-AFC4-6F175D3DCCD1}">
-              <a14:hiddenFill xmlns:a14="http://schemas.microsoft.com/office/drawing/2010/main">
-                <a:solidFill>
-                  <a:srgbClr val="FFFFFF"/>
-                </a:solidFill>
-              </a14:hiddenFill>
-            </a:ext>
-          </a:extLst>
-        </p:spPr>
-      </p:pic>
-    </p:spTree>
-    <p:extLst>
-      <p:ext uri="{BB962C8B-B14F-4D97-AF65-F5344CB8AC3E}">
-        <p14:creationId xmlns:p14="http://schemas.microsoft.com/office/powerpoint/2010/main" val="3290591874"/>
       </p:ext>
     </p:extLst>
   </p:cSld>

--- a/slides/chapter_6_joins.pptx
+++ b/slides/chapter_6_joins.pptx
@@ -8879,13 +8879,8 @@
             <a:pPr lvl="1"/>
             <a:r>
               <a:rPr lang="en-US" dirty="0"/>
-              <a:t>In </a:t>
-            </a:r>
-            <a:r>
-              <a:rPr lang="en-US"/>
-              <a:t>an example soon, there’s a good candidate to use…</a:t>
-            </a:r>
-            <a:endParaRPr lang="en-US" dirty="0"/>
+              <a:t>In an example soon, there’s a good candidate to use…</a:t>
+            </a:r>
           </a:p>
         </p:txBody>
       </p:sp>

--- a/slides/chapter_6_joins.pptx
+++ b/slides/chapter_6_joins.pptx
@@ -5,7 +5,7 @@
     <p:sldMasterId id="2147483660" r:id="rId1"/>
   </p:sldMasterIdLst>
   <p:notesMasterIdLst>
-    <p:notesMasterId r:id="rId35"/>
+    <p:notesMasterId r:id="rId36"/>
   </p:notesMasterIdLst>
   <p:sldIdLst>
     <p:sldId id="374" r:id="rId2"/>
@@ -38,9 +38,10 @@
     <p:sldId id="358" r:id="rId29"/>
     <p:sldId id="359" r:id="rId30"/>
     <p:sldId id="360" r:id="rId31"/>
-    <p:sldId id="368" r:id="rId32"/>
-    <p:sldId id="372" r:id="rId33"/>
-    <p:sldId id="365" r:id="rId34"/>
+    <p:sldId id="376" r:id="rId32"/>
+    <p:sldId id="368" r:id="rId33"/>
+    <p:sldId id="372" r:id="rId34"/>
+    <p:sldId id="365" r:id="rId35"/>
   </p:sldIdLst>
   <p:sldSz cx="12192000" cy="6858000"/>
   <p:notesSz cx="6858000" cy="9144000"/>
@@ -139,6 +140,11 @@
       </a:defRPr>
     </a:lvl9pPr>
   </p:defaultTextStyle>
+  <p:extLst>
+    <p:ext uri="{EFAFB233-063F-42B5-8137-9DF3F51BA10A}">
+      <p15:sldGuideLst xmlns:p15="http://schemas.microsoft.com/office/powerpoint/2012/main"/>
+    </p:ext>
+  </p:extLst>
 </p:presentation>
 </file>
 
@@ -224,7 +230,7 @@
           <a:p>
             <a:fld id="{27A29A22-AD26-424E-97E1-6600CB23E09A}" type="datetimeFigureOut">
               <a:rPr lang="en-US" smtClean="0"/>
-              <a:t>9/22/25</a:t>
+              <a:t>1/30/26</a:t>
             </a:fld>
             <a:endParaRPr lang="en-US"/>
           </a:p>
@@ -1566,7 +1572,7 @@
           <a:p>
             <a:fld id="{914FC9DC-8DDD-6E4D-8614-EDD71F05B5A3}" type="datetimeFigureOut">
               <a:rPr lang="en-US" smtClean="0"/>
-              <a:t>9/22/25</a:t>
+              <a:t>1/30/26</a:t>
             </a:fld>
             <a:endParaRPr lang="en-US"/>
           </a:p>
@@ -1777,7 +1783,7 @@
           <a:p>
             <a:fld id="{914FC9DC-8DDD-6E4D-8614-EDD71F05B5A3}" type="datetimeFigureOut">
               <a:rPr lang="en-US" smtClean="0"/>
-              <a:t>9/22/25</a:t>
+              <a:t>1/30/26</a:t>
             </a:fld>
             <a:endParaRPr lang="en-US"/>
           </a:p>
@@ -1992,7 +1998,7 @@
           <a:p>
             <a:fld id="{914FC9DC-8DDD-6E4D-8614-EDD71F05B5A3}" type="datetimeFigureOut">
               <a:rPr lang="en-US" smtClean="0"/>
-              <a:t>9/22/25</a:t>
+              <a:t>1/30/26</a:t>
             </a:fld>
             <a:endParaRPr lang="en-US"/>
           </a:p>
@@ -2193,7 +2199,7 @@
           <a:p>
             <a:fld id="{914FC9DC-8DDD-6E4D-8614-EDD71F05B5A3}" type="datetimeFigureOut">
               <a:rPr lang="en-US" smtClean="0"/>
-              <a:t>9/22/25</a:t>
+              <a:t>1/30/26</a:t>
             </a:fld>
             <a:endParaRPr lang="en-US"/>
           </a:p>
@@ -2472,7 +2478,7 @@
           <a:p>
             <a:fld id="{914FC9DC-8DDD-6E4D-8614-EDD71F05B5A3}" type="datetimeFigureOut">
               <a:rPr lang="en-US" smtClean="0"/>
-              <a:t>9/22/25</a:t>
+              <a:t>1/30/26</a:t>
             </a:fld>
             <a:endParaRPr lang="en-US"/>
           </a:p>
@@ -2740,7 +2746,7 @@
           <a:p>
             <a:fld id="{914FC9DC-8DDD-6E4D-8614-EDD71F05B5A3}" type="datetimeFigureOut">
               <a:rPr lang="en-US" smtClean="0"/>
-              <a:t>9/22/25</a:t>
+              <a:t>1/30/26</a:t>
             </a:fld>
             <a:endParaRPr lang="en-US"/>
           </a:p>
@@ -3156,7 +3162,7 @@
           <a:p>
             <a:fld id="{914FC9DC-8DDD-6E4D-8614-EDD71F05B5A3}" type="datetimeFigureOut">
               <a:rPr lang="en-US" smtClean="0"/>
-              <a:t>9/22/25</a:t>
+              <a:t>1/30/26</a:t>
             </a:fld>
             <a:endParaRPr lang="en-US"/>
           </a:p>
@@ -3305,7 +3311,7 @@
           <a:p>
             <a:fld id="{914FC9DC-8DDD-6E4D-8614-EDD71F05B5A3}" type="datetimeFigureOut">
               <a:rPr lang="en-US" smtClean="0"/>
-              <a:t>9/22/25</a:t>
+              <a:t>1/30/26</a:t>
             </a:fld>
             <a:endParaRPr lang="en-US"/>
           </a:p>
@@ -3431,7 +3437,7 @@
           <a:p>
             <a:fld id="{914FC9DC-8DDD-6E4D-8614-EDD71F05B5A3}" type="datetimeFigureOut">
               <a:rPr lang="en-US" smtClean="0"/>
-              <a:t>9/22/25</a:t>
+              <a:t>1/30/26</a:t>
             </a:fld>
             <a:endParaRPr lang="en-US"/>
           </a:p>
@@ -3682,7 +3688,7 @@
           <a:p>
             <a:fld id="{914FC9DC-8DDD-6E4D-8614-EDD71F05B5A3}" type="datetimeFigureOut">
               <a:rPr lang="en-US" smtClean="0"/>
-              <a:t>9/22/25</a:t>
+              <a:t>1/30/26</a:t>
             </a:fld>
             <a:endParaRPr lang="en-US"/>
           </a:p>
@@ -4127,7 +4133,7 @@
           <a:p>
             <a:fld id="{914FC9DC-8DDD-6E4D-8614-EDD71F05B5A3}" type="datetimeFigureOut">
               <a:rPr lang="en-US" smtClean="0"/>
-              <a:t>9/22/25</a:t>
+              <a:t>1/30/26</a:t>
             </a:fld>
             <a:endParaRPr lang="en-US"/>
           </a:p>
@@ -4294,6 +4300,13 @@
             <a:schemeClr val="lt1"/>
           </a:fontRef>
         </p:style>
+        <p:txBody>
+          <a:bodyPr/>
+          <a:lstStyle/>
+          <a:p>
+            <a:endParaRPr lang="en-US"/>
+          </a:p>
+        </p:txBody>
       </p:sp>
       <p:pic>
         <p:nvPicPr>
@@ -4454,7 +4467,7 @@
           <a:p>
             <a:fld id="{914FC9DC-8DDD-6E4D-8614-EDD71F05B5A3}" type="datetimeFigureOut">
               <a:rPr lang="en-US" smtClean="0"/>
-              <a:t>9/22/25</a:t>
+              <a:t>1/30/26</a:t>
             </a:fld>
             <a:endParaRPr lang="en-US"/>
           </a:p>
@@ -8254,6 +8267,182 @@
       </p:grpSpPr>
       <p:sp>
         <p:nvSpPr>
+          <p:cNvPr id="3" name="Title 2">
+            <a:extLst>
+              <a:ext uri="{FF2B5EF4-FFF2-40B4-BE49-F238E27FC236}">
+                <a16:creationId xmlns:a16="http://schemas.microsoft.com/office/drawing/2014/main" id="{BB7F5A14-E41F-45A2-A8D7-C8DA156940F4}"/>
+              </a:ext>
+            </a:extLst>
+          </p:cNvPr>
+          <p:cNvSpPr>
+            <a:spLocks noGrp="1"/>
+          </p:cNvSpPr>
+          <p:nvPr>
+            <p:ph type="title"/>
+          </p:nvPr>
+        </p:nvSpPr>
+        <p:spPr/>
+        <p:txBody>
+          <a:bodyPr/>
+          <a:lstStyle/>
+          <a:p>
+            <a:r>
+              <a:rPr lang="en-US" dirty="0"/>
+              <a:t>Multiple Criteria</a:t>
+            </a:r>
+          </a:p>
+        </p:txBody>
+      </p:sp>
+      <p:sp>
+        <p:nvSpPr>
+          <p:cNvPr id="4" name="Content Placeholder 3">
+            <a:extLst>
+              <a:ext uri="{FF2B5EF4-FFF2-40B4-BE49-F238E27FC236}">
+                <a16:creationId xmlns:a16="http://schemas.microsoft.com/office/drawing/2014/main" id="{F0836808-1184-3867-98EC-AEF5A5FB312B}"/>
+              </a:ext>
+            </a:extLst>
+          </p:cNvPr>
+          <p:cNvSpPr>
+            <a:spLocks noGrp="1"/>
+          </p:cNvSpPr>
+          <p:nvPr>
+            <p:ph idx="1"/>
+          </p:nvPr>
+        </p:nvSpPr>
+        <p:spPr>
+          <a:xfrm>
+            <a:off x="5445826" y="2015732"/>
+            <a:ext cx="6746174" cy="4037475"/>
+          </a:xfrm>
+        </p:spPr>
+        <p:txBody>
+          <a:bodyPr/>
+          <a:lstStyle/>
+          <a:p>
+            <a:r>
+              <a:rPr lang="en-US" dirty="0"/>
+              <a:t>Some scenarios require more than one join criteria. </a:t>
+            </a:r>
+          </a:p>
+          <a:p>
+            <a:r>
+              <a:rPr lang="en-US" dirty="0"/>
+              <a:t>The most common case is data with time-based iterations. </a:t>
+            </a:r>
+          </a:p>
+          <a:p>
+            <a:pPr lvl="1"/>
+            <a:r>
+              <a:rPr lang="en-US" dirty="0"/>
+              <a:t>I.e. the same data each year, month, hour, </a:t>
+            </a:r>
+            <a:r>
+              <a:rPr lang="en-US" dirty="0" err="1"/>
+              <a:t>etc</a:t>
+            </a:r>
+            <a:r>
+              <a:rPr lang="en-US" dirty="0"/>
+              <a:t>…</a:t>
+            </a:r>
+          </a:p>
+          <a:p>
+            <a:pPr lvl="1"/>
+            <a:r>
+              <a:rPr lang="en-US" dirty="0"/>
+              <a:t>Screenshot is data per state per year. </a:t>
+            </a:r>
+          </a:p>
+          <a:p>
+            <a:r>
+              <a:rPr lang="en-US" dirty="0"/>
+              <a:t>We usually need to specify 2+ criteria to make things work. </a:t>
+            </a:r>
+          </a:p>
+          <a:p>
+            <a:pPr lvl="1"/>
+            <a:r>
+              <a:rPr lang="en-US" dirty="0"/>
+              <a:t>One join condition for each ‘per’. </a:t>
+            </a:r>
+          </a:p>
+          <a:p>
+            <a:pPr lvl="1"/>
+            <a:r>
+              <a:rPr lang="en-US" dirty="0"/>
+              <a:t>Joining only on state means every year for California matches with every other year for California. </a:t>
+            </a:r>
+          </a:p>
+          <a:p>
+            <a:pPr lvl="1"/>
+            <a:r>
+              <a:rPr lang="en-US" dirty="0"/>
+              <a:t>Adding year means those Californias only join when same year. </a:t>
+            </a:r>
+          </a:p>
+        </p:txBody>
+      </p:sp>
+      <p:pic>
+        <p:nvPicPr>
+          <p:cNvPr id="5" name="Picture 4">
+            <a:extLst>
+              <a:ext uri="{FF2B5EF4-FFF2-40B4-BE49-F238E27FC236}">
+                <a16:creationId xmlns:a16="http://schemas.microsoft.com/office/drawing/2014/main" id="{FE22B04F-4600-DAEA-12AF-24C8F1BBE9A9}"/>
+              </a:ext>
+            </a:extLst>
+          </p:cNvPr>
+          <p:cNvPicPr>
+            <a:picLocks noChangeAspect="1"/>
+          </p:cNvPicPr>
+          <p:nvPr/>
+        </p:nvPicPr>
+        <p:blipFill>
+          <a:blip r:embed="rId2"/>
+          <a:stretch>
+            <a:fillRect/>
+          </a:stretch>
+        </p:blipFill>
+        <p:spPr>
+          <a:xfrm>
+            <a:off x="228362" y="2015732"/>
+            <a:ext cx="5217464" cy="4037475"/>
+          </a:xfrm>
+          <a:prstGeom prst="rect">
+            <a:avLst/>
+          </a:prstGeom>
+        </p:spPr>
+      </p:pic>
+    </p:spTree>
+    <p:extLst>
+      <p:ext uri="{BB962C8B-B14F-4D97-AF65-F5344CB8AC3E}">
+        <p14:creationId xmlns:p14="http://schemas.microsoft.com/office/powerpoint/2010/main" val="3869812810"/>
+      </p:ext>
+    </p:extLst>
+  </p:cSld>
+  <p:clrMapOvr>
+    <a:masterClrMapping/>
+  </p:clrMapOvr>
+</p:sld>
+</file>
+
+<file path=ppt/slides/slide32.xml><?xml version="1.0" encoding="utf-8"?>
+<p:sld xmlns:a="http://schemas.openxmlformats.org/drawingml/2006/main" xmlns:r="http://schemas.openxmlformats.org/officeDocument/2006/relationships" xmlns:p="http://schemas.openxmlformats.org/presentationml/2006/main">
+  <p:cSld>
+    <p:spTree>
+      <p:nvGrpSpPr>
+        <p:cNvPr id="1" name=""/>
+        <p:cNvGrpSpPr/>
+        <p:nvPr/>
+      </p:nvGrpSpPr>
+      <p:grpSpPr>
+        <a:xfrm>
+          <a:off x="0" y="0"/>
+          <a:ext cx="0" cy="0"/>
+          <a:chOff x="0" y="0"/>
+          <a:chExt cx="0" cy="0"/>
+        </a:xfrm>
+      </p:grpSpPr>
+      <p:sp>
+        <p:nvSpPr>
           <p:cNvPr id="2" name="Title 1">
             <a:extLst>
               <a:ext uri="{FF2B5EF4-FFF2-40B4-BE49-F238E27FC236}">
@@ -8424,7 +8613,7 @@
 </p:sld>
 </file>
 
-<file path=ppt/slides/slide32.xml><?xml version="1.0" encoding="utf-8"?>
+<file path=ppt/slides/slide33.xml><?xml version="1.0" encoding="utf-8"?>
 <p:sld xmlns:a="http://schemas.openxmlformats.org/drawingml/2006/main" xmlns:r="http://schemas.openxmlformats.org/officeDocument/2006/relationships" xmlns:p="http://schemas.openxmlformats.org/presentationml/2006/main">
   <p:cSld>
     <p:spTree>
@@ -8567,7 +8756,7 @@
 </p:sld>
 </file>
 
-<file path=ppt/slides/slide33.xml><?xml version="1.0" encoding="utf-8"?>
+<file path=ppt/slides/slide34.xml><?xml version="1.0" encoding="utf-8"?>
 <p:sld xmlns:a="http://schemas.openxmlformats.org/drawingml/2006/main" xmlns:r="http://schemas.openxmlformats.org/officeDocument/2006/relationships" xmlns:p="http://schemas.openxmlformats.org/presentationml/2006/main">
   <p:cSld>
     <p:spTree>
@@ -8775,7 +8964,7 @@
 </file>
 
 <file path=ppt/slides/slide4.xml><?xml version="1.0" encoding="utf-8"?>
-<p:sld xmlns:a="http://schemas.openxmlformats.org/drawingml/2006/main" xmlns:r="http://schemas.openxmlformats.org/officeDocument/2006/relationships" xmlns:p="http://schemas.openxmlformats.org/presentationml/2006/main">
+<p:sld xmlns:a="http://schemas.openxmlformats.org/drawingml/2006/main" xmlns:r="http://schemas.openxmlformats.org/officeDocument/2006/relationships" xmlns:p="http://schemas.openxmlformats.org/presentationml/2006/main" show="0">
   <p:cSld>
     <p:spTree>
       <p:nvGrpSpPr>

--- a/slides/chapter_6_joins.pptx
+++ b/slides/chapter_6_joins.pptx
@@ -5011,6 +5011,18 @@
             <a:pPr lvl="1"/>
             <a:r>
               <a:rPr lang="en-US" dirty="0"/>
+              <a:t>A closer look </a:t>
+            </a:r>
+            <a:r>
+              <a:rPr lang="en-US"/>
+              <a:t>at datasheets. </a:t>
+            </a:r>
+            <a:endParaRPr lang="en-US" dirty="0"/>
+          </a:p>
+          <a:p>
+            <a:pPr lvl="1"/>
+            <a:r>
+              <a:rPr lang="en-US" dirty="0"/>
               <a:t>Data warehousing and ETL theory. </a:t>
             </a:r>
           </a:p>
@@ -5019,13 +5031,6 @@
             <a:r>
               <a:rPr lang="en-US" dirty="0"/>
               <a:t>Joining datasets. </a:t>
-            </a:r>
-          </a:p>
-          <a:p>
-            <a:pPr lvl="1"/>
-            <a:r>
-              <a:rPr lang="en-US" dirty="0"/>
-              <a:t>Chapter 7, distribution visualizations – we covered in chart types, read it, it’s quite short. </a:t>
             </a:r>
           </a:p>
           <a:p>
